--- a/data/industry_study/generated_revision/fidc_case_studies.pptx
+++ b/data/industry_study/generated_revision/fidc_case_studies.pptx
@@ -2,34 +2,35 @@
 <file path=ppt/presentation.xml><?xml version="1.0" encoding="utf-8"?>
 <p:presentation xmlns:p="http://schemas.openxmlformats.org/presentationml/2006/main">
   <p:sldMasterIdLst>
-    <p:sldMasterId xmlns:r="http://schemas.openxmlformats.org/officeDocument/2006/relationships" id="2147483648" r:id="R55347c0b92b94e75"/>
+    <p:sldMasterId xmlns:r="http://schemas.openxmlformats.org/officeDocument/2006/relationships" id="2147483648" r:id="R39894d65808c4088"/>
   </p:sldMasterIdLst>
   <p:notesMasterIdLst>
-    <p:notesMasterId xmlns:r="http://schemas.openxmlformats.org/officeDocument/2006/relationships" r:id="R766fd945e38e46b1"/>
+    <p:notesMasterId xmlns:r="http://schemas.openxmlformats.org/officeDocument/2006/relationships" r:id="R48e2ffe5b3984734"/>
   </p:notesMasterIdLst>
   <p:sldIdLst>
-    <p:sldId xmlns:r="http://schemas.openxmlformats.org/officeDocument/2006/relationships" id="256" r:id="R1c0ebafc49fb4bfc"/>
-    <p:sldId xmlns:r="http://schemas.openxmlformats.org/officeDocument/2006/relationships" id="257" r:id="Rdd27cf59d81c4177"/>
-    <p:sldId xmlns:r="http://schemas.openxmlformats.org/officeDocument/2006/relationships" id="258" r:id="R09b4640ffaaf40eb"/>
-    <p:sldId xmlns:r="http://schemas.openxmlformats.org/officeDocument/2006/relationships" id="259" r:id="Rb10985622db64b90"/>
-    <p:sldId xmlns:r="http://schemas.openxmlformats.org/officeDocument/2006/relationships" id="260" r:id="R855ab0c595e94c76"/>
-    <p:sldId xmlns:r="http://schemas.openxmlformats.org/officeDocument/2006/relationships" id="261" r:id="R75143e52512a466a"/>
-    <p:sldId xmlns:r="http://schemas.openxmlformats.org/officeDocument/2006/relationships" id="262" r:id="Rc1f9791e8a15436e"/>
-    <p:sldId xmlns:r="http://schemas.openxmlformats.org/officeDocument/2006/relationships" id="263" r:id="Rd833500a96b54b9c"/>
-    <p:sldId xmlns:r="http://schemas.openxmlformats.org/officeDocument/2006/relationships" id="264" r:id="Re7df41d83a624432"/>
-    <p:sldId xmlns:r="http://schemas.openxmlformats.org/officeDocument/2006/relationships" id="265" r:id="R23e83e976e6542eb"/>
-    <p:sldId xmlns:r="http://schemas.openxmlformats.org/officeDocument/2006/relationships" id="266" r:id="R5c6947d523464860"/>
-    <p:sldId xmlns:r="http://schemas.openxmlformats.org/officeDocument/2006/relationships" id="267" r:id="R199fb798513c4c63"/>
-    <p:sldId xmlns:r="http://schemas.openxmlformats.org/officeDocument/2006/relationships" id="268" r:id="R57744817de68424f"/>
-    <p:sldId xmlns:r="http://schemas.openxmlformats.org/officeDocument/2006/relationships" id="269" r:id="Rd947cd0b419e45cc"/>
-    <p:sldId xmlns:r="http://schemas.openxmlformats.org/officeDocument/2006/relationships" id="270" r:id="R85c22d593b574e2a"/>
-    <p:sldId xmlns:r="http://schemas.openxmlformats.org/officeDocument/2006/relationships" id="271" r:id="R85408739619e4b60"/>
-    <p:sldId xmlns:r="http://schemas.openxmlformats.org/officeDocument/2006/relationships" id="272" r:id="R10f73f1676a346c8"/>
-    <p:sldId xmlns:r="http://schemas.openxmlformats.org/officeDocument/2006/relationships" id="273" r:id="R440fed2fd6aa4db9"/>
-    <p:sldId xmlns:r="http://schemas.openxmlformats.org/officeDocument/2006/relationships" id="274" r:id="R72f2b1c61e2849f4"/>
-    <p:sldId xmlns:r="http://schemas.openxmlformats.org/officeDocument/2006/relationships" id="275" r:id="R93f4104099b24f27"/>
-    <p:sldId xmlns:r="http://schemas.openxmlformats.org/officeDocument/2006/relationships" id="276" r:id="Rcb8e2e8e1aa44405"/>
-    <p:sldId xmlns:r="http://schemas.openxmlformats.org/officeDocument/2006/relationships" id="277" r:id="Rce21de3813e14093"/>
+    <p:sldId xmlns:r="http://schemas.openxmlformats.org/officeDocument/2006/relationships" id="256" r:id="R58cf943e3afa4958"/>
+    <p:sldId xmlns:r="http://schemas.openxmlformats.org/officeDocument/2006/relationships" id="257" r:id="R5bd3bdf8b92746c6"/>
+    <p:sldId xmlns:r="http://schemas.openxmlformats.org/officeDocument/2006/relationships" id="258" r:id="Rfb861653c2524e69"/>
+    <p:sldId xmlns:r="http://schemas.openxmlformats.org/officeDocument/2006/relationships" id="259" r:id="R7c42cfec57de44ec"/>
+    <p:sldId xmlns:r="http://schemas.openxmlformats.org/officeDocument/2006/relationships" id="260" r:id="R4da26030126f4c0b"/>
+    <p:sldId xmlns:r="http://schemas.openxmlformats.org/officeDocument/2006/relationships" id="261" r:id="Rf7b4c646d8364f8b"/>
+    <p:sldId xmlns:r="http://schemas.openxmlformats.org/officeDocument/2006/relationships" id="262" r:id="Rf78a328271c741d7"/>
+    <p:sldId xmlns:r="http://schemas.openxmlformats.org/officeDocument/2006/relationships" id="263" r:id="R00c6640a71824dfb"/>
+    <p:sldId xmlns:r="http://schemas.openxmlformats.org/officeDocument/2006/relationships" id="264" r:id="R30e5c0c749374551"/>
+    <p:sldId xmlns:r="http://schemas.openxmlformats.org/officeDocument/2006/relationships" id="265" r:id="R3f784a8ced0a481c"/>
+    <p:sldId xmlns:r="http://schemas.openxmlformats.org/officeDocument/2006/relationships" id="266" r:id="R08d65b8ce4b042a2"/>
+    <p:sldId xmlns:r="http://schemas.openxmlformats.org/officeDocument/2006/relationships" id="267" r:id="R14e0e2d162174f38"/>
+    <p:sldId xmlns:r="http://schemas.openxmlformats.org/officeDocument/2006/relationships" id="268" r:id="R7b68cf022acc44d5"/>
+    <p:sldId xmlns:r="http://schemas.openxmlformats.org/officeDocument/2006/relationships" id="269" r:id="Rbadfb20040d24302"/>
+    <p:sldId xmlns:r="http://schemas.openxmlformats.org/officeDocument/2006/relationships" id="270" r:id="Rf544efc80e324999"/>
+    <p:sldId xmlns:r="http://schemas.openxmlformats.org/officeDocument/2006/relationships" id="271" r:id="R978350cc02af4d3d"/>
+    <p:sldId xmlns:r="http://schemas.openxmlformats.org/officeDocument/2006/relationships" id="272" r:id="Rf7eeffaa7035455b"/>
+    <p:sldId xmlns:r="http://schemas.openxmlformats.org/officeDocument/2006/relationships" id="273" r:id="R50a60eba4c384afa"/>
+    <p:sldId xmlns:r="http://schemas.openxmlformats.org/officeDocument/2006/relationships" id="274" r:id="Redca74eccb8f4033"/>
+    <p:sldId xmlns:r="http://schemas.openxmlformats.org/officeDocument/2006/relationships" id="275" r:id="R61111ed5820644ab"/>
+    <p:sldId xmlns:r="http://schemas.openxmlformats.org/officeDocument/2006/relationships" id="276" r:id="R589c28feec2e4a31"/>
+    <p:sldId xmlns:r="http://schemas.openxmlformats.org/officeDocument/2006/relationships" id="277" r:id="R74f6cb1ffaa844e2"/>
+    <p:sldId xmlns:r="http://schemas.openxmlformats.org/officeDocument/2006/relationships" id="278" r:id="R2331676704934b38"/>
   </p:sldIdLst>
   <p:sldSz cx="12192000" cy="6858000"/>
   <p:notesSz cx="6858000" cy="9144000"/>
@@ -638,17 +639,37 @@
           </a:p>
           <a:p xmlns:a="http://schemas.openxmlformats.org/drawingml/2006/main">
             <a:r>
-              <a:t>- CVM/ANBIMA — base de PL ex-FIC e taxonomia aplicada no artefato setorial, competência jun/2026.</a:t>
+              <a:t>- CVM — Informe Mensal FIDC, Tabelas X.1.1 e X.2, competência 31 jul. 2026: https://dados.cvm.gov.br/dataset/fidc-doc-inf_mensal</a:t>
             </a:r>
           </a:p>
           <a:p xmlns:a="http://schemas.openxmlformats.org/drawingml/2006/main">
             <a:r>
-              <a:t>- Arquivos de cálculo: directors_update/financeiro_decomposition_202606.csv e financeiro_decomposition_fund_ledger_202606.csv.</a:t>
+              <a:t>- Fundos.NET/B3 — regulamentos, atas, anúncios de encerramento e demonstrações financeiras: documentos 881263, 732153, 1224059, 634211, 675234, 937760, 1013021, 634463, 1239452, 1025473, 884293, 1149521, 1150895, 791513, 1076481, 1130481, 1172101, 1023849, 1202319, 912157, 1223029, 1061833, 1139680, 1051890, 883977, 1002580, 1130591; consulta por ID em https://fnet.bmfbovespa.com.br/fnet/publico/visualizarDocumento</a:t>
             </a:r>
           </a:p>
           <a:p xmlns:a="http://schemas.openxmlformats.org/drawingml/2006/main">
             <a:r>
-              <a:t>- Curadoria documental de adquirência: directors_update/financeiro_acquiring_document_ledger_202606.csv.</a:t>
+              <a:t>- Corpus documental: 193 documentos; 5.503 páginas; 12,96 milhões de caracteres; duas atas digitalizadas revisadas visualmente.</a:t>
+            </a:r>
+          </a:p>
+          <a:p xmlns:a="http://schemas.openxmlformats.org/drawingml/2006/main">
+            <a:r>
+              <a:t>- Método de posições: Soma de TAB_X_NR_COTST das séries ativas por nível de subordinação. Uma posição reportada não identifica o beneficiário final e a mesma pessoa pode aparecer em mais de uma série.</a:t>
+            </a:r>
+          </a:p>
+          <a:p xmlns:a="http://schemas.openxmlformats.org/drawingml/2006/main">
+            <a:r>
+              <a:t>- Método de PL: Participação calculada com os valores de classe/subclasse da Tabela X.2 sobre o PL reportado. N/R indica reconciliação insuficiente.</a:t>
+            </a:r>
+          </a:p>
+          <a:p xmlns:a="http://schemas.openxmlformats.org/drawingml/2006/main">
+            <a:r>
+              <a:t>- Método de voto: Percentual estimado do bloco mezanino+júnior segundo a regra do regulamento: QC = uma cota por voto; FP = posição financeira.</a:t>
+            </a:r>
+          </a:p>
+          <a:p xmlns:a="http://schemas.openxmlformats.org/drawingml/2006/main">
+            <a:r>
+              <a:t>- Correções cadastrais validadas: Angá FGTS II 53.577.135/0001-80; Cartão de Compra Supplier II 50.988.212/0001-05.</a:t>
             </a:r>
           </a:p>
           <a:p xmlns:a="http://schemas.openxmlformats.org/drawingml/2006/main">
@@ -728,22 +749,17 @@
           </a:p>
           <a:p xmlns:a="http://schemas.openxmlformats.org/drawingml/2006/main">
             <a:r>
-              <a:t>- CVM — resposta ao Congresso sobre Carbono Oculto: https://www.camara.leg.br/proposicoesWeb/prop_mostrarintegra?codteor=3068110&amp;filename=Tramitacao-REQ+370%2F2025+CSPCCO</a:t>
+              <a:t>- CVM/ANBIMA — base de PL ex-FIC e taxonomia aplicada no artefato setorial, competência jun/2026.</a:t>
             </a:r>
           </a:p>
           <a:p xmlns:a="http://schemas.openxmlformats.org/drawingml/2006/main">
             <a:r>
-              <a:t>- CVM — apresentação à CAE, 24 fev. 2026: https://www.gov.br/cvm/pt-br/assuntos/noticias/anexos/2026/20260224-apresentacao-ppt-cae-cvm.pdf</a:t>
+              <a:t>- Arquivos de cálculo: directors_update/financeiro_decomposition_202606.csv e financeiro_decomposition_fund_ledger_202606.csv.</a:t>
             </a:r>
           </a:p>
           <a:p xmlns:a="http://schemas.openxmlformats.org/drawingml/2006/main">
             <a:r>
-              <a:t>- CVM — recomendações do GT Master: https://www.gov.br/cvm/pt-br/assuntos/noticias/2026/comite-de-riscos-da-cvm-analisa-recomendacoes-do-gt-master/</a:t>
-            </a:r>
-          </a:p>
-          <a:p xmlns:a="http://schemas.openxmlformats.org/drawingml/2006/main">
-            <a:r>
-              <a:t>- ANTT — nota técnica com descrição da investigação e FIP Camaçari: https://www.gov.br/antt/pt-br/assuntos/rodovias/novos-projetos-em-rodovias/bndes-cn2-centro-oeste-norte/arquivos-para-download/comissao-de-outorga/nota-tecnica-antt-ndeg10395-2025-coed2-2025-sucon-dir-antt/@@download/file</a:t>
+              <a:t>- Curadoria documental de adquirência: directors_update/financeiro_acquiring_document_ledger_202606.csv.</a:t>
             </a:r>
           </a:p>
           <a:p xmlns:a="http://schemas.openxmlformats.org/drawingml/2006/main">
@@ -823,17 +839,22 @@
           </a:p>
           <a:p xmlns:a="http://schemas.openxmlformats.org/drawingml/2006/main">
             <a:r>
-              <a:t>- CVM — processos relativos a Grupo Master, REAG e entidades conexas: https://www.gov.br/cvm/pt-br/assuntos/noticias/2026/informacoes-relativas-a-grupo-master-reag-e-outras-entidades-conexas</a:t>
+              <a:t>- CVM — resposta ao Congresso sobre Carbono Oculto: https://www.camara.leg.br/proposicoesWeb/prop_mostrarintegra?codteor=3068110&amp;filename=Tramitacao-REQ+370%2F2025+CSPCCO</a:t>
             </a:r>
           </a:p>
           <a:p xmlns:a="http://schemas.openxmlformats.org/drawingml/2006/main">
             <a:r>
-              <a:t>- CVM — recomendações do GT Master: https://www.gov.br/cvm/pt-br/assuntos/noticias/2026/comite-de-riscos-da-cvm-analisa-recomendacoes-do-gt-master/</a:t>
+              <a:t>- CVM — apresentação à CAE, 24 fev. 2026: https://www.gov.br/cvm/pt-br/assuntos/noticias/anexos/2026/20260224-apresentacao-ppt-cae-cvm.pdf</a:t>
             </a:r>
           </a:p>
           <a:p xmlns:a="http://schemas.openxmlformats.org/drawingml/2006/main">
             <a:r>
-              <a:t>- Metrópoles — planilhas do BRB obtidas por LAI, 6 abr. 2026: https://www.metropoles.com/colunas/demetrio-vecchioli/brb-comprou-r-304-bilhoes-em-ativos-do-banco-master-veja-planilhas</a:t>
+              <a:t>- CVM — recomendações do GT Master: https://www.gov.br/cvm/pt-br/assuntos/noticias/2026/comite-de-riscos-da-cvm-analisa-recomendacoes-do-gt-master/</a:t>
+            </a:r>
+          </a:p>
+          <a:p xmlns:a="http://schemas.openxmlformats.org/drawingml/2006/main">
+            <a:r>
+              <a:t>- ANTT — nota técnica com descrição da investigação e FIP Camaçari: https://www.gov.br/antt/pt-br/assuntos/rodovias/novos-projetos-em-rodovias/bndes-cn2-centro-oeste-norte/arquivos-para-download/comissao-de-outorga/nota-tecnica-antt-ndeg10395-2025-coed2-2025-sucon-dir-antt/@@download/file</a:t>
             </a:r>
           </a:p>
           <a:p xmlns:a="http://schemas.openxmlformats.org/drawingml/2006/main">
@@ -913,22 +934,17 @@
           </a:p>
           <a:p xmlns:a="http://schemas.openxmlformats.org/drawingml/2006/main">
             <a:r>
-              <a:t>- CVM — novo Informe Mensal, 8 mai. 2024: https://www.gov.br/cvm/pt-br/assuntos/noticias/2024/nova-versao-do-informe-mensal-para-fidc-disponivel-no-sistema-fundos.net</a:t>
+              <a:t>- CVM — processos relativos a Grupo Master, REAG e entidades conexas: https://www.gov.br/cvm/pt-br/assuntos/noticias/2026/informacoes-relativas-a-grupo-master-reag-e-outras-entidades-conexas</a:t>
             </a:r>
           </a:p>
           <a:p xmlns:a="http://schemas.openxmlformats.org/drawingml/2006/main">
             <a:r>
-              <a:t>- CVM — Dados Abertos de fundos, 30 jan. 2025: https://www.gov.br/cvm/pt-br/assuntos/noticias/2025/portal-dados-abertos-cvm-traz-novidades-nas-informacoes-sobre-fundos-de-investimento</a:t>
+              <a:t>- CVM — recomendações do GT Master: https://www.gov.br/cvm/pt-br/assuntos/noticias/2026/comite-de-riscos-da-cvm-analisa-recomendacoes-do-gt-master/</a:t>
             </a:r>
           </a:p>
           <a:p xmlns:a="http://schemas.openxmlformats.org/drawingml/2006/main">
             <a:r>
-              <a:t>- CVM — novidades dos Dados Abertos, Tabela VIII em 13 ago. 2026: https://dados.cvm.gov.br/pages/novidades</a:t>
-            </a:r>
-          </a:p>
-          <a:p xmlns:a="http://schemas.openxmlformats.org/drawingml/2006/main">
-            <a:r>
-              <a:t>- CVM/BCB — ACT, 13 abr. 2026: https://www.gov.br/cvm/pt-br/assuntos/noticias/2026/cvm-e-banco-central-fortalecem-cooperacao-para-o-aprimoramento-das-informacoes-de-credito-no-pais/</a:t>
+              <a:t>- Metrópoles — planilhas do BRB obtidas por LAI, 6 abr. 2026: https://www.metropoles.com/colunas/demetrio-vecchioli/brb-comprou-r-304-bilhoes-em-ativos-do-banco-master-veja-planilhas</a:t>
             </a:r>
           </a:p>
           <a:p xmlns:a="http://schemas.openxmlformats.org/drawingml/2006/main">
@@ -1008,12 +1024,22 @@
           </a:p>
           <a:p xmlns:a="http://schemas.openxmlformats.org/drawingml/2006/main">
             <a:r>
-              <a:t>- ANBIMA — manifestação na consulta pública CVM SDM 07/25: https://conteudo.cvm.gov.br/cvm_institucional/export/sites/cvm/audiencias_publicas/ap_sdm/anexos/2025/sdm0725__ANBIMA.PDF</a:t>
+              <a:t>- CVM — novo Informe Mensal, 8 mai. 2024: https://www.gov.br/cvm/pt-br/assuntos/noticias/2024/nova-versao-do-informe-mensal-para-fidc-disponivel-no-sistema-fundos.net</a:t>
             </a:r>
           </a:p>
           <a:p xmlns:a="http://schemas.openxmlformats.org/drawingml/2006/main">
             <a:r>
-              <a:t>- CVM — plano emergencial: https://www.gov.br/cvm/pt-br/assuntos/noticias/anexos/2026/20260527-plano-emergencial-de-reestruturacao-da-atividade-fiscalizatoria-da-cvm.pdf</a:t>
+              <a:t>- CVM — Dados Abertos de fundos, 30 jan. 2025: https://www.gov.br/cvm/pt-br/assuntos/noticias/2025/portal-dados-abertos-cvm-traz-novidades-nas-informacoes-sobre-fundos-de-investimento</a:t>
+            </a:r>
+          </a:p>
+          <a:p xmlns:a="http://schemas.openxmlformats.org/drawingml/2006/main">
+            <a:r>
+              <a:t>- CVM — novidades dos Dados Abertos, Tabela VIII em 13 ago. 2026: https://dados.cvm.gov.br/pages/novidades</a:t>
+            </a:r>
+          </a:p>
+          <a:p xmlns:a="http://schemas.openxmlformats.org/drawingml/2006/main">
+            <a:r>
+              <a:t>- CVM/BCB — ACT, 13 abr. 2026: https://www.gov.br/cvm/pt-br/assuntos/noticias/2026/cvm-e-banco-central-fortalecem-cooperacao-para-o-aprimoramento-das-informacoes-de-credito-no-pais/</a:t>
             </a:r>
           </a:p>
           <a:p xmlns:a="http://schemas.openxmlformats.org/drawingml/2006/main">
@@ -1093,12 +1119,12 @@
           </a:p>
           <a:p xmlns:a="http://schemas.openxmlformats.org/drawingml/2006/main">
             <a:r>
-              <a:t>- CVM — plano emergencial, 27 mai. 2026: https://www.gov.br/cvm/pt-br/assuntos/noticias/2026/cvm-encaminha-ao-ministerio-da-fazenda-sua-proposta-de-plano-emergencial-de-reestruturacao-da-atividade-fiscalizatoria</a:t>
+              <a:t>- ANBIMA — manifestação na consulta pública CVM SDM 07/25: https://conteudo.cvm.gov.br/cvm_institucional/export/sites/cvm/audiencias_publicas/ap_sdm/anexos/2025/sdm0725__ANBIMA.PDF</a:t>
             </a:r>
           </a:p>
           <a:p xmlns:a="http://schemas.openxmlformats.org/drawingml/2006/main">
             <a:r>
-              <a:t>- CVM — homologação pelo STF, 3 jul. 2026: https://www.gov.br/cvm/pt-br/assuntos/noticias/2026/plano-emergencial-de-reestruturacao-da-cvm-e-homologado-pelo-stf-e-reforca-condicoes-para-atuacao-da-autarquia</a:t>
+              <a:t>- CVM — plano emergencial: https://www.gov.br/cvm/pt-br/assuntos/noticias/anexos/2026/20260527-plano-emergencial-de-reestruturacao-da-atividade-fiscalizatoria-da-cvm.pdf</a:t>
             </a:r>
           </a:p>
           <a:p xmlns:a="http://schemas.openxmlformats.org/drawingml/2006/main">
@@ -1178,17 +1204,12 @@
           </a:p>
           <a:p xmlns:a="http://schemas.openxmlformats.org/drawingml/2006/main">
             <a:r>
-              <a:t>- CVM — FAQ de Termo de Compromisso: https://www.gov.br/cvm/pt-br/assuntos/processos/termos-de-compromisso</a:t>
+              <a:t>- CVM — plano emergencial, 27 mai. 2026: https://www.gov.br/cvm/pt-br/assuntos/noticias/2026/cvm-encaminha-ao-ministerio-da-fazenda-sua-proposta-de-plano-emergencial-de-reestruturacao-da-atividade-fiscalizatoria</a:t>
             </a:r>
           </a:p>
           <a:p xmlns:a="http://schemas.openxmlformats.org/drawingml/2006/main">
             <a:r>
-              <a:t>- Lei 6.385/1976: https://www.planalto.gov.br/ccivil_03/leis/l6385compilada.htm</a:t>
-            </a:r>
-          </a:p>
-          <a:p xmlns:a="http://schemas.openxmlformats.org/drawingml/2006/main">
-            <a:r>
-              <a:t>- Lei 7.347/1985: https://www.planalto.gov.br/ccivil_03/leis/l7347compilada.htm</a:t>
+              <a:t>- CVM — homologação pelo STF, 3 jul. 2026: https://www.gov.br/cvm/pt-br/assuntos/noticias/2026/plano-emergencial-de-reestruturacao-da-cvm-e-homologado-pelo-stf-e-reforca-condicoes-para-atuacao-da-autarquia</a:t>
             </a:r>
           </a:p>
           <a:p xmlns:a="http://schemas.openxmlformats.org/drawingml/2006/main">
@@ -1268,22 +1289,17 @@
           </a:p>
           <a:p xmlns:a="http://schemas.openxmlformats.org/drawingml/2006/main">
             <a:r>
-              <a:t>- ANBIMA — Singulare, 17 jul. 2025: https://www.anbima.com.br/pt_br/noticias/confira-os-termos-de-compromisso-firmados-com-instituicoes-que-seguem-os-codigos-anbima-8A2AB2AE97EC651A01981922CDCC3732-00.htm</a:t>
+              <a:t>- CVM — FAQ de Termo de Compromisso: https://www.gov.br/cvm/pt-br/assuntos/processos/termos-de-compromisso</a:t>
             </a:r>
           </a:p>
           <a:p xmlns:a="http://schemas.openxmlformats.org/drawingml/2006/main">
             <a:r>
-              <a:t>- ANBIMA — BRL Trust, 15 jul. 2024: https://www.anbima.com.br/data/files/73/B4/6B/BF/1604C910CF6A83C9F82BA2A8/TC_-_BRL_Trust_Distribuidora_de_Titulos_e_Valores_Mobiliarios_S_A__-_15_07_2024_-_AGRT_pdf</a:t>
+              <a:t>- Lei 6.385/1976: https://www.planalto.gov.br/ccivil_03/leis/l6385compilada.htm</a:t>
             </a:r>
           </a:p>
           <a:p xmlns:a="http://schemas.openxmlformats.org/drawingml/2006/main">
             <a:r>
-              <a:t>- ANBIMA — Vórtx, 13 nov. 2025: https://www.anbima.com.br/data/files/9C/95/5D/34/9E23C910342903C9BA2BA2A8/TC%20_AGRT0042025_Vorx%20DTVM%20Ltda.pdf</a:t>
-            </a:r>
-          </a:p>
-          <a:p xmlns:a="http://schemas.openxmlformats.org/drawingml/2006/main">
-            <a:r>
-              <a:t>- ANBIMA — termos no acordo CVM-ANBIMA, 1S25: https://www.anbima.com.br/pt_br/noticias/anbima-firma-termos-de-compromisso-com-cinco-instituicoes-no-1-semestre-dentro-do-acordo-de-cooperacao-com-a-cvm.htm</a:t>
+              <a:t>- Lei 7.347/1985: https://www.planalto.gov.br/ccivil_03/leis/l7347compilada.htm</a:t>
             </a:r>
           </a:p>
           <a:p xmlns:a="http://schemas.openxmlformats.org/drawingml/2006/main">
@@ -1363,17 +1379,22 @@
           </a:p>
           <a:p xmlns:a="http://schemas.openxmlformats.org/drawingml/2006/main">
             <a:r>
-              <a:t>- https://www.gov.br/cvm/pt-br/assuntos/noticias/2015/cvm-pune-administrador-e-custodiante-de-fidcs-a2fe68e49c584da6acb67577c2459864</a:t>
+              <a:t>- ANBIMA — Singulare, 17 jul. 2025: https://www.anbima.com.br/pt_br/noticias/confira-os-termos-de-compromisso-firmados-com-instituicoes-que-seguem-os-codigos-anbima-8A2AB2AE97EC651A01981922CDCC3732-00.htm</a:t>
             </a:r>
           </a:p>
           <a:p xmlns:a="http://schemas.openxmlformats.org/drawingml/2006/main">
             <a:r>
-              <a:t>- https://www.gov.br/cvm/pt-br/assuntos/noticias/2025/cvm-analisa-propostas-de-termo-de-compromisso-apresentadas-por-bem-dtvm-e-seu-diretor-responsavel-e-por-more-invest-gestora-de-recursos</a:t>
+              <a:t>- ANBIMA — BRL Trust, 15 jul. 2024: https://www.anbima.com.br/data/files/73/B4/6B/BF/1604C910CF6A83C9F82BA2A8/TC_-_BRL_Trust_Distribuidora_de_Titulos_e_Valores_Mobiliarios_S_A__-_15_07_2024_-_AGRT_pdf</a:t>
             </a:r>
           </a:p>
           <a:p xmlns:a="http://schemas.openxmlformats.org/drawingml/2006/main">
             <a:r>
-              <a:t>- https://www.gov.br/cvm/pt-br/assuntos/noticias/2026/informacoes-relativas-a-grupo-master-reag-e-outras-entidades-conexas</a:t>
+              <a:t>- ANBIMA — Vórtx, 13 nov. 2025: https://www.anbima.com.br/data/files/9C/95/5D/34/9E23C910342903C9BA2BA2A8/TC%20_AGRT0042025_Vorx%20DTVM%20Ltda.pdf</a:t>
+            </a:r>
+          </a:p>
+          <a:p xmlns:a="http://schemas.openxmlformats.org/drawingml/2006/main">
+            <a:r>
+              <a:t>- ANBIMA — termos no acordo CVM-ANBIMA, 1S25: https://www.anbima.com.br/pt_br/noticias/anbima-firma-termos-de-compromisso-com-cinco-instituicoes-no-1-semestre-dentro-do-acordo-de-cooperacao-com-a-cvm.htm</a:t>
             </a:r>
           </a:p>
           <a:p xmlns:a="http://schemas.openxmlformats.org/drawingml/2006/main">
@@ -1543,12 +1564,17 @@
           </a:p>
           <a:p xmlns:a="http://schemas.openxmlformats.org/drawingml/2006/main">
             <a:r>
-              <a:t>- CVM/BCB — ACT, 13 abr. 2026: https://www.gov.br/cvm/pt-br/assuntos/noticias/2026/cvm-e-banco-central-fortalecem-cooperacao-para-o-aprimoramento-das-informacoes-de-credito-no-pais/</a:t>
+              <a:t>- https://www.gov.br/cvm/pt-br/assuntos/noticias/2015/cvm-pune-administrador-e-custodiante-de-fidcs-a2fe68e49c584da6acb67577c2459864</a:t>
             </a:r>
           </a:p>
           <a:p xmlns:a="http://schemas.openxmlformats.org/drawingml/2006/main">
             <a:r>
-              <a:t>- CVM — Informativo do Colegiado sobre o ACT: https://conteudo.cvm.gov.br/cvm_institucional/export/sites/cvm/publicacao/informativos_colegiado/anexos/2026/Informativo01_RC03022026.pdf</a:t>
+              <a:t>- https://www.gov.br/cvm/pt-br/assuntos/noticias/2025/cvm-analisa-propostas-de-termo-de-compromisso-apresentadas-por-bem-dtvm-e-seu-diretor-responsavel-e-por-more-invest-gestora-de-recursos</a:t>
+            </a:r>
+          </a:p>
+          <a:p xmlns:a="http://schemas.openxmlformats.org/drawingml/2006/main">
+            <a:r>
+              <a:t>- https://www.gov.br/cvm/pt-br/assuntos/noticias/2026/informacoes-relativas-a-grupo-master-reag-e-outras-entidades-conexas</a:t>
             </a:r>
           </a:p>
           <a:p xmlns:a="http://schemas.openxmlformats.org/drawingml/2006/main">
@@ -1623,32 +1649,17 @@
           <a:lstStyle xmlns:a="http://schemas.openxmlformats.org/drawingml/2006/main"/>
           <a:p xmlns:a="http://schemas.openxmlformats.org/drawingml/2006/main">
             <a:r>
-              <a:t>A fórmula geométrica usa o retorno mensal reportado somente após validação de unidade, cobertura e consistência. O retorno econômico de caso específico exige fluxos por cota e datas efetivas.</a:t>
+              <a:t>[Sources]</a:t>
             </a:r>
           </a:p>
           <a:p xmlns:a="http://schemas.openxmlformats.org/drawingml/2006/main">
             <a:r>
-              <a:t/>
+              <a:t>- CVM/BCB — ACT, 13 abr. 2026: https://www.gov.br/cvm/pt-br/assuntos/noticias/2026/cvm-e-banco-central-fortalecem-cooperacao-para-o-aprimoramento-das-informacoes-de-credito-no-pais/</a:t>
             </a:r>
           </a:p>
           <a:p xmlns:a="http://schemas.openxmlformats.org/drawingml/2006/main">
             <a:r>
-              <a:t>[Sources]</a:t>
-            </a:r>
-          </a:p>
-          <a:p xmlns:a="http://schemas.openxmlformats.org/drawingml/2006/main">
-            <a:r>
-              <a:t>- https://cvmweb.cvm.gov.br/SWB/Sistemas/SCW/PadroesXML/PadraoXMLMensalFIDC576.asp</a:t>
-            </a:r>
-          </a:p>
-          <a:p xmlns:a="http://schemas.openxmlformats.org/drawingml/2006/main">
-            <a:r>
-              <a:t>- https://dados.cvm.gov.br/dataset/fidc-doc-inf_mensal</a:t>
-            </a:r>
-          </a:p>
-          <a:p xmlns:a="http://schemas.openxmlformats.org/drawingml/2006/main">
-            <a:r>
-              <a:t>- https://fnet.bmfbovespa.com.br/fnet/publico/consultarDocumentosCVM</a:t>
+              <a:t>- CVM — Informativo do Colegiado sobre o ACT: https://conteudo.cvm.gov.br/cvm_institucional/export/sites/cvm/publicacao/informativos_colegiado/anexos/2026/Informativo01_RC03022026.pdf</a:t>
             </a:r>
           </a:p>
           <a:p xmlns:a="http://schemas.openxmlformats.org/drawingml/2006/main">
@@ -1723,6 +1734,106 @@
           <a:lstStyle xmlns:a="http://schemas.openxmlformats.org/drawingml/2006/main"/>
           <a:p xmlns:a="http://schemas.openxmlformats.org/drawingml/2006/main">
             <a:r>
+              <a:t>A fórmula geométrica usa o retorno mensal reportado somente após validação de unidade, cobertura e consistência. O retorno econômico de caso específico exige fluxos por cota e datas efetivas.</a:t>
+            </a:r>
+          </a:p>
+          <a:p xmlns:a="http://schemas.openxmlformats.org/drawingml/2006/main">
+            <a:r>
+              <a:t/>
+            </a:r>
+          </a:p>
+          <a:p xmlns:a="http://schemas.openxmlformats.org/drawingml/2006/main">
+            <a:r>
+              <a:t>[Sources]</a:t>
+            </a:r>
+          </a:p>
+          <a:p xmlns:a="http://schemas.openxmlformats.org/drawingml/2006/main">
+            <a:r>
+              <a:t>- https://cvmweb.cvm.gov.br/SWB/Sistemas/SCW/PadroesXML/PadraoXMLMensalFIDC576.asp</a:t>
+            </a:r>
+          </a:p>
+          <a:p xmlns:a="http://schemas.openxmlformats.org/drawingml/2006/main">
+            <a:r>
+              <a:t>- https://dados.cvm.gov.br/dataset/fidc-doc-inf_mensal</a:t>
+            </a:r>
+          </a:p>
+          <a:p xmlns:a="http://schemas.openxmlformats.org/drawingml/2006/main">
+            <a:r>
+              <a:t>- https://fnet.bmfbovespa.com.br/fnet/publico/consultarDocumentosCVM</a:t>
+            </a:r>
+          </a:p>
+          <a:p xmlns:a="http://schemas.openxmlformats.org/drawingml/2006/main">
+            <a:r>
+              <a:t>[/Sources]</a:t>
+            </a:r>
+          </a:p>
+        </p:txBody>
+      </p:sp>
+      <p:sp>
+        <p:nvSpPr>
+          <p:cNvPr id="4" name="Slide Number Placeholder 3"/>
+          <p:cNvSpPr>
+            <a:spLocks xmlns:a="http://schemas.openxmlformats.org/drawingml/2006/main" noGrp="1"/>
+          </p:cNvSpPr>
+          <p:nvPr>
+            <p:ph type="sldNum" idx="5"/>
+          </p:nvPr>
+        </p:nvSpPr>
+        <p:spPr/>
+        <p:txBody>
+          <a:bodyPr xmlns:a="http://schemas.openxmlformats.org/drawingml/2006/main"/>
+          <a:lstStyle xmlns:a="http://schemas.openxmlformats.org/drawingml/2006/main"/>
+          <a:p xmlns:a="http://schemas.openxmlformats.org/drawingml/2006/main"/>
+        </p:txBody>
+      </p:sp>
+    </p:spTree>
+  </p:cSld>
+  <p:clrMapOvr>
+    <a:masterClrMapping xmlns:a="http://schemas.openxmlformats.org/drawingml/2006/main"/>
+  </p:clrMapOvr>
+</p:notes>
+</file>
+
+<file path=ppt/notesSlides/notesSlide23.xml><?xml version="1.0" encoding="utf-8"?>
+<p:notes xmlns:p="http://schemas.openxmlformats.org/presentationml/2006/main">
+  <p:cSld>
+    <p:spTree>
+      <p:nvGrpSpPr>
+        <p:cNvPr id="1" name=""/>
+        <p:cNvGrpSpPr/>
+        <p:nvPr/>
+      </p:nvGrpSpPr>
+      <p:grpSpPr>
+        <a:xfrm xmlns:a="http://schemas.openxmlformats.org/drawingml/2006/main"/>
+      </p:grpSpPr>
+      <p:sp>
+        <p:nvSpPr>
+          <p:cNvPr id="2" name="Slide Image Placeholder 1"/>
+          <p:cNvSpPr>
+            <a:spLocks xmlns:a="http://schemas.openxmlformats.org/drawingml/2006/main" noGrp="1"/>
+          </p:cNvSpPr>
+          <p:nvPr>
+            <p:ph type="sldImg" idx="0"/>
+          </p:nvPr>
+        </p:nvSpPr>
+        <p:spPr/>
+      </p:sp>
+      <p:sp>
+        <p:nvSpPr>
+          <p:cNvPr id="3" name="Notes Placeholder 2"/>
+          <p:cNvSpPr>
+            <a:spLocks xmlns:a="http://schemas.openxmlformats.org/drawingml/2006/main" noGrp="1"/>
+          </p:cNvSpPr>
+          <p:nvPr>
+            <p:ph type="body" idx="1"/>
+          </p:nvPr>
+        </p:nvSpPr>
+        <p:spPr/>
+        <p:txBody>
+          <a:bodyPr xmlns:a="http://schemas.openxmlformats.org/drawingml/2006/main"/>
+          <a:lstStyle xmlns:a="http://schemas.openxmlformats.org/drawingml/2006/main"/>
+          <a:p xmlns:a="http://schemas.openxmlformats.org/drawingml/2006/main">
+            <a:r>
               <a:t>[Sources]</a:t>
             </a:r>
           </a:p>
@@ -2656,7 +2767,7 @@
   </p:cSld>
   <p:clrMap bg1="lt1" tx1="dk1" bg2="lt2" tx2="dk2" accent1="accent1" accent2="accent2" accent3="accent3" accent4="accent4" accent5="accent5" accent6="accent6" hlink="hlink" folHlink="folHlink"/>
   <p:sldLayoutIdLst>
-    <p:sldLayoutId xmlns:r="http://schemas.openxmlformats.org/officeDocument/2006/relationships" id="2147483649" r:id="R91d3594ff0664006"/>
+    <p:sldLayoutId xmlns:r="http://schemas.openxmlformats.org/officeDocument/2006/relationships" id="2147483649" r:id="R409aef7270184fc1"/>
   </p:sldLayoutIdLst>
   <p:txStyles>
     <p:titleStyle>
@@ -4372,7 +4483,7 @@
       </p:sp>
       <p:graphicFrame>
         <p:nvGraphicFramePr>
-          <p:cNvPr id="26" name=""/>
+          <p:cNvPr id="29" name=""/>
           <p:cNvGraphicFramePr/>
           <p:nvPr/>
         </p:nvGraphicFramePr>
@@ -4399,7 +4510,9 @@
                     </a:bodyPr>
                     <a:lstStyle/>
                     <a:p>
-                      <a:pPr algn="ctr"/>
+                      <a:pPr algn="ctr">
+                        <a:buNone/>
+                      </a:pPr>
                       <a:r>
                         <a:rPr sz="713" b="1">
                           <a:solidFill>
@@ -4426,7 +4539,9 @@
                     </a:bodyPr>
                     <a:lstStyle/>
                     <a:p>
-                      <a:pPr algn="l"/>
+                      <a:pPr algn="l">
+                        <a:buNone/>
+                      </a:pPr>
                       <a:r>
                         <a:rPr sz="713" b="1">
                           <a:solidFill>
@@ -4453,7 +4568,9 @@
                     </a:bodyPr>
                     <a:lstStyle/>
                     <a:p>
-                      <a:pPr algn="r"/>
+                      <a:pPr algn="r">
+                        <a:buNone/>
+                      </a:pPr>
                       <a:r>
                         <a:rPr sz="713" b="1">
                           <a:solidFill>
@@ -4480,7 +4597,9 @@
                     </a:bodyPr>
                     <a:lstStyle/>
                     <a:p>
-                      <a:pPr algn="ctr"/>
+                      <a:pPr algn="ctr">
+                        <a:buNone/>
+                      </a:pPr>
                       <a:r>
                         <a:rPr sz="713" b="1">
                           <a:solidFill>
@@ -4507,7 +4626,9 @@
                     </a:bodyPr>
                     <a:lstStyle/>
                     <a:p>
-                      <a:pPr algn="ctr"/>
+                      <a:pPr algn="ctr">
+                        <a:buNone/>
+                      </a:pPr>
                       <a:r>
                         <a:rPr sz="713" b="1">
                           <a:solidFill>
@@ -4536,7 +4657,9 @@
                     </a:bodyPr>
                     <a:lstStyle/>
                     <a:p>
-                      <a:pPr algn="ctr"/>
+                      <a:pPr algn="ctr">
+                        <a:buNone/>
+                      </a:pPr>
                       <a:r>
                         <a:rPr sz="720">
                           <a:solidFill>
@@ -4563,7 +4686,9 @@
                     </a:bodyPr>
                     <a:lstStyle/>
                     <a:p>
-                      <a:pPr algn="l"/>
+                      <a:pPr algn="l">
+                        <a:buNone/>
+                      </a:pPr>
                       <a:r>
                         <a:rPr sz="720">
                           <a:solidFill>
@@ -4590,7 +4715,9 @@
                     </a:bodyPr>
                     <a:lstStyle/>
                     <a:p>
-                      <a:pPr algn="r"/>
+                      <a:pPr algn="r">
+                        <a:buNone/>
+                      </a:pPr>
                       <a:r>
                         <a:rPr sz="720">
                           <a:solidFill>
@@ -4617,7 +4744,9 @@
                     </a:bodyPr>
                     <a:lstStyle/>
                     <a:p>
-                      <a:pPr algn="ctr"/>
+                      <a:pPr algn="ctr">
+                        <a:buNone/>
+                      </a:pPr>
                       <a:r>
                         <a:rPr sz="720">
                           <a:solidFill>
@@ -4644,7 +4773,9 @@
                     </a:bodyPr>
                     <a:lstStyle/>
                     <a:p>
-                      <a:pPr algn="ctr"/>
+                      <a:pPr algn="ctr">
+                        <a:buNone/>
+                      </a:pPr>
                       <a:r>
                         <a:rPr sz="720">
                           <a:solidFill>
@@ -4673,7 +4804,9 @@
                     </a:bodyPr>
                     <a:lstStyle/>
                     <a:p>
-                      <a:pPr algn="ctr"/>
+                      <a:pPr algn="ctr">
+                        <a:buNone/>
+                      </a:pPr>
                       <a:r>
                         <a:rPr sz="720">
                           <a:solidFill>
@@ -4700,7 +4833,9 @@
                     </a:bodyPr>
                     <a:lstStyle/>
                     <a:p>
-                      <a:pPr algn="l"/>
+                      <a:pPr algn="l">
+                        <a:buNone/>
+                      </a:pPr>
                       <a:r>
                         <a:rPr sz="720">
                           <a:solidFill>
@@ -4727,7 +4862,9 @@
                     </a:bodyPr>
                     <a:lstStyle/>
                     <a:p>
-                      <a:pPr algn="r"/>
+                      <a:pPr algn="r">
+                        <a:buNone/>
+                      </a:pPr>
                       <a:r>
                         <a:rPr sz="720">
                           <a:solidFill>
@@ -4754,7 +4891,9 @@
                     </a:bodyPr>
                     <a:lstStyle/>
                     <a:p>
-                      <a:pPr algn="ctr"/>
+                      <a:pPr algn="ctr">
+                        <a:buNone/>
+                      </a:pPr>
                       <a:r>
                         <a:rPr sz="720">
                           <a:solidFill>
@@ -4781,7 +4920,9 @@
                     </a:bodyPr>
                     <a:lstStyle/>
                     <a:p>
-                      <a:pPr algn="ctr"/>
+                      <a:pPr algn="ctr">
+                        <a:buNone/>
+                      </a:pPr>
                       <a:r>
                         <a:rPr sz="720">
                           <a:solidFill>
@@ -4810,7 +4951,9 @@
                     </a:bodyPr>
                     <a:lstStyle/>
                     <a:p>
-                      <a:pPr algn="ctr"/>
+                      <a:pPr algn="ctr">
+                        <a:buNone/>
+                      </a:pPr>
                       <a:r>
                         <a:rPr sz="720">
                           <a:solidFill>
@@ -4837,7 +4980,9 @@
                     </a:bodyPr>
                     <a:lstStyle/>
                     <a:p>
-                      <a:pPr algn="l"/>
+                      <a:pPr algn="l">
+                        <a:buNone/>
+                      </a:pPr>
                       <a:r>
                         <a:rPr sz="720">
                           <a:solidFill>
@@ -4864,7 +5009,9 @@
                     </a:bodyPr>
                     <a:lstStyle/>
                     <a:p>
-                      <a:pPr algn="r"/>
+                      <a:pPr algn="r">
+                        <a:buNone/>
+                      </a:pPr>
                       <a:r>
                         <a:rPr sz="720">
                           <a:solidFill>
@@ -4891,7 +5038,9 @@
                     </a:bodyPr>
                     <a:lstStyle/>
                     <a:p>
-                      <a:pPr algn="ctr"/>
+                      <a:pPr algn="ctr">
+                        <a:buNone/>
+                      </a:pPr>
                       <a:r>
                         <a:rPr sz="720">
                           <a:solidFill>
@@ -4918,7 +5067,9 @@
                     </a:bodyPr>
                     <a:lstStyle/>
                     <a:p>
-                      <a:pPr algn="ctr"/>
+                      <a:pPr algn="ctr">
+                        <a:buNone/>
+                      </a:pPr>
                       <a:r>
                         <a:rPr sz="720">
                           <a:solidFill>
@@ -4947,7 +5098,9 @@
                     </a:bodyPr>
                     <a:lstStyle/>
                     <a:p>
-                      <a:pPr algn="ctr"/>
+                      <a:pPr algn="ctr">
+                        <a:buNone/>
+                      </a:pPr>
                       <a:r>
                         <a:rPr sz="720">
                           <a:solidFill>
@@ -4974,7 +5127,9 @@
                     </a:bodyPr>
                     <a:lstStyle/>
                     <a:p>
-                      <a:pPr algn="l"/>
+                      <a:pPr algn="l">
+                        <a:buNone/>
+                      </a:pPr>
                       <a:r>
                         <a:rPr sz="720">
                           <a:solidFill>
@@ -5001,7 +5156,9 @@
                     </a:bodyPr>
                     <a:lstStyle/>
                     <a:p>
-                      <a:pPr algn="r"/>
+                      <a:pPr algn="r">
+                        <a:buNone/>
+                      </a:pPr>
                       <a:r>
                         <a:rPr sz="720">
                           <a:solidFill>
@@ -5028,7 +5185,9 @@
                     </a:bodyPr>
                     <a:lstStyle/>
                     <a:p>
-                      <a:pPr algn="ctr"/>
+                      <a:pPr algn="ctr">
+                        <a:buNone/>
+                      </a:pPr>
                       <a:r>
                         <a:rPr sz="720">
                           <a:solidFill>
@@ -5055,7 +5214,9 @@
                     </a:bodyPr>
                     <a:lstStyle/>
                     <a:p>
-                      <a:pPr algn="ctr"/>
+                      <a:pPr algn="ctr">
+                        <a:buNone/>
+                      </a:pPr>
                       <a:r>
                         <a:rPr sz="720">
                           <a:solidFill>
@@ -5084,7 +5245,9 @@
                     </a:bodyPr>
                     <a:lstStyle/>
                     <a:p>
-                      <a:pPr algn="ctr"/>
+                      <a:pPr algn="ctr">
+                        <a:buNone/>
+                      </a:pPr>
                       <a:r>
                         <a:rPr sz="720">
                           <a:solidFill>
@@ -5111,7 +5274,9 @@
                     </a:bodyPr>
                     <a:lstStyle/>
                     <a:p>
-                      <a:pPr algn="l"/>
+                      <a:pPr algn="l">
+                        <a:buNone/>
+                      </a:pPr>
                       <a:r>
                         <a:rPr sz="720">
                           <a:solidFill>
@@ -5138,7 +5303,9 @@
                     </a:bodyPr>
                     <a:lstStyle/>
                     <a:p>
-                      <a:pPr algn="r"/>
+                      <a:pPr algn="r">
+                        <a:buNone/>
+                      </a:pPr>
                       <a:r>
                         <a:rPr sz="720">
                           <a:solidFill>
@@ -5165,7 +5332,9 @@
                     </a:bodyPr>
                     <a:lstStyle/>
                     <a:p>
-                      <a:pPr algn="ctr"/>
+                      <a:pPr algn="ctr">
+                        <a:buNone/>
+                      </a:pPr>
                       <a:r>
                         <a:rPr sz="720">
                           <a:solidFill>
@@ -5192,7 +5361,9 @@
                     </a:bodyPr>
                     <a:lstStyle/>
                     <a:p>
-                      <a:pPr algn="ctr"/>
+                      <a:pPr algn="ctr">
+                        <a:buNone/>
+                      </a:pPr>
                       <a:r>
                         <a:rPr sz="720">
                           <a:solidFill>
@@ -5221,7 +5392,9 @@
                     </a:bodyPr>
                     <a:lstStyle/>
                     <a:p>
-                      <a:pPr algn="ctr"/>
+                      <a:pPr algn="ctr">
+                        <a:buNone/>
+                      </a:pPr>
                       <a:r>
                         <a:rPr sz="720">
                           <a:solidFill>
@@ -5248,7 +5421,9 @@
                     </a:bodyPr>
                     <a:lstStyle/>
                     <a:p>
-                      <a:pPr algn="l"/>
+                      <a:pPr algn="l">
+                        <a:buNone/>
+                      </a:pPr>
                       <a:r>
                         <a:rPr sz="720">
                           <a:solidFill>
@@ -5275,7 +5450,9 @@
                     </a:bodyPr>
                     <a:lstStyle/>
                     <a:p>
-                      <a:pPr algn="r"/>
+                      <a:pPr algn="r">
+                        <a:buNone/>
+                      </a:pPr>
                       <a:r>
                         <a:rPr sz="720">
                           <a:solidFill>
@@ -5302,7 +5479,9 @@
                     </a:bodyPr>
                     <a:lstStyle/>
                     <a:p>
-                      <a:pPr algn="ctr"/>
+                      <a:pPr algn="ctr">
+                        <a:buNone/>
+                      </a:pPr>
                       <a:r>
                         <a:rPr sz="720">
                           <a:solidFill>
@@ -5329,7 +5508,9 @@
                     </a:bodyPr>
                     <a:lstStyle/>
                     <a:p>
-                      <a:pPr algn="ctr"/>
+                      <a:pPr algn="ctr">
+                        <a:buNone/>
+                      </a:pPr>
                       <a:r>
                         <a:rPr sz="720">
                           <a:solidFill>
@@ -5358,7 +5539,9 @@
                     </a:bodyPr>
                     <a:lstStyle/>
                     <a:p>
-                      <a:pPr algn="ctr"/>
+                      <a:pPr algn="ctr">
+                        <a:buNone/>
+                      </a:pPr>
                       <a:r>
                         <a:rPr sz="720">
                           <a:solidFill>
@@ -5385,7 +5568,9 @@
                     </a:bodyPr>
                     <a:lstStyle/>
                     <a:p>
-                      <a:pPr algn="l"/>
+                      <a:pPr algn="l">
+                        <a:buNone/>
+                      </a:pPr>
                       <a:r>
                         <a:rPr sz="720">
                           <a:solidFill>
@@ -5412,7 +5597,9 @@
                     </a:bodyPr>
                     <a:lstStyle/>
                     <a:p>
-                      <a:pPr algn="r"/>
+                      <a:pPr algn="r">
+                        <a:buNone/>
+                      </a:pPr>
                       <a:r>
                         <a:rPr sz="720">
                           <a:solidFill>
@@ -5439,7 +5626,9 @@
                     </a:bodyPr>
                     <a:lstStyle/>
                     <a:p>
-                      <a:pPr algn="ctr"/>
+                      <a:pPr algn="ctr">
+                        <a:buNone/>
+                      </a:pPr>
                       <a:r>
                         <a:rPr sz="720">
                           <a:solidFill>
@@ -5466,7 +5655,9 @@
                     </a:bodyPr>
                     <a:lstStyle/>
                     <a:p>
-                      <a:pPr algn="ctr"/>
+                      <a:pPr algn="ctr">
+                        <a:buNone/>
+                      </a:pPr>
                       <a:r>
                         <a:rPr sz="720">
                           <a:solidFill>
@@ -5495,7 +5686,9 @@
                     </a:bodyPr>
                     <a:lstStyle/>
                     <a:p>
-                      <a:pPr algn="ctr"/>
+                      <a:pPr algn="ctr">
+                        <a:buNone/>
+                      </a:pPr>
                       <a:r>
                         <a:rPr sz="720">
                           <a:solidFill>
@@ -5522,7 +5715,9 @@
                     </a:bodyPr>
                     <a:lstStyle/>
                     <a:p>
-                      <a:pPr algn="l"/>
+                      <a:pPr algn="l">
+                        <a:buNone/>
+                      </a:pPr>
                       <a:r>
                         <a:rPr sz="720">
                           <a:solidFill>
@@ -5549,7 +5744,9 @@
                     </a:bodyPr>
                     <a:lstStyle/>
                     <a:p>
-                      <a:pPr algn="r"/>
+                      <a:pPr algn="r">
+                        <a:buNone/>
+                      </a:pPr>
                       <a:r>
                         <a:rPr sz="720">
                           <a:solidFill>
@@ -5576,7 +5773,9 @@
                     </a:bodyPr>
                     <a:lstStyle/>
                     <a:p>
-                      <a:pPr algn="ctr"/>
+                      <a:pPr algn="ctr">
+                        <a:buNone/>
+                      </a:pPr>
                       <a:r>
                         <a:rPr sz="720">
                           <a:solidFill>
@@ -5603,7 +5802,9 @@
                     </a:bodyPr>
                     <a:lstStyle/>
                     <a:p>
-                      <a:pPr algn="ctr"/>
+                      <a:pPr algn="ctr">
+                        <a:buNone/>
+                      </a:pPr>
                       <a:r>
                         <a:rPr sz="720">
                           <a:solidFill>
@@ -5632,7 +5833,9 @@
                     </a:bodyPr>
                     <a:lstStyle/>
                     <a:p>
-                      <a:pPr algn="ctr"/>
+                      <a:pPr algn="ctr">
+                        <a:buNone/>
+                      </a:pPr>
                       <a:r>
                         <a:rPr sz="720">
                           <a:solidFill>
@@ -5659,7 +5862,9 @@
                     </a:bodyPr>
                     <a:lstStyle/>
                     <a:p>
-                      <a:pPr algn="l"/>
+                      <a:pPr algn="l">
+                        <a:buNone/>
+                      </a:pPr>
                       <a:r>
                         <a:rPr sz="720">
                           <a:solidFill>
@@ -5686,7 +5891,9 @@
                     </a:bodyPr>
                     <a:lstStyle/>
                     <a:p>
-                      <a:pPr algn="r"/>
+                      <a:pPr algn="r">
+                        <a:buNone/>
+                      </a:pPr>
                       <a:r>
                         <a:rPr sz="720">
                           <a:solidFill>
@@ -5713,7 +5920,9 @@
                     </a:bodyPr>
                     <a:lstStyle/>
                     <a:p>
-                      <a:pPr algn="ctr"/>
+                      <a:pPr algn="ctr">
+                        <a:buNone/>
+                      </a:pPr>
                       <a:r>
                         <a:rPr sz="720">
                           <a:solidFill>
@@ -5740,7 +5949,9 @@
                     </a:bodyPr>
                     <a:lstStyle/>
                     <a:p>
-                      <a:pPr algn="ctr"/>
+                      <a:pPr algn="ctr">
+                        <a:buNone/>
+                      </a:pPr>
                       <a:r>
                         <a:rPr sz="720">
                           <a:solidFill>
@@ -5769,7 +5980,9 @@
                     </a:bodyPr>
                     <a:lstStyle/>
                     <a:p>
-                      <a:pPr algn="ctr"/>
+                      <a:pPr algn="ctr">
+                        <a:buNone/>
+                      </a:pPr>
                       <a:r>
                         <a:rPr sz="720">
                           <a:solidFill>
@@ -5796,7 +6009,9 @@
                     </a:bodyPr>
                     <a:lstStyle/>
                     <a:p>
-                      <a:pPr algn="l"/>
+                      <a:pPr algn="l">
+                        <a:buNone/>
+                      </a:pPr>
                       <a:r>
                         <a:rPr sz="720">
                           <a:solidFill>
@@ -5823,7 +6038,9 @@
                     </a:bodyPr>
                     <a:lstStyle/>
                     <a:p>
-                      <a:pPr algn="r"/>
+                      <a:pPr algn="r">
+                        <a:buNone/>
+                      </a:pPr>
                       <a:r>
                         <a:rPr sz="720">
                           <a:solidFill>
@@ -5850,7 +6067,9 @@
                     </a:bodyPr>
                     <a:lstStyle/>
                     <a:p>
-                      <a:pPr algn="ctr"/>
+                      <a:pPr algn="ctr">
+                        <a:buNone/>
+                      </a:pPr>
                       <a:r>
                         <a:rPr sz="720">
                           <a:solidFill>
@@ -5877,7 +6096,9 @@
                     </a:bodyPr>
                     <a:lstStyle/>
                     <a:p>
-                      <a:pPr algn="ctr"/>
+                      <a:pPr algn="ctr">
+                        <a:buNone/>
+                      </a:pPr>
                       <a:r>
                         <a:rPr sz="720">
                           <a:solidFill>
@@ -5904,7 +6125,7 @@
       </p:graphicFrame>
       <p:graphicFrame>
         <p:nvGraphicFramePr>
-          <p:cNvPr id="27" name=""/>
+          <p:cNvPr id="30" name=""/>
           <p:cNvGraphicFramePr/>
           <p:nvPr/>
         </p:nvGraphicFramePr>
@@ -5931,7 +6152,9 @@
                     </a:bodyPr>
                     <a:lstStyle/>
                     <a:p>
-                      <a:pPr algn="ctr"/>
+                      <a:pPr algn="ctr">
+                        <a:buNone/>
+                      </a:pPr>
                       <a:r>
                         <a:rPr sz="713" b="1">
                           <a:solidFill>
@@ -5958,7 +6181,9 @@
                     </a:bodyPr>
                     <a:lstStyle/>
                     <a:p>
-                      <a:pPr algn="l"/>
+                      <a:pPr algn="l">
+                        <a:buNone/>
+                      </a:pPr>
                       <a:r>
                         <a:rPr sz="713" b="1">
                           <a:solidFill>
@@ -5985,7 +6210,9 @@
                     </a:bodyPr>
                     <a:lstStyle/>
                     <a:p>
-                      <a:pPr algn="r"/>
+                      <a:pPr algn="r">
+                        <a:buNone/>
+                      </a:pPr>
                       <a:r>
                         <a:rPr sz="713" b="1">
                           <a:solidFill>
@@ -6012,7 +6239,9 @@
                     </a:bodyPr>
                     <a:lstStyle/>
                     <a:p>
-                      <a:pPr algn="ctr"/>
+                      <a:pPr algn="ctr">
+                        <a:buNone/>
+                      </a:pPr>
                       <a:r>
                         <a:rPr sz="713" b="1">
                           <a:solidFill>
@@ -6039,7 +6268,9 @@
                     </a:bodyPr>
                     <a:lstStyle/>
                     <a:p>
-                      <a:pPr algn="ctr"/>
+                      <a:pPr algn="ctr">
+                        <a:buNone/>
+                      </a:pPr>
                       <a:r>
                         <a:rPr sz="713" b="1">
                           <a:solidFill>
@@ -6068,7 +6299,9 @@
                     </a:bodyPr>
                     <a:lstStyle/>
                     <a:p>
-                      <a:pPr algn="ctr"/>
+                      <a:pPr algn="ctr">
+                        <a:buNone/>
+                      </a:pPr>
                       <a:r>
                         <a:rPr sz="720">
                           <a:solidFill>
@@ -6095,7 +6328,9 @@
                     </a:bodyPr>
                     <a:lstStyle/>
                     <a:p>
-                      <a:pPr algn="l"/>
+                      <a:pPr algn="l">
+                        <a:buNone/>
+                      </a:pPr>
                       <a:r>
                         <a:rPr sz="720">
                           <a:solidFill>
@@ -6122,7 +6357,9 @@
                     </a:bodyPr>
                     <a:lstStyle/>
                     <a:p>
-                      <a:pPr algn="r"/>
+                      <a:pPr algn="r">
+                        <a:buNone/>
+                      </a:pPr>
                       <a:r>
                         <a:rPr sz="720">
                           <a:solidFill>
@@ -6149,7 +6386,9 @@
                     </a:bodyPr>
                     <a:lstStyle/>
                     <a:p>
-                      <a:pPr algn="ctr"/>
+                      <a:pPr algn="ctr">
+                        <a:buNone/>
+                      </a:pPr>
                       <a:r>
                         <a:rPr sz="720">
                           <a:solidFill>
@@ -6176,7 +6415,9 @@
                     </a:bodyPr>
                     <a:lstStyle/>
                     <a:p>
-                      <a:pPr algn="ctr"/>
+                      <a:pPr algn="ctr">
+                        <a:buNone/>
+                      </a:pPr>
                       <a:r>
                         <a:rPr sz="720">
                           <a:solidFill>
@@ -6205,7 +6446,9 @@
                     </a:bodyPr>
                     <a:lstStyle/>
                     <a:p>
-                      <a:pPr algn="ctr"/>
+                      <a:pPr algn="ctr">
+                        <a:buNone/>
+                      </a:pPr>
                       <a:r>
                         <a:rPr sz="720">
                           <a:solidFill>
@@ -6232,7 +6475,9 @@
                     </a:bodyPr>
                     <a:lstStyle/>
                     <a:p>
-                      <a:pPr algn="l"/>
+                      <a:pPr algn="l">
+                        <a:buNone/>
+                      </a:pPr>
                       <a:r>
                         <a:rPr sz="720">
                           <a:solidFill>
@@ -6259,7 +6504,9 @@
                     </a:bodyPr>
                     <a:lstStyle/>
                     <a:p>
-                      <a:pPr algn="r"/>
+                      <a:pPr algn="r">
+                        <a:buNone/>
+                      </a:pPr>
                       <a:r>
                         <a:rPr sz="720">
                           <a:solidFill>
@@ -6286,7 +6533,9 @@
                     </a:bodyPr>
                     <a:lstStyle/>
                     <a:p>
-                      <a:pPr algn="ctr"/>
+                      <a:pPr algn="ctr">
+                        <a:buNone/>
+                      </a:pPr>
                       <a:r>
                         <a:rPr sz="720">
                           <a:solidFill>
@@ -6313,7 +6562,9 @@
                     </a:bodyPr>
                     <a:lstStyle/>
                     <a:p>
-                      <a:pPr algn="ctr"/>
+                      <a:pPr algn="ctr">
+                        <a:buNone/>
+                      </a:pPr>
                       <a:r>
                         <a:rPr sz="720">
                           <a:solidFill>
@@ -6342,7 +6593,9 @@
                     </a:bodyPr>
                     <a:lstStyle/>
                     <a:p>
-                      <a:pPr algn="ctr"/>
+                      <a:pPr algn="ctr">
+                        <a:buNone/>
+                      </a:pPr>
                       <a:r>
                         <a:rPr sz="720">
                           <a:solidFill>
@@ -6369,7 +6622,9 @@
                     </a:bodyPr>
                     <a:lstStyle/>
                     <a:p>
-                      <a:pPr algn="l"/>
+                      <a:pPr algn="l">
+                        <a:buNone/>
+                      </a:pPr>
                       <a:r>
                         <a:rPr sz="720">
                           <a:solidFill>
@@ -6396,7 +6651,9 @@
                     </a:bodyPr>
                     <a:lstStyle/>
                     <a:p>
-                      <a:pPr algn="r"/>
+                      <a:pPr algn="r">
+                        <a:buNone/>
+                      </a:pPr>
                       <a:r>
                         <a:rPr sz="720">
                           <a:solidFill>
@@ -6423,7 +6680,9 @@
                     </a:bodyPr>
                     <a:lstStyle/>
                     <a:p>
-                      <a:pPr algn="ctr"/>
+                      <a:pPr algn="ctr">
+                        <a:buNone/>
+                      </a:pPr>
                       <a:r>
                         <a:rPr sz="720">
                           <a:solidFill>
@@ -6450,7 +6709,9 @@
                     </a:bodyPr>
                     <a:lstStyle/>
                     <a:p>
-                      <a:pPr algn="ctr"/>
+                      <a:pPr algn="ctr">
+                        <a:buNone/>
+                      </a:pPr>
                       <a:r>
                         <a:rPr sz="720">
                           <a:solidFill>
@@ -6479,7 +6740,9 @@
                     </a:bodyPr>
                     <a:lstStyle/>
                     <a:p>
-                      <a:pPr algn="ctr"/>
+                      <a:pPr algn="ctr">
+                        <a:buNone/>
+                      </a:pPr>
                       <a:r>
                         <a:rPr sz="720">
                           <a:solidFill>
@@ -6506,7 +6769,9 @@
                     </a:bodyPr>
                     <a:lstStyle/>
                     <a:p>
-                      <a:pPr algn="l"/>
+                      <a:pPr algn="l">
+                        <a:buNone/>
+                      </a:pPr>
                       <a:r>
                         <a:rPr sz="720">
                           <a:solidFill>
@@ -6533,7 +6798,9 @@
                     </a:bodyPr>
                     <a:lstStyle/>
                     <a:p>
-                      <a:pPr algn="r"/>
+                      <a:pPr algn="r">
+                        <a:buNone/>
+                      </a:pPr>
                       <a:r>
                         <a:rPr sz="720">
                           <a:solidFill>
@@ -6560,7 +6827,9 @@
                     </a:bodyPr>
                     <a:lstStyle/>
                     <a:p>
-                      <a:pPr algn="ctr"/>
+                      <a:pPr algn="ctr">
+                        <a:buNone/>
+                      </a:pPr>
                       <a:r>
                         <a:rPr sz="720">
                           <a:solidFill>
@@ -6587,7 +6856,9 @@
                     </a:bodyPr>
                     <a:lstStyle/>
                     <a:p>
-                      <a:pPr algn="ctr"/>
+                      <a:pPr algn="ctr">
+                        <a:buNone/>
+                      </a:pPr>
                       <a:r>
                         <a:rPr sz="720">
                           <a:solidFill>
@@ -6616,7 +6887,9 @@
                     </a:bodyPr>
                     <a:lstStyle/>
                     <a:p>
-                      <a:pPr algn="ctr"/>
+                      <a:pPr algn="ctr">
+                        <a:buNone/>
+                      </a:pPr>
                       <a:r>
                         <a:rPr sz="720">
                           <a:solidFill>
@@ -6643,7 +6916,9 @@
                     </a:bodyPr>
                     <a:lstStyle/>
                     <a:p>
-                      <a:pPr algn="l"/>
+                      <a:pPr algn="l">
+                        <a:buNone/>
+                      </a:pPr>
                       <a:r>
                         <a:rPr sz="720">
                           <a:solidFill>
@@ -6670,7 +6945,9 @@
                     </a:bodyPr>
                     <a:lstStyle/>
                     <a:p>
-                      <a:pPr algn="r"/>
+                      <a:pPr algn="r">
+                        <a:buNone/>
+                      </a:pPr>
                       <a:r>
                         <a:rPr sz="720">
                           <a:solidFill>
@@ -6697,7 +6974,9 @@
                     </a:bodyPr>
                     <a:lstStyle/>
                     <a:p>
-                      <a:pPr algn="ctr"/>
+                      <a:pPr algn="ctr">
+                        <a:buNone/>
+                      </a:pPr>
                       <a:r>
                         <a:rPr sz="720">
                           <a:solidFill>
@@ -6724,7 +7003,9 @@
                     </a:bodyPr>
                     <a:lstStyle/>
                     <a:p>
-                      <a:pPr algn="ctr"/>
+                      <a:pPr algn="ctr">
+                        <a:buNone/>
+                      </a:pPr>
                       <a:r>
                         <a:rPr sz="720">
                           <a:solidFill>
@@ -6753,7 +7034,9 @@
                     </a:bodyPr>
                     <a:lstStyle/>
                     <a:p>
-                      <a:pPr algn="ctr"/>
+                      <a:pPr algn="ctr">
+                        <a:buNone/>
+                      </a:pPr>
                       <a:r>
                         <a:rPr sz="720">
                           <a:solidFill>
@@ -6780,7 +7063,9 @@
                     </a:bodyPr>
                     <a:lstStyle/>
                     <a:p>
-                      <a:pPr algn="l"/>
+                      <a:pPr algn="l">
+                        <a:buNone/>
+                      </a:pPr>
                       <a:r>
                         <a:rPr sz="720">
                           <a:solidFill>
@@ -6807,7 +7092,9 @@
                     </a:bodyPr>
                     <a:lstStyle/>
                     <a:p>
-                      <a:pPr algn="r"/>
+                      <a:pPr algn="r">
+                        <a:buNone/>
+                      </a:pPr>
                       <a:r>
                         <a:rPr sz="720">
                           <a:solidFill>
@@ -6834,7 +7121,9 @@
                     </a:bodyPr>
                     <a:lstStyle/>
                     <a:p>
-                      <a:pPr algn="ctr"/>
+                      <a:pPr algn="ctr">
+                        <a:buNone/>
+                      </a:pPr>
                       <a:r>
                         <a:rPr sz="720">
                           <a:solidFill>
@@ -6861,7 +7150,9 @@
                     </a:bodyPr>
                     <a:lstStyle/>
                     <a:p>
-                      <a:pPr algn="ctr"/>
+                      <a:pPr algn="ctr">
+                        <a:buNone/>
+                      </a:pPr>
                       <a:r>
                         <a:rPr sz="720">
                           <a:solidFill>
@@ -6890,7 +7181,9 @@
                     </a:bodyPr>
                     <a:lstStyle/>
                     <a:p>
-                      <a:pPr algn="ctr"/>
+                      <a:pPr algn="ctr">
+                        <a:buNone/>
+                      </a:pPr>
                       <a:r>
                         <a:rPr sz="720">
                           <a:solidFill>
@@ -6917,7 +7210,9 @@
                     </a:bodyPr>
                     <a:lstStyle/>
                     <a:p>
-                      <a:pPr algn="l"/>
+                      <a:pPr algn="l">
+                        <a:buNone/>
+                      </a:pPr>
                       <a:r>
                         <a:rPr sz="720">
                           <a:solidFill>
@@ -6944,7 +7239,9 @@
                     </a:bodyPr>
                     <a:lstStyle/>
                     <a:p>
-                      <a:pPr algn="r"/>
+                      <a:pPr algn="r">
+                        <a:buNone/>
+                      </a:pPr>
                       <a:r>
                         <a:rPr sz="720">
                           <a:solidFill>
@@ -6971,7 +7268,9 @@
                     </a:bodyPr>
                     <a:lstStyle/>
                     <a:p>
-                      <a:pPr algn="ctr"/>
+                      <a:pPr algn="ctr">
+                        <a:buNone/>
+                      </a:pPr>
                       <a:r>
                         <a:rPr sz="720">
                           <a:solidFill>
@@ -6998,7 +7297,9 @@
                     </a:bodyPr>
                     <a:lstStyle/>
                     <a:p>
-                      <a:pPr algn="ctr"/>
+                      <a:pPr algn="ctr">
+                        <a:buNone/>
+                      </a:pPr>
                       <a:r>
                         <a:rPr sz="720">
                           <a:solidFill>
@@ -7027,7 +7328,9 @@
                     </a:bodyPr>
                     <a:lstStyle/>
                     <a:p>
-                      <a:pPr algn="ctr"/>
+                      <a:pPr algn="ctr">
+                        <a:buNone/>
+                      </a:pPr>
                       <a:r>
                         <a:rPr sz="720">
                           <a:solidFill>
@@ -7054,7 +7357,9 @@
                     </a:bodyPr>
                     <a:lstStyle/>
                     <a:p>
-                      <a:pPr algn="l"/>
+                      <a:pPr algn="l">
+                        <a:buNone/>
+                      </a:pPr>
                       <a:r>
                         <a:rPr sz="720">
                           <a:solidFill>
@@ -7081,7 +7386,9 @@
                     </a:bodyPr>
                     <a:lstStyle/>
                     <a:p>
-                      <a:pPr algn="r"/>
+                      <a:pPr algn="r">
+                        <a:buNone/>
+                      </a:pPr>
                       <a:r>
                         <a:rPr sz="720">
                           <a:solidFill>
@@ -7108,7 +7415,9 @@
                     </a:bodyPr>
                     <a:lstStyle/>
                     <a:p>
-                      <a:pPr algn="ctr"/>
+                      <a:pPr algn="ctr">
+                        <a:buNone/>
+                      </a:pPr>
                       <a:r>
                         <a:rPr sz="720">
                           <a:solidFill>
@@ -7135,7 +7444,9 @@
                     </a:bodyPr>
                     <a:lstStyle/>
                     <a:p>
-                      <a:pPr algn="ctr"/>
+                      <a:pPr algn="ctr">
+                        <a:buNone/>
+                      </a:pPr>
                       <a:r>
                         <a:rPr sz="720">
                           <a:solidFill>
@@ -7164,7 +7475,9 @@
                     </a:bodyPr>
                     <a:lstStyle/>
                     <a:p>
-                      <a:pPr algn="ctr"/>
+                      <a:pPr algn="ctr">
+                        <a:buNone/>
+                      </a:pPr>
                       <a:r>
                         <a:rPr sz="720">
                           <a:solidFill>
@@ -7191,7 +7504,9 @@
                     </a:bodyPr>
                     <a:lstStyle/>
                     <a:p>
-                      <a:pPr algn="l"/>
+                      <a:pPr algn="l">
+                        <a:buNone/>
+                      </a:pPr>
                       <a:r>
                         <a:rPr sz="720">
                           <a:solidFill>
@@ -7218,7 +7533,9 @@
                     </a:bodyPr>
                     <a:lstStyle/>
                     <a:p>
-                      <a:pPr algn="r"/>
+                      <a:pPr algn="r">
+                        <a:buNone/>
+                      </a:pPr>
                       <a:r>
                         <a:rPr sz="720">
                           <a:solidFill>
@@ -7245,7 +7562,9 @@
                     </a:bodyPr>
                     <a:lstStyle/>
                     <a:p>
-                      <a:pPr algn="ctr"/>
+                      <a:pPr algn="ctr">
+                        <a:buNone/>
+                      </a:pPr>
                       <a:r>
                         <a:rPr sz="720">
                           <a:solidFill>
@@ -7272,7 +7591,9 @@
                     </a:bodyPr>
                     <a:lstStyle/>
                     <a:p>
-                      <a:pPr algn="ctr"/>
+                      <a:pPr algn="ctr">
+                        <a:buNone/>
+                      </a:pPr>
                       <a:r>
                         <a:rPr sz="720">
                           <a:solidFill>
@@ -7370,6 +7691,4253 @@
 </file>
 
 <file path=ppt/slides/slide11.xml><?xml version="1.0" encoding="utf-8"?>
+<p:sld xmlns:p="http://schemas.openxmlformats.org/presentationml/2006/main">
+  <p:cSld>
+    <p:bg>
+      <p:bgPr>
+        <a:solidFill xmlns:a="http://schemas.openxmlformats.org/drawingml/2006/main">
+          <a:srgbClr val="FFFFFF"/>
+        </a:solidFill>
+      </p:bgPr>
+    </p:bg>
+    <p:spTree>
+      <p:nvGrpSpPr>
+        <p:cNvPr id="1" name=""/>
+        <p:cNvGrpSpPr/>
+        <p:nvPr/>
+      </p:nvGrpSpPr>
+      <p:grpSpPr>
+        <a:xfrm xmlns:a="http://schemas.openxmlformats.org/drawingml/2006/main"/>
+      </p:grpSpPr>
+      <p:sp>
+        <p:nvSpPr>
+          <p:cNvPr id="15" name="">
+            <a:extLst xmlns:a="http://schemas.openxmlformats.org/drawingml/2006/main">
+              <a:ext uri="{FF2B5EF4-FFF2-40B4-BE49-F238E27FC236}">
+                <a16:creationId xmlns:a16="http://schemas.microsoft.com/office/drawing/2014/main" id="{AC7079E0-1728-42E2-937C-3FA7A81C073A}"/>
+              </a:ext>
+            </a:extLst>
+          </p:cNvPr>
+          <p:cNvSpPr>
+            <a:spLocks xmlns:a="http://schemas.openxmlformats.org/drawingml/2006/main" noGrp="1"/>
+          </p:cNvSpPr>
+          <p:nvPr/>
+        </p:nvSpPr>
+        <p:spPr>
+          <a:xfrm xmlns:a="http://schemas.openxmlformats.org/drawingml/2006/main">
+            <a:off x="552450" y="285750"/>
+            <a:ext cx="7239000" cy="190500"/>
+          </a:xfrm>
+          <a:prstGeom xmlns:a="http://schemas.openxmlformats.org/drawingml/2006/main" prst="rect">
+            <a:avLst/>
+          </a:prstGeom>
+          <a:noFill xmlns:a="http://schemas.openxmlformats.org/drawingml/2006/main"/>
+          <a:ln xmlns:a="http://schemas.openxmlformats.org/drawingml/2006/main" w="0">
+            <a:noFill/>
+            <a:prstDash val="solid"/>
+          </a:ln>
+        </p:spPr>
+        <p:txBody>
+          <a:bodyPr xmlns:a="http://schemas.openxmlformats.org/drawingml/2006/main" wrap="square" anchor="t">
+            <a:normAutofit fontScale="78788"/>
+          </a:bodyPr>
+          <a:lstStyle xmlns:a="http://schemas.openxmlformats.org/drawingml/2006/main"/>
+          <a:p xmlns:a="http://schemas.openxmlformats.org/drawingml/2006/main">
+            <a:pPr algn="l">
+              <a:lnSpc>
+                <a:spcPct val="100000"/>
+              </a:lnSpc>
+              <a:buNone/>
+              <a:defRPr sz="825" b="1">
+                <a:solidFill>
+                  <a:srgbClr val="B85300"/>
+                </a:solidFill>
+                <a:latin typeface="Itau Display X-Bold"/>
+                <a:ea typeface="Itau Display X-Bold"/>
+                <a:cs typeface="Itau Display X-Bold"/>
+              </a:defRPr>
+            </a:pPr>
+            <a:r>
+              <a:rPr sz="825" b="1">
+                <a:solidFill>
+                  <a:srgbClr val="B85300"/>
+                </a:solidFill>
+                <a:latin typeface="Itau Display X-Bold"/>
+                <a:ea typeface="Itau Display X-Bold"/>
+                <a:cs typeface="Itau Display X-Bold"/>
+              </a:rPr>
+              <a:t>Carteira 101 · governança de cotistas</a:t>
+            </a:r>
+          </a:p>
+        </p:txBody>
+      </p:sp>
+      <p:sp>
+        <p:nvSpPr>
+          <p:cNvPr id="2" name="">
+            <a:extLst xmlns:a="http://schemas.openxmlformats.org/drawingml/2006/main">
+              <a:ext uri="{FF2B5EF4-FFF2-40B4-BE49-F238E27FC236}">
+                <a16:creationId xmlns:a16="http://schemas.microsoft.com/office/drawing/2014/main" id="{D0C641DF-74AA-4FE5-B446-3EDD130FC010}"/>
+              </a:ext>
+            </a:extLst>
+          </p:cNvPr>
+          <p:cNvSpPr>
+            <a:spLocks xmlns:a="http://schemas.openxmlformats.org/drawingml/2006/main" noGrp="1"/>
+          </p:cNvSpPr>
+          <p:nvPr/>
+        </p:nvSpPr>
+        <p:spPr>
+          <a:xfrm xmlns:a="http://schemas.openxmlformats.org/drawingml/2006/main">
+            <a:off x="552450" y="514350"/>
+            <a:ext cx="10287000" cy="552450"/>
+          </a:xfrm>
+          <a:prstGeom xmlns:a="http://schemas.openxmlformats.org/drawingml/2006/main" prst="rect">
+            <a:avLst/>
+          </a:prstGeom>
+          <a:noFill xmlns:a="http://schemas.openxmlformats.org/drawingml/2006/main"/>
+          <a:ln xmlns:a="http://schemas.openxmlformats.org/drawingml/2006/main" w="0">
+            <a:noFill/>
+            <a:prstDash val="solid"/>
+          </a:ln>
+        </p:spPr>
+        <p:txBody>
+          <a:bodyPr xmlns:a="http://schemas.openxmlformats.org/drawingml/2006/main" wrap="square" anchor="ctr">
+            <a:normAutofit fontScale="100000"/>
+          </a:bodyPr>
+          <a:lstStyle xmlns:a="http://schemas.openxmlformats.org/drawingml/2006/main"/>
+          <a:p xmlns:a="http://schemas.openxmlformats.org/drawingml/2006/main">
+            <a:pPr algn="l">
+              <a:lnSpc>
+                <a:spcPct val="98000"/>
+              </a:lnSpc>
+              <a:buNone/>
+              <a:defRPr sz="2250" b="1">
+                <a:solidFill>
+                  <a:srgbClr val="161616"/>
+                </a:solidFill>
+                <a:latin typeface="Itau Display Black"/>
+                <a:ea typeface="Itau Display Black"/>
+                <a:cs typeface="Itau Display Black"/>
+              </a:defRPr>
+            </a:pPr>
+            <a:r>
+              <a:rPr sz="2250" b="1">
+                <a:solidFill>
+                  <a:srgbClr val="161616"/>
+                </a:solidFill>
+                <a:latin typeface="Itau Display Black"/>
+                <a:ea typeface="Itau Display Black"/>
+                <a:cs typeface="Itau Display Black"/>
+              </a:rPr>
+              <a:t>Quatro fundos têm uma posição sênior; três dão maioria de votos à subordinada</a:t>
+            </a:r>
+          </a:p>
+        </p:txBody>
+      </p:sp>
+      <p:sp>
+        <p:nvSpPr>
+          <p:cNvPr id="3" name="">
+            <a:extLst xmlns:a="http://schemas.openxmlformats.org/drawingml/2006/main">
+              <a:ext uri="{FF2B5EF4-FFF2-40B4-BE49-F238E27FC236}">
+                <a16:creationId xmlns:a16="http://schemas.microsoft.com/office/drawing/2014/main" id="{FC914814-129E-4289-9DE5-FCD4546597B9}"/>
+              </a:ext>
+            </a:extLst>
+          </p:cNvPr>
+          <p:cNvSpPr>
+            <a:spLocks xmlns:a="http://schemas.openxmlformats.org/drawingml/2006/main" noGrp="1"/>
+          </p:cNvSpPr>
+          <p:nvPr/>
+        </p:nvSpPr>
+        <p:spPr>
+          <a:xfrm xmlns:a="http://schemas.openxmlformats.org/drawingml/2006/main">
+            <a:off x="11144250" y="476250"/>
+            <a:ext cx="476250" cy="304800"/>
+          </a:xfrm>
+          <a:prstGeom xmlns:a="http://schemas.openxmlformats.org/drawingml/2006/main" prst="rect">
+            <a:avLst/>
+          </a:prstGeom>
+          <a:noFill xmlns:a="http://schemas.openxmlformats.org/drawingml/2006/main"/>
+          <a:ln xmlns:a="http://schemas.openxmlformats.org/drawingml/2006/main" w="0">
+            <a:noFill/>
+            <a:prstDash val="solid"/>
+          </a:ln>
+        </p:spPr>
+        <p:txBody>
+          <a:bodyPr xmlns:a="http://schemas.openxmlformats.org/drawingml/2006/main" wrap="square" anchor="ctr">
+            <a:normAutofit fontScale="100000"/>
+          </a:bodyPr>
+          <a:lstStyle xmlns:a="http://schemas.openxmlformats.org/drawingml/2006/main"/>
+          <a:p xmlns:a="http://schemas.openxmlformats.org/drawingml/2006/main">
+            <a:pPr algn="r">
+              <a:lnSpc>
+                <a:spcPct val="100000"/>
+              </a:lnSpc>
+              <a:buNone/>
+              <a:defRPr sz="1125" b="1">
+                <a:solidFill>
+                  <a:srgbClr val="B85300"/>
+                </a:solidFill>
+                <a:latin typeface="Itau Display X-Bold"/>
+                <a:ea typeface="Itau Display X-Bold"/>
+                <a:cs typeface="Itau Display X-Bold"/>
+              </a:defRPr>
+            </a:pPr>
+            <a:r>
+              <a:rPr sz="1125" b="1">
+                <a:solidFill>
+                  <a:srgbClr val="B85300"/>
+                </a:solidFill>
+                <a:latin typeface="Itau Display X-Bold"/>
+                <a:ea typeface="Itau Display X-Bold"/>
+                <a:cs typeface="Itau Display X-Bold"/>
+              </a:rPr>
+              <a:t>11</a:t>
+            </a:r>
+          </a:p>
+        </p:txBody>
+      </p:sp>
+      <p:sp>
+        <p:nvSpPr>
+          <p:cNvPr id="4" name="">
+            <a:extLst xmlns:a="http://schemas.openxmlformats.org/drawingml/2006/main">
+              <a:ext uri="{FF2B5EF4-FFF2-40B4-BE49-F238E27FC236}">
+                <a16:creationId xmlns:a16="http://schemas.microsoft.com/office/drawing/2014/main" id="{03DF9F3D-AC0D-4E03-B1B5-5653478D28A0}"/>
+              </a:ext>
+            </a:extLst>
+          </p:cNvPr>
+          <p:cNvSpPr>
+            <a:spLocks xmlns:a="http://schemas.openxmlformats.org/drawingml/2006/main" noGrp="1"/>
+          </p:cNvSpPr>
+          <p:nvPr/>
+        </p:nvSpPr>
+        <p:spPr>
+          <a:xfrm xmlns:a="http://schemas.openxmlformats.org/drawingml/2006/main">
+            <a:off x="552450" y="1200150"/>
+            <a:ext cx="2286000" cy="361950"/>
+          </a:xfrm>
+          <a:prstGeom xmlns:a="http://schemas.openxmlformats.org/drawingml/2006/main" prst="rect">
+            <a:avLst/>
+          </a:prstGeom>
+          <a:noFill xmlns:a="http://schemas.openxmlformats.org/drawingml/2006/main"/>
+          <a:ln xmlns:a="http://schemas.openxmlformats.org/drawingml/2006/main" w="0">
+            <a:noFill/>
+            <a:prstDash val="solid"/>
+          </a:ln>
+        </p:spPr>
+        <p:txBody>
+          <a:bodyPr xmlns:a="http://schemas.openxmlformats.org/drawingml/2006/main" wrap="square" anchor="t">
+            <a:normAutofit fontScale="91026"/>
+          </a:bodyPr>
+          <a:lstStyle xmlns:a="http://schemas.openxmlformats.org/drawingml/2006/main"/>
+          <a:p xmlns:a="http://schemas.openxmlformats.org/drawingml/2006/main">
+            <a:pPr algn="l">
+              <a:lnSpc>
+                <a:spcPct val="100000"/>
+              </a:lnSpc>
+              <a:buNone/>
+              <a:defRPr sz="1950" b="1">
+                <a:solidFill>
+                  <a:srgbClr val="B85300"/>
+                </a:solidFill>
+                <a:latin typeface="Itau Display Black"/>
+                <a:ea typeface="Itau Display Black"/>
+                <a:cs typeface="Itau Display Black"/>
+              </a:defRPr>
+            </a:pPr>
+            <a:r>
+              <a:rPr sz="1950" b="1">
+                <a:solidFill>
+                  <a:srgbClr val="B85300"/>
+                </a:solidFill>
+                <a:latin typeface="Itau Display Black"/>
+                <a:ea typeface="Itau Display Black"/>
+                <a:cs typeface="Itau Display Black"/>
+              </a:rPr>
+              <a:t>4 / 20</a:t>
+            </a:r>
+          </a:p>
+        </p:txBody>
+      </p:sp>
+      <p:sp>
+        <p:nvSpPr>
+          <p:cNvPr id="5" name="">
+            <a:extLst xmlns:a="http://schemas.openxmlformats.org/drawingml/2006/main">
+              <a:ext uri="{FF2B5EF4-FFF2-40B4-BE49-F238E27FC236}">
+                <a16:creationId xmlns:a16="http://schemas.microsoft.com/office/drawing/2014/main" id="{BC4674FD-1B83-429A-BA21-295CF72DEA6A}"/>
+              </a:ext>
+            </a:extLst>
+          </p:cNvPr>
+          <p:cNvSpPr>
+            <a:spLocks xmlns:a="http://schemas.openxmlformats.org/drawingml/2006/main" noGrp="1"/>
+          </p:cNvSpPr>
+          <p:nvPr/>
+        </p:nvSpPr>
+        <p:spPr>
+          <a:xfrm xmlns:a="http://schemas.openxmlformats.org/drawingml/2006/main">
+            <a:off x="552450" y="1552575"/>
+            <a:ext cx="2286000" cy="323850"/>
+          </a:xfrm>
+          <a:prstGeom xmlns:a="http://schemas.openxmlformats.org/drawingml/2006/main" prst="rect">
+            <a:avLst/>
+          </a:prstGeom>
+          <a:noFill xmlns:a="http://schemas.openxmlformats.org/drawingml/2006/main"/>
+          <a:ln xmlns:a="http://schemas.openxmlformats.org/drawingml/2006/main" w="0">
+            <a:noFill/>
+            <a:prstDash val="solid"/>
+          </a:ln>
+        </p:spPr>
+        <p:txBody>
+          <a:bodyPr xmlns:a="http://schemas.openxmlformats.org/drawingml/2006/main" wrap="square" anchor="t">
+            <a:normAutofit fontScale="100000"/>
+          </a:bodyPr>
+          <a:lstStyle xmlns:a="http://schemas.openxmlformats.org/drawingml/2006/main"/>
+          <a:p xmlns:a="http://schemas.openxmlformats.org/drawingml/2006/main">
+            <a:pPr algn="l">
+              <a:lnSpc>
+                <a:spcPct val="102000"/>
+              </a:lnSpc>
+              <a:buNone/>
+              <a:defRPr sz="863" b="0">
+                <a:solidFill>
+                  <a:srgbClr val="5B5B5B"/>
+                </a:solidFill>
+                <a:latin typeface="Itau Display"/>
+                <a:ea typeface="Itau Display"/>
+                <a:cs typeface="Itau Display"/>
+              </a:defRPr>
+            </a:pPr>
+            <a:r>
+              <a:rPr sz="863" b="0">
+                <a:solidFill>
+                  <a:srgbClr val="5B5B5B"/>
+                </a:solidFill>
+                <a:latin typeface="Itau Display"/>
+                <a:ea typeface="Itau Display"/>
+                <a:cs typeface="Itau Display"/>
+              </a:rPr>
+              <a:t>uma posição sênior reportada em jul/26</a:t>
+            </a:r>
+          </a:p>
+        </p:txBody>
+      </p:sp>
+      <p:sp>
+        <p:nvSpPr>
+          <p:cNvPr id="6" name="">
+            <a:extLst xmlns:a="http://schemas.openxmlformats.org/drawingml/2006/main">
+              <a:ext uri="{FF2B5EF4-FFF2-40B4-BE49-F238E27FC236}">
+                <a16:creationId xmlns:a16="http://schemas.microsoft.com/office/drawing/2014/main" id="{E2251189-74D3-488F-94EF-75361DCFFDF7}"/>
+              </a:ext>
+            </a:extLst>
+          </p:cNvPr>
+          <p:cNvSpPr>
+            <a:spLocks xmlns:a="http://schemas.openxmlformats.org/drawingml/2006/main" noGrp="1"/>
+          </p:cNvSpPr>
+          <p:nvPr/>
+        </p:nvSpPr>
+        <p:spPr>
+          <a:xfrm xmlns:a="http://schemas.openxmlformats.org/drawingml/2006/main">
+            <a:off x="3257550" y="1200150"/>
+            <a:ext cx="2333625" cy="361950"/>
+          </a:xfrm>
+          <a:prstGeom xmlns:a="http://schemas.openxmlformats.org/drawingml/2006/main" prst="rect">
+            <a:avLst/>
+          </a:prstGeom>
+          <a:noFill xmlns:a="http://schemas.openxmlformats.org/drawingml/2006/main"/>
+          <a:ln xmlns:a="http://schemas.openxmlformats.org/drawingml/2006/main" w="0">
+            <a:noFill/>
+            <a:prstDash val="solid"/>
+          </a:ln>
+        </p:spPr>
+        <p:txBody>
+          <a:bodyPr xmlns:a="http://schemas.openxmlformats.org/drawingml/2006/main" wrap="square" anchor="t">
+            <a:normAutofit fontScale="91026"/>
+          </a:bodyPr>
+          <a:lstStyle xmlns:a="http://schemas.openxmlformats.org/drawingml/2006/main"/>
+          <a:p xmlns:a="http://schemas.openxmlformats.org/drawingml/2006/main">
+            <a:pPr algn="l">
+              <a:lnSpc>
+                <a:spcPct val="100000"/>
+              </a:lnSpc>
+              <a:buNone/>
+              <a:defRPr sz="1950" b="1">
+                <a:solidFill>
+                  <a:srgbClr val="161616"/>
+                </a:solidFill>
+                <a:latin typeface="Itau Display Black"/>
+                <a:ea typeface="Itau Display Black"/>
+                <a:cs typeface="Itau Display Black"/>
+              </a:defRPr>
+            </a:pPr>
+            <a:r>
+              <a:rPr sz="1950" b="1">
+                <a:solidFill>
+                  <a:srgbClr val="161616"/>
+                </a:solidFill>
+                <a:latin typeface="Itau Display Black"/>
+                <a:ea typeface="Itau Display Black"/>
+                <a:cs typeface="Itau Display Black"/>
+              </a:rPr>
+              <a:t>3 / 20</a:t>
+            </a:r>
+          </a:p>
+        </p:txBody>
+      </p:sp>
+      <p:sp>
+        <p:nvSpPr>
+          <p:cNvPr id="7" name="">
+            <a:extLst xmlns:a="http://schemas.openxmlformats.org/drawingml/2006/main">
+              <a:ext uri="{FF2B5EF4-FFF2-40B4-BE49-F238E27FC236}">
+                <a16:creationId xmlns:a16="http://schemas.microsoft.com/office/drawing/2014/main" id="{C7AA254E-D27E-43AB-AA2F-8B8FCA98CF63}"/>
+              </a:ext>
+            </a:extLst>
+          </p:cNvPr>
+          <p:cNvSpPr>
+            <a:spLocks xmlns:a="http://schemas.openxmlformats.org/drawingml/2006/main" noGrp="1"/>
+          </p:cNvSpPr>
+          <p:nvPr/>
+        </p:nvSpPr>
+        <p:spPr>
+          <a:xfrm xmlns:a="http://schemas.openxmlformats.org/drawingml/2006/main">
+            <a:off x="3257550" y="1552575"/>
+            <a:ext cx="2333625" cy="323850"/>
+          </a:xfrm>
+          <a:prstGeom xmlns:a="http://schemas.openxmlformats.org/drawingml/2006/main" prst="rect">
+            <a:avLst/>
+          </a:prstGeom>
+          <a:noFill xmlns:a="http://schemas.openxmlformats.org/drawingml/2006/main"/>
+          <a:ln xmlns:a="http://schemas.openxmlformats.org/drawingml/2006/main" w="0">
+            <a:noFill/>
+            <a:prstDash val="solid"/>
+          </a:ln>
+        </p:spPr>
+        <p:txBody>
+          <a:bodyPr xmlns:a="http://schemas.openxmlformats.org/drawingml/2006/main" wrap="square" anchor="t">
+            <a:normAutofit fontScale="100000"/>
+          </a:bodyPr>
+          <a:lstStyle xmlns:a="http://schemas.openxmlformats.org/drawingml/2006/main"/>
+          <a:p xmlns:a="http://schemas.openxmlformats.org/drawingml/2006/main">
+            <a:pPr algn="l">
+              <a:lnSpc>
+                <a:spcPct val="102000"/>
+              </a:lnSpc>
+              <a:buNone/>
+              <a:defRPr sz="863" b="0">
+                <a:solidFill>
+                  <a:srgbClr val="5B5B5B"/>
+                </a:solidFill>
+                <a:latin typeface="Itau Display"/>
+                <a:ea typeface="Itau Display"/>
+                <a:cs typeface="Itau Display"/>
+              </a:defRPr>
+            </a:pPr>
+            <a:r>
+              <a:rPr sz="863" b="0">
+                <a:solidFill>
+                  <a:srgbClr val="5B5B5B"/>
+                </a:solidFill>
+                <a:latin typeface="Itau Display"/>
+                <a:ea typeface="Itau Display"/>
+                <a:cs typeface="Itau Display"/>
+              </a:rPr>
+              <a:t>Mez + Jr acima de 50% dos votos</a:t>
+            </a:r>
+          </a:p>
+        </p:txBody>
+      </p:sp>
+      <p:sp>
+        <p:nvSpPr>
+          <p:cNvPr id="8" name="">
+            <a:extLst xmlns:a="http://schemas.openxmlformats.org/drawingml/2006/main">
+              <a:ext uri="{FF2B5EF4-FFF2-40B4-BE49-F238E27FC236}">
+                <a16:creationId xmlns:a16="http://schemas.microsoft.com/office/drawing/2014/main" id="{F1848F82-6AE4-44BE-830A-C6312873AE47}"/>
+              </a:ext>
+            </a:extLst>
+          </p:cNvPr>
+          <p:cNvSpPr>
+            <a:spLocks xmlns:a="http://schemas.openxmlformats.org/drawingml/2006/main" noGrp="1"/>
+          </p:cNvSpPr>
+          <p:nvPr/>
+        </p:nvSpPr>
+        <p:spPr>
+          <a:xfrm xmlns:a="http://schemas.openxmlformats.org/drawingml/2006/main">
+            <a:off x="6000750" y="1200150"/>
+            <a:ext cx="2667000" cy="361950"/>
+          </a:xfrm>
+          <a:prstGeom xmlns:a="http://schemas.openxmlformats.org/drawingml/2006/main" prst="rect">
+            <a:avLst/>
+          </a:prstGeom>
+          <a:noFill xmlns:a="http://schemas.openxmlformats.org/drawingml/2006/main"/>
+          <a:ln xmlns:a="http://schemas.openxmlformats.org/drawingml/2006/main" w="0">
+            <a:noFill/>
+            <a:prstDash val="solid"/>
+          </a:ln>
+        </p:spPr>
+        <p:txBody>
+          <a:bodyPr xmlns:a="http://schemas.openxmlformats.org/drawingml/2006/main" wrap="square" anchor="t">
+            <a:normAutofit fontScale="91026"/>
+          </a:bodyPr>
+          <a:lstStyle xmlns:a="http://schemas.openxmlformats.org/drawingml/2006/main"/>
+          <a:p xmlns:a="http://schemas.openxmlformats.org/drawingml/2006/main">
+            <a:pPr algn="l">
+              <a:lnSpc>
+                <a:spcPct val="100000"/>
+              </a:lnSpc>
+              <a:buNone/>
+              <a:defRPr sz="1950" b="1">
+                <a:solidFill>
+                  <a:srgbClr val="161616"/>
+                </a:solidFill>
+                <a:latin typeface="Itau Display Black"/>
+                <a:ea typeface="Itau Display Black"/>
+                <a:cs typeface="Itau Display Black"/>
+              </a:defRPr>
+            </a:pPr>
+            <a:r>
+              <a:rPr sz="1950" b="1">
+                <a:solidFill>
+                  <a:srgbClr val="161616"/>
+                </a:solidFill>
+                <a:latin typeface="Itau Display Black"/>
+                <a:ea typeface="Itau Display Black"/>
+                <a:cs typeface="Itau Display Black"/>
+              </a:rPr>
+              <a:t>0 / 20</a:t>
+            </a:r>
+          </a:p>
+        </p:txBody>
+      </p:sp>
+      <p:sp>
+        <p:nvSpPr>
+          <p:cNvPr id="9" name="">
+            <a:extLst xmlns:a="http://schemas.openxmlformats.org/drawingml/2006/main">
+              <a:ext uri="{FF2B5EF4-FFF2-40B4-BE49-F238E27FC236}">
+                <a16:creationId xmlns:a16="http://schemas.microsoft.com/office/drawing/2014/main" id="{C9883B90-4200-4F3F-85A8-37B2826D43C4}"/>
+              </a:ext>
+            </a:extLst>
+          </p:cNvPr>
+          <p:cNvSpPr>
+            <a:spLocks xmlns:a="http://schemas.openxmlformats.org/drawingml/2006/main" noGrp="1"/>
+          </p:cNvSpPr>
+          <p:nvPr/>
+        </p:nvSpPr>
+        <p:spPr>
+          <a:xfrm xmlns:a="http://schemas.openxmlformats.org/drawingml/2006/main">
+            <a:off x="6000750" y="1552575"/>
+            <a:ext cx="2667000" cy="323850"/>
+          </a:xfrm>
+          <a:prstGeom xmlns:a="http://schemas.openxmlformats.org/drawingml/2006/main" prst="rect">
+            <a:avLst/>
+          </a:prstGeom>
+          <a:noFill xmlns:a="http://schemas.openxmlformats.org/drawingml/2006/main"/>
+          <a:ln xmlns:a="http://schemas.openxmlformats.org/drawingml/2006/main" w="0">
+            <a:noFill/>
+            <a:prstDash val="solid"/>
+          </a:ln>
+        </p:spPr>
+        <p:txBody>
+          <a:bodyPr xmlns:a="http://schemas.openxmlformats.org/drawingml/2006/main" wrap="square" anchor="t">
+            <a:normAutofit fontScale="100000"/>
+          </a:bodyPr>
+          <a:lstStyle xmlns:a="http://schemas.openxmlformats.org/drawingml/2006/main"/>
+          <a:p xmlns:a="http://schemas.openxmlformats.org/drawingml/2006/main">
+            <a:pPr algn="l">
+              <a:lnSpc>
+                <a:spcPct val="102000"/>
+              </a:lnSpc>
+              <a:buNone/>
+              <a:defRPr sz="863" b="0">
+                <a:solidFill>
+                  <a:srgbClr val="5B5B5B"/>
+                </a:solidFill>
+                <a:latin typeface="Itau Display"/>
+                <a:ea typeface="Itau Display"/>
+                <a:cs typeface="Itau Display"/>
+              </a:defRPr>
+            </a:pPr>
+            <a:r>
+              <a:rPr sz="863" b="0">
+                <a:solidFill>
+                  <a:srgbClr val="5B5B5B"/>
+                </a:solidFill>
+                <a:latin typeface="Itau Display"/>
+                <a:ea typeface="Itau Display"/>
+                <a:cs typeface="Itau Display"/>
+              </a:rPr>
+              <a:t>beneficiário final identificado publicamente</a:t>
+            </a:r>
+          </a:p>
+        </p:txBody>
+      </p:sp>
+      <p:sp>
+        <p:nvSpPr>
+          <p:cNvPr id="10" name="">
+            <a:extLst xmlns:a="http://schemas.openxmlformats.org/drawingml/2006/main">
+              <a:ext uri="{FF2B5EF4-FFF2-40B4-BE49-F238E27FC236}">
+                <a16:creationId xmlns:a16="http://schemas.microsoft.com/office/drawing/2014/main" id="{DF5D72A9-CECC-4797-A0D8-51D6427EBA6D}"/>
+              </a:ext>
+            </a:extLst>
+          </p:cNvPr>
+          <p:cNvSpPr>
+            <a:spLocks xmlns:a="http://schemas.openxmlformats.org/drawingml/2006/main" noGrp="1"/>
+          </p:cNvSpPr>
+          <p:nvPr/>
+        </p:nvSpPr>
+        <p:spPr>
+          <a:xfrm xmlns:a="http://schemas.openxmlformats.org/drawingml/2006/main">
+            <a:off x="9048750" y="1200150"/>
+            <a:ext cx="2571750" cy="361950"/>
+          </a:xfrm>
+          <a:prstGeom xmlns:a="http://schemas.openxmlformats.org/drawingml/2006/main" prst="rect">
+            <a:avLst/>
+          </a:prstGeom>
+          <a:noFill xmlns:a="http://schemas.openxmlformats.org/drawingml/2006/main"/>
+          <a:ln xmlns:a="http://schemas.openxmlformats.org/drawingml/2006/main" w="0">
+            <a:noFill/>
+            <a:prstDash val="solid"/>
+          </a:ln>
+        </p:spPr>
+        <p:txBody>
+          <a:bodyPr xmlns:a="http://schemas.openxmlformats.org/drawingml/2006/main" wrap="square" anchor="t">
+            <a:normAutofit fontScale="91026"/>
+          </a:bodyPr>
+          <a:lstStyle xmlns:a="http://schemas.openxmlformats.org/drawingml/2006/main"/>
+          <a:p xmlns:a="http://schemas.openxmlformats.org/drawingml/2006/main">
+            <a:pPr algn="l">
+              <a:lnSpc>
+                <a:spcPct val="100000"/>
+              </a:lnSpc>
+              <a:buNone/>
+              <a:defRPr sz="1950" b="1">
+                <a:solidFill>
+                  <a:srgbClr val="161616"/>
+                </a:solidFill>
+                <a:latin typeface="Itau Display Black"/>
+                <a:ea typeface="Itau Display Black"/>
+                <a:cs typeface="Itau Display Black"/>
+              </a:defRPr>
+            </a:pPr>
+            <a:r>
+              <a:rPr sz="1950" b="1">
+                <a:solidFill>
+                  <a:srgbClr val="161616"/>
+                </a:solidFill>
+                <a:latin typeface="Itau Display Black"/>
+                <a:ea typeface="Itau Display Black"/>
+                <a:cs typeface="Itau Display Black"/>
+              </a:rPr>
+              <a:t>3 alertas</a:t>
+            </a:r>
+          </a:p>
+        </p:txBody>
+      </p:sp>
+      <p:sp>
+        <p:nvSpPr>
+          <p:cNvPr id="11" name="">
+            <a:extLst xmlns:a="http://schemas.openxmlformats.org/drawingml/2006/main">
+              <a:ext uri="{FF2B5EF4-FFF2-40B4-BE49-F238E27FC236}">
+                <a16:creationId xmlns:a16="http://schemas.microsoft.com/office/drawing/2014/main" id="{64F40A8E-9100-4ED3-9AEA-60A8EC4C94A4}"/>
+              </a:ext>
+            </a:extLst>
+          </p:cNvPr>
+          <p:cNvSpPr>
+            <a:spLocks xmlns:a="http://schemas.openxmlformats.org/drawingml/2006/main" noGrp="1"/>
+          </p:cNvSpPr>
+          <p:nvPr/>
+        </p:nvSpPr>
+        <p:spPr>
+          <a:xfrm xmlns:a="http://schemas.openxmlformats.org/drawingml/2006/main">
+            <a:off x="9048750" y="1552575"/>
+            <a:ext cx="2571750" cy="323850"/>
+          </a:xfrm>
+          <a:prstGeom xmlns:a="http://schemas.openxmlformats.org/drawingml/2006/main" prst="rect">
+            <a:avLst/>
+          </a:prstGeom>
+          <a:noFill xmlns:a="http://schemas.openxmlformats.org/drawingml/2006/main"/>
+          <a:ln xmlns:a="http://schemas.openxmlformats.org/drawingml/2006/main" w="0">
+            <a:noFill/>
+            <a:prstDash val="solid"/>
+          </a:ln>
+        </p:spPr>
+        <p:txBody>
+          <a:bodyPr xmlns:a="http://schemas.openxmlformats.org/drawingml/2006/main" wrap="square" anchor="t">
+            <a:normAutofit fontScale="100000"/>
+          </a:bodyPr>
+          <a:lstStyle xmlns:a="http://schemas.openxmlformats.org/drawingml/2006/main"/>
+          <a:p xmlns:a="http://schemas.openxmlformats.org/drawingml/2006/main">
+            <a:pPr algn="l">
+              <a:lnSpc>
+                <a:spcPct val="102000"/>
+              </a:lnSpc>
+              <a:buNone/>
+              <a:defRPr sz="863" b="0">
+                <a:solidFill>
+                  <a:srgbClr val="5B5B5B"/>
+                </a:solidFill>
+                <a:latin typeface="Itau Display"/>
+                <a:ea typeface="Itau Display"/>
+                <a:cs typeface="Itau Display"/>
+              </a:defRPr>
+            </a:pPr>
+            <a:r>
+              <a:rPr sz="863" b="0">
+                <a:solidFill>
+                  <a:srgbClr val="5B5B5B"/>
+                </a:solidFill>
+                <a:latin typeface="Itau Display"/>
+                <a:ea typeface="Itau Display"/>
+                <a:cs typeface="Itau Display"/>
+              </a:rPr>
+              <a:t>iFood, Pine e VTK exigem reconciliação</a:t>
+            </a:r>
+          </a:p>
+        </p:txBody>
+      </p:sp>
+      <p:graphicFrame>
+        <p:nvGraphicFramePr>
+          <p:cNvPr id="29" name=""/>
+          <p:cNvGraphicFramePr/>
+          <p:nvPr/>
+        </p:nvGraphicFramePr>
+        <p:xfrm>
+          <a:off xmlns:a="http://schemas.openxmlformats.org/drawingml/2006/main" x="552450" y="2009775"/>
+          <a:ext xmlns:a="http://schemas.openxmlformats.org/drawingml/2006/main" cx="5410200" cy="4048125"/>
+        </p:xfrm>
+        <a:graphic xmlns:a="http://schemas.openxmlformats.org/drawingml/2006/main">
+          <a:graphicData uri="http://schemas.openxmlformats.org/drawingml/2006/table">
+            <a:tbl>
+              <a:tblPr firstRow="0" firstCol="0" lastRow="0" lastCol="0" bandRow="0" bandCol="0"/>
+              <a:tblGrid>
+                <a:gridCol w="1657350"/>
+                <a:gridCol w="1066800"/>
+                <a:gridCol w="1009650"/>
+                <a:gridCol w="628650"/>
+                <a:gridCol w="1047750"/>
+              </a:tblGrid>
+              <a:tr h="214313">
+                <a:tc>
+                  <a:txBody>
+                    <a:bodyPr wrap="square" anchor="ctr">
+                      <a:normAutofit/>
+                    </a:bodyPr>
+                    <a:lstStyle/>
+                    <a:p>
+                      <a:pPr algn="l">
+                        <a:buNone/>
+                      </a:pPr>
+                      <a:r>
+                        <a:rPr sz="713" b="1">
+                          <a:solidFill>
+                            <a:srgbClr val="FFFFFF"/>
+                          </a:solidFill>
+                          <a:latin typeface="Itau Display X-Bold"/>
+                          <a:ea typeface="Itau Display X-Bold"/>
+                          <a:cs typeface="Itau Display X-Bold"/>
+                        </a:rPr>
+                        <a:t>FIDC / CNPJ</a:t>
+                      </a:r>
+                    </a:p>
+                  </a:txBody>
+                  <a:tcPr marL="28575" marR="28575" marT="14288" marB="14288" anchor="ctr">
+                    <a:solidFill>
+                      <a:srgbClr val="161616"/>
+                    </a:solidFill>
+                  </a:tcPr>
+                </a:tc>
+                <a:tc>
+                  <a:txBody>
+                    <a:bodyPr wrap="square" anchor="ctr">
+                      <a:normAutofit/>
+                    </a:bodyPr>
+                    <a:lstStyle/>
+                    <a:p>
+                      <a:pPr algn="l">
+                        <a:buNone/>
+                      </a:pPr>
+                      <a:r>
+                        <a:rPr sz="713" b="1">
+                          <a:solidFill>
+                            <a:srgbClr val="FFFFFF"/>
+                          </a:solidFill>
+                          <a:latin typeface="Itau Display X-Bold"/>
+                          <a:ea typeface="Itau Display X-Bold"/>
+                          <a:cs typeface="Itau Display X-Bold"/>
+                        </a:rPr>
+                        <a:t>Sênior</a:t>
+                      </a:r>
+                    </a:p>
+                  </a:txBody>
+                  <a:tcPr marL="28575" marR="28575" marT="14288" marB="14288" anchor="ctr">
+                    <a:solidFill>
+                      <a:srgbClr val="161616"/>
+                    </a:solidFill>
+                  </a:tcPr>
+                </a:tc>
+                <a:tc>
+                  <a:txBody>
+                    <a:bodyPr wrap="square" anchor="ctr">
+                      <a:normAutofit/>
+                    </a:bodyPr>
+                    <a:lstStyle/>
+                    <a:p>
+                      <a:pPr algn="l">
+                        <a:buNone/>
+                      </a:pPr>
+                      <a:r>
+                        <a:rPr sz="713" b="1">
+                          <a:solidFill>
+                            <a:srgbClr val="FFFFFF"/>
+                          </a:solidFill>
+                          <a:latin typeface="Itau Display X-Bold"/>
+                          <a:ea typeface="Itau Display X-Bold"/>
+                          <a:cs typeface="Itau Display X-Bold"/>
+                        </a:rPr>
+                        <a:t>Mez + Jr</a:t>
+                      </a:r>
+                    </a:p>
+                  </a:txBody>
+                  <a:tcPr marL="28575" marR="28575" marT="14288" marB="14288" anchor="ctr">
+                    <a:solidFill>
+                      <a:srgbClr val="161616"/>
+                    </a:solidFill>
+                  </a:tcPr>
+                </a:tc>
+                <a:tc>
+                  <a:txBody>
+                    <a:bodyPr wrap="square" anchor="ctr">
+                      <a:normAutofit/>
+                    </a:bodyPr>
+                    <a:lstStyle/>
+                    <a:p>
+                      <a:pPr algn="l">
+                        <a:buNone/>
+                      </a:pPr>
+                      <a:r>
+                        <a:rPr sz="713" b="1">
+                          <a:solidFill>
+                            <a:srgbClr val="FFFFFF"/>
+                          </a:solidFill>
+                          <a:latin typeface="Itau Display X-Bold"/>
+                          <a:ea typeface="Itau Display X-Bold"/>
+                          <a:cs typeface="Itau Display X-Bold"/>
+                        </a:rPr>
+                        <a:t>Voto sub.</a:t>
+                      </a:r>
+                    </a:p>
+                  </a:txBody>
+                  <a:tcPr marL="28575" marR="28575" marT="14288" marB="14288" anchor="ctr">
+                    <a:solidFill>
+                      <a:srgbClr val="161616"/>
+                    </a:solidFill>
+                  </a:tcPr>
+                </a:tc>
+                <a:tc>
+                  <a:txBody>
+                    <a:bodyPr wrap="square" anchor="ctr">
+                      <a:normAutofit/>
+                    </a:bodyPr>
+                    <a:lstStyle/>
+                    <a:p>
+                      <a:pPr algn="l">
+                        <a:buNone/>
+                      </a:pPr>
+                      <a:r>
+                        <a:rPr sz="713" b="1">
+                          <a:solidFill>
+                            <a:srgbClr val="FFFFFF"/>
+                          </a:solidFill>
+                          <a:latin typeface="Itau Display X-Bold"/>
+                          <a:ea typeface="Itau Display X-Bold"/>
+                          <a:cs typeface="Itau Display X-Bold"/>
+                        </a:rPr>
+                        <a:t>Conclusão documental</a:t>
+                      </a:r>
+                    </a:p>
+                  </a:txBody>
+                  <a:tcPr marL="28575" marR="28575" marT="14288" marB="14288" anchor="ctr">
+                    <a:solidFill>
+                      <a:srgbClr val="161616"/>
+                    </a:solidFill>
+                  </a:tcPr>
+                </a:tc>
+              </a:tr>
+              <a:tr h="253603">
+                <a:tc>
+                  <a:txBody>
+                    <a:bodyPr wrap="square" anchor="ctr">
+                      <a:normAutofit/>
+                    </a:bodyPr>
+                    <a:lstStyle/>
+                    <a:p>
+                      <a:pPr algn="l">
+                        <a:buNone/>
+                      </a:pPr>
+                      <a:r>
+                        <a:rPr sz="720">
+                          <a:solidFill>
+                            <a:srgbClr val="2B2B2B"/>
+                          </a:solidFill>
+                          <a:latin typeface="Itau Display"/>
+                          <a:ea typeface="Itau Display"/>
+                          <a:cs typeface="Itau Display"/>
+                        </a:rPr>
+                        <a:t>Angá FGTS +AG</a:t>
+                      </a:r>
+                    </a:p>
+                    <a:p>
+                      <a:pPr algn="l">
+                        <a:buNone/>
+                      </a:pPr>
+                      <a:r>
+                        <a:rPr sz="720">
+                          <a:solidFill>
+                            <a:srgbClr val="2B2B2B"/>
+                          </a:solidFill>
+                          <a:latin typeface="Itau Display"/>
+                          <a:ea typeface="Itau Display"/>
+                          <a:cs typeface="Itau Display"/>
+                        </a:rPr>
+                        <a:t>53.270.983/0001-42</a:t>
+                      </a:r>
+                    </a:p>
+                  </a:txBody>
+                  <a:tcPr marL="28575" marR="28575" marT="9525" marB="9525" anchor="ctr">
+                    <a:solidFill>
+                      <a:srgbClr val="FFFFFF"/>
+                    </a:solidFill>
+                  </a:tcPr>
+                </a:tc>
+                <a:tc>
+                  <a:txBody>
+                    <a:bodyPr wrap="square" anchor="ctr">
+                      <a:normAutofit/>
+                    </a:bodyPr>
+                    <a:lstStyle/>
+                    <a:p>
+                      <a:pPr algn="l">
+                        <a:buNone/>
+                      </a:pPr>
+                      <a:r>
+                        <a:rPr sz="720">
+                          <a:solidFill>
+                            <a:srgbClr val="2B2B2B"/>
+                          </a:solidFill>
+                          <a:latin typeface="Itau Display"/>
+                          <a:ea typeface="Itau Display"/>
+                          <a:cs typeface="Itau Display"/>
+                        </a:rPr>
+                        <a:t>1 série / 1 pos. · 79,8% PL</a:t>
+                      </a:r>
+                    </a:p>
+                  </a:txBody>
+                  <a:tcPr marL="28575" marR="28575" marT="9525" marB="9525" anchor="ctr">
+                    <a:solidFill>
+                      <a:srgbClr val="FFFFFF"/>
+                    </a:solidFill>
+                  </a:tcPr>
+                </a:tc>
+                <a:tc>
+                  <a:txBody>
+                    <a:bodyPr wrap="square" anchor="ctr">
+                      <a:normAutofit/>
+                    </a:bodyPr>
+                    <a:lstStyle/>
+                    <a:p>
+                      <a:pPr algn="l">
+                        <a:buNone/>
+                      </a:pPr>
+                      <a:r>
+                        <a:rPr sz="720">
+                          <a:solidFill>
+                            <a:srgbClr val="2B2B2B"/>
+                          </a:solidFill>
+                          <a:latin typeface="Itau Display"/>
+                          <a:ea typeface="Itau Display"/>
+                          <a:cs typeface="Itau Display"/>
+                        </a:rPr>
+                        <a:t>Mez 2 + Jr 3 · 20,2% PL</a:t>
+                      </a:r>
+                    </a:p>
+                  </a:txBody>
+                  <a:tcPr marL="28575" marR="28575" marT="9525" marB="9525" anchor="ctr">
+                    <a:solidFill>
+                      <a:srgbClr val="FFFFFF"/>
+                    </a:solidFill>
+                  </a:tcPr>
+                </a:tc>
+                <a:tc>
+                  <a:txBody>
+                    <a:bodyPr wrap="square" anchor="ctr">
+                      <a:normAutofit/>
+                    </a:bodyPr>
+                    <a:lstStyle/>
+                    <a:p>
+                      <a:pPr algn="ctr">
+                        <a:buNone/>
+                      </a:pPr>
+                      <a:r>
+                        <a:rPr sz="720">
+                          <a:solidFill>
+                            <a:srgbClr val="2B2B2B"/>
+                          </a:solidFill>
+                          <a:latin typeface="Itau Display"/>
+                          <a:ea typeface="Itau Display"/>
+                          <a:cs typeface="Itau Display"/>
+                        </a:rPr>
+                        <a:t>20,0% QC</a:t>
+                      </a:r>
+                    </a:p>
+                  </a:txBody>
+                  <a:tcPr marL="28575" marR="28575" marT="9525" marB="9525" anchor="ctr">
+                    <a:solidFill>
+                      <a:srgbClr val="FFFFFF"/>
+                    </a:solidFill>
+                  </a:tcPr>
+                </a:tc>
+                <a:tc>
+                  <a:txBody>
+                    <a:bodyPr wrap="square" anchor="ctr">
+                      <a:normAutofit/>
+                    </a:bodyPr>
+                    <a:lstStyle/>
+                    <a:p>
+                      <a:pPr algn="l">
+                        <a:buNone/>
+                      </a:pPr>
+                      <a:r>
+                        <a:rPr sz="720">
+                          <a:solidFill>
+                            <a:srgbClr val="2B2B2B"/>
+                          </a:solidFill>
+                          <a:latin typeface="Itau Display"/>
+                          <a:ea typeface="Itau Display"/>
+                          <a:cs typeface="Itau Display"/>
+                        </a:rPr>
+                        <a:t>1 posição Sr; oferta teve 1 subscritor; 5 posições sub e vetos</a:t>
+                      </a:r>
+                    </a:p>
+                  </a:txBody>
+                  <a:tcPr marL="28575" marR="28575" marT="9525" marB="9525" anchor="ctr">
+                    <a:solidFill>
+                      <a:srgbClr val="FFFFFF"/>
+                    </a:solidFill>
+                  </a:tcPr>
+                </a:tc>
+              </a:tr>
+              <a:tr h="253603">
+                <a:tc>
+                  <a:txBody>
+                    <a:bodyPr wrap="square" anchor="ctr">
+                      <a:normAutofit/>
+                    </a:bodyPr>
+                    <a:lstStyle/>
+                    <a:p>
+                      <a:pPr algn="l">
+                        <a:buNone/>
+                      </a:pPr>
+                      <a:r>
+                        <a:rPr sz="720">
+                          <a:solidFill>
+                            <a:srgbClr val="2B2B2B"/>
+                          </a:solidFill>
+                          <a:latin typeface="Itau Display"/>
+                          <a:ea typeface="Itau Display"/>
+                          <a:cs typeface="Itau Display"/>
+                        </a:rPr>
+                        <a:t>Angá FGTS II</a:t>
+                      </a:r>
+                    </a:p>
+                    <a:p>
+                      <a:pPr algn="l">
+                        <a:buNone/>
+                      </a:pPr>
+                      <a:r>
+                        <a:rPr sz="720">
+                          <a:solidFill>
+                            <a:srgbClr val="2B2B2B"/>
+                          </a:solidFill>
+                          <a:latin typeface="Itau Display"/>
+                          <a:ea typeface="Itau Display"/>
+                          <a:cs typeface="Itau Display"/>
+                        </a:rPr>
+                        <a:t>53.577.135/0001-80</a:t>
+                      </a:r>
+                    </a:p>
+                  </a:txBody>
+                  <a:tcPr marL="28575" marR="28575" marT="9525" marB="9525" anchor="ctr">
+                    <a:solidFill>
+                      <a:srgbClr val="F4F4F4"/>
+                    </a:solidFill>
+                  </a:tcPr>
+                </a:tc>
+                <a:tc>
+                  <a:txBody>
+                    <a:bodyPr wrap="square" anchor="ctr">
+                      <a:normAutofit/>
+                    </a:bodyPr>
+                    <a:lstStyle/>
+                    <a:p>
+                      <a:pPr algn="l">
+                        <a:buNone/>
+                      </a:pPr>
+                      <a:r>
+                        <a:rPr sz="720">
+                          <a:solidFill>
+                            <a:srgbClr val="2B2B2B"/>
+                          </a:solidFill>
+                          <a:latin typeface="Itau Display"/>
+                          <a:ea typeface="Itau Display"/>
+                          <a:cs typeface="Itau Display"/>
+                        </a:rPr>
+                        <a:t>2 séries / 2 pos. · 77,5% PL</a:t>
+                      </a:r>
+                    </a:p>
+                  </a:txBody>
+                  <a:tcPr marL="28575" marR="28575" marT="9525" marB="9525" anchor="ctr">
+                    <a:solidFill>
+                      <a:srgbClr val="F4F4F4"/>
+                    </a:solidFill>
+                  </a:tcPr>
+                </a:tc>
+                <a:tc>
+                  <a:txBody>
+                    <a:bodyPr wrap="square" anchor="ctr">
+                      <a:normAutofit/>
+                    </a:bodyPr>
+                    <a:lstStyle/>
+                    <a:p>
+                      <a:pPr algn="l">
+                        <a:buNone/>
+                      </a:pPr>
+                      <a:r>
+                        <a:rPr sz="720">
+                          <a:solidFill>
+                            <a:srgbClr val="2B2B2B"/>
+                          </a:solidFill>
+                          <a:latin typeface="Itau Display"/>
+                          <a:ea typeface="Itau Display"/>
+                          <a:cs typeface="Itau Display"/>
+                        </a:rPr>
+                        <a:t>Jr 5 · 22,5% PL</a:t>
+                      </a:r>
+                    </a:p>
+                  </a:txBody>
+                  <a:tcPr marL="28575" marR="28575" marT="9525" marB="9525" anchor="ctr">
+                    <a:solidFill>
+                      <a:srgbClr val="F4F4F4"/>
+                    </a:solidFill>
+                  </a:tcPr>
+                </a:tc>
+                <a:tc>
+                  <a:txBody>
+                    <a:bodyPr wrap="square" anchor="ctr">
+                      <a:normAutofit/>
+                    </a:bodyPr>
+                    <a:lstStyle/>
+                    <a:p>
+                      <a:pPr algn="ctr">
+                        <a:buNone/>
+                      </a:pPr>
+                      <a:r>
+                        <a:rPr sz="720">
+                          <a:solidFill>
+                            <a:srgbClr val="2B2B2B"/>
+                          </a:solidFill>
+                          <a:latin typeface="Itau Display"/>
+                          <a:ea typeface="Itau Display"/>
+                          <a:cs typeface="Itau Display"/>
+                        </a:rPr>
+                        <a:t>22,5% FP</a:t>
+                      </a:r>
+                    </a:p>
+                  </a:txBody>
+                  <a:tcPr marL="28575" marR="28575" marT="9525" marB="9525" anchor="ctr">
+                    <a:solidFill>
+                      <a:srgbClr val="F4F4F4"/>
+                    </a:solidFill>
+                  </a:tcPr>
+                </a:tc>
+                <a:tc>
+                  <a:txBody>
+                    <a:bodyPr wrap="square" anchor="ctr">
+                      <a:normAutofit/>
+                    </a:bodyPr>
+                    <a:lstStyle/>
+                    <a:p>
+                      <a:pPr algn="l">
+                        <a:buNone/>
+                      </a:pPr>
+                      <a:r>
+                        <a:rPr sz="720">
+                          <a:solidFill>
+                            <a:srgbClr val="2B2B2B"/>
+                          </a:solidFill>
+                          <a:latin typeface="Itau Display"/>
+                          <a:ea typeface="Itau Display"/>
+                          <a:cs typeface="Itau Display"/>
+                        </a:rPr>
+                        <a:t>2 posições Sr; identidade comum N/D; Jr em fundos Angá</a:t>
+                      </a:r>
+                    </a:p>
+                  </a:txBody>
+                  <a:tcPr marL="28575" marR="28575" marT="9525" marB="9525" anchor="ctr">
+                    <a:solidFill>
+                      <a:srgbClr val="F4F4F4"/>
+                    </a:solidFill>
+                  </a:tcPr>
+                </a:tc>
+              </a:tr>
+              <a:tr h="253603">
+                <a:tc>
+                  <a:txBody>
+                    <a:bodyPr wrap="square" anchor="ctr">
+                      <a:normAutofit/>
+                    </a:bodyPr>
+                    <a:lstStyle/>
+                    <a:p>
+                      <a:pPr algn="l">
+                        <a:buNone/>
+                      </a:pPr>
+                      <a:r>
+                        <a:rPr sz="720">
+                          <a:solidFill>
+                            <a:srgbClr val="2B2B2B"/>
+                          </a:solidFill>
+                          <a:latin typeface="Itau Display"/>
+                          <a:ea typeface="Itau Display"/>
+                          <a:cs typeface="Itau Display"/>
+                        </a:rPr>
+                        <a:t>Angá FGTS III</a:t>
+                      </a:r>
+                    </a:p>
+                    <a:p>
+                      <a:pPr algn="l">
+                        <a:buNone/>
+                      </a:pPr>
+                      <a:r>
+                        <a:rPr sz="720">
+                          <a:solidFill>
+                            <a:srgbClr val="2B2B2B"/>
+                          </a:solidFill>
+                          <a:latin typeface="Itau Display"/>
+                          <a:ea typeface="Itau Display"/>
+                          <a:cs typeface="Itau Display"/>
+                        </a:rPr>
+                        <a:t>54.810.968/0001-02</a:t>
+                      </a:r>
+                    </a:p>
+                  </a:txBody>
+                  <a:tcPr marL="28575" marR="28575" marT="9525" marB="9525" anchor="ctr">
+                    <a:solidFill>
+                      <a:srgbClr val="FFFFFF"/>
+                    </a:solidFill>
+                  </a:tcPr>
+                </a:tc>
+                <a:tc>
+                  <a:txBody>
+                    <a:bodyPr wrap="square" anchor="ctr">
+                      <a:normAutofit/>
+                    </a:bodyPr>
+                    <a:lstStyle/>
+                    <a:p>
+                      <a:pPr algn="l">
+                        <a:buNone/>
+                      </a:pPr>
+                      <a:r>
+                        <a:rPr sz="720">
+                          <a:solidFill>
+                            <a:srgbClr val="2B2B2B"/>
+                          </a:solidFill>
+                          <a:latin typeface="Itau Display"/>
+                          <a:ea typeface="Itau Display"/>
+                          <a:cs typeface="Itau Display"/>
+                        </a:rPr>
+                        <a:t>1 série / 2 pos. · 83,6% PL</a:t>
+                      </a:r>
+                    </a:p>
+                  </a:txBody>
+                  <a:tcPr marL="28575" marR="28575" marT="9525" marB="9525" anchor="ctr">
+                    <a:solidFill>
+                      <a:srgbClr val="FFFFFF"/>
+                    </a:solidFill>
+                  </a:tcPr>
+                </a:tc>
+                <a:tc>
+                  <a:txBody>
+                    <a:bodyPr wrap="square" anchor="ctr">
+                      <a:normAutofit/>
+                    </a:bodyPr>
+                    <a:lstStyle/>
+                    <a:p>
+                      <a:pPr algn="l">
+                        <a:buNone/>
+                      </a:pPr>
+                      <a:r>
+                        <a:rPr sz="720">
+                          <a:solidFill>
+                            <a:srgbClr val="2B2B2B"/>
+                          </a:solidFill>
+                          <a:latin typeface="Itau Display"/>
+                          <a:ea typeface="Itau Display"/>
+                          <a:cs typeface="Itau Display"/>
+                        </a:rPr>
+                        <a:t>Jr 5 · 16,4% PL</a:t>
+                      </a:r>
+                    </a:p>
+                  </a:txBody>
+                  <a:tcPr marL="28575" marR="28575" marT="9525" marB="9525" anchor="ctr">
+                    <a:solidFill>
+                      <a:srgbClr val="FFFFFF"/>
+                    </a:solidFill>
+                  </a:tcPr>
+                </a:tc>
+                <a:tc>
+                  <a:txBody>
+                    <a:bodyPr wrap="square" anchor="ctr">
+                      <a:normAutofit/>
+                    </a:bodyPr>
+                    <a:lstStyle/>
+                    <a:p>
+                      <a:pPr algn="ctr">
+                        <a:buNone/>
+                      </a:pPr>
+                      <a:r>
+                        <a:rPr sz="720">
+                          <a:solidFill>
+                            <a:srgbClr val="2B2B2B"/>
+                          </a:solidFill>
+                          <a:latin typeface="Itau Display"/>
+                          <a:ea typeface="Itau Display"/>
+                          <a:cs typeface="Itau Display"/>
+                        </a:rPr>
+                        <a:t>16,4% FP</a:t>
+                      </a:r>
+                    </a:p>
+                  </a:txBody>
+                  <a:tcPr marL="28575" marR="28575" marT="9525" marB="9525" anchor="ctr">
+                    <a:solidFill>
+                      <a:srgbClr val="FFFFFF"/>
+                    </a:solidFill>
+                  </a:tcPr>
+                </a:tc>
+                <a:tc>
+                  <a:txBody>
+                    <a:bodyPr wrap="square" anchor="ctr">
+                      <a:normAutofit/>
+                    </a:bodyPr>
+                    <a:lstStyle/>
+                    <a:p>
+                      <a:pPr algn="l">
+                        <a:buNone/>
+                      </a:pPr>
+                      <a:r>
+                        <a:rPr sz="720">
+                          <a:solidFill>
+                            <a:srgbClr val="2B2B2B"/>
+                          </a:solidFill>
+                          <a:latin typeface="Itau Display"/>
+                          <a:ea typeface="Itau Display"/>
+                          <a:cs typeface="Itau Display"/>
+                        </a:rPr>
+                        <a:t>2 posições na mesma série; Jr restrita a fundos Angá</a:t>
+                      </a:r>
+                    </a:p>
+                  </a:txBody>
+                  <a:tcPr marL="28575" marR="28575" marT="9525" marB="9525" anchor="ctr">
+                    <a:solidFill>
+                      <a:srgbClr val="FFFFFF"/>
+                    </a:solidFill>
+                  </a:tcPr>
+                </a:tc>
+              </a:tr>
+              <a:tr h="253603">
+                <a:tc>
+                  <a:txBody>
+                    <a:bodyPr wrap="square" anchor="ctr">
+                      <a:normAutofit/>
+                    </a:bodyPr>
+                    <a:lstStyle/>
+                    <a:p>
+                      <a:pPr algn="l">
+                        <a:buNone/>
+                      </a:pPr>
+                      <a:r>
+                        <a:rPr sz="720">
+                          <a:solidFill>
+                            <a:srgbClr val="2B2B2B"/>
+                          </a:solidFill>
+                          <a:latin typeface="Itau Display"/>
+                          <a:ea typeface="Itau Display"/>
+                          <a:cs typeface="Itau Display"/>
+                        </a:rPr>
+                        <a:t>Cartão Supplier II</a:t>
+                      </a:r>
+                    </a:p>
+                    <a:p>
+                      <a:pPr algn="l">
+                        <a:buNone/>
+                      </a:pPr>
+                      <a:r>
+                        <a:rPr sz="720">
+                          <a:solidFill>
+                            <a:srgbClr val="2B2B2B"/>
+                          </a:solidFill>
+                          <a:latin typeface="Itau Display"/>
+                          <a:ea typeface="Itau Display"/>
+                          <a:cs typeface="Itau Display"/>
+                        </a:rPr>
+                        <a:t>50.988.212/0001-05</a:t>
+                      </a:r>
+                    </a:p>
+                  </a:txBody>
+                  <a:tcPr marL="28575" marR="28575" marT="9525" marB="9525" anchor="ctr">
+                    <a:solidFill>
+                      <a:srgbClr val="F4F4F4"/>
+                    </a:solidFill>
+                  </a:tcPr>
+                </a:tc>
+                <a:tc>
+                  <a:txBody>
+                    <a:bodyPr wrap="square" anchor="ctr">
+                      <a:normAutofit/>
+                    </a:bodyPr>
+                    <a:lstStyle/>
+                    <a:p>
+                      <a:pPr algn="l">
+                        <a:buNone/>
+                      </a:pPr>
+                      <a:r>
+                        <a:rPr sz="720">
+                          <a:solidFill>
+                            <a:srgbClr val="2B2B2B"/>
+                          </a:solidFill>
+                          <a:latin typeface="Itau Display"/>
+                          <a:ea typeface="Itau Display"/>
+                          <a:cs typeface="Itau Display"/>
+                        </a:rPr>
+                        <a:t>2 séries / 2 pos. · 92,8% PL</a:t>
+                      </a:r>
+                    </a:p>
+                  </a:txBody>
+                  <a:tcPr marL="28575" marR="28575" marT="9525" marB="9525" anchor="ctr">
+                    <a:solidFill>
+                      <a:srgbClr val="F4F4F4"/>
+                    </a:solidFill>
+                  </a:tcPr>
+                </a:tc>
+                <a:tc>
+                  <a:txBody>
+                    <a:bodyPr wrap="square" anchor="ctr">
+                      <a:normAutofit/>
+                    </a:bodyPr>
+                    <a:lstStyle/>
+                    <a:p>
+                      <a:pPr algn="l">
+                        <a:buNone/>
+                      </a:pPr>
+                      <a:r>
+                        <a:rPr sz="720">
+                          <a:solidFill>
+                            <a:srgbClr val="2B2B2B"/>
+                          </a:solidFill>
+                          <a:latin typeface="Itau Display"/>
+                          <a:ea typeface="Itau Display"/>
+                          <a:cs typeface="Itau Display"/>
+                        </a:rPr>
+                        <a:t>Jr 1 · 7,2% PL</a:t>
+                      </a:r>
+                    </a:p>
+                  </a:txBody>
+                  <a:tcPr marL="28575" marR="28575" marT="9525" marB="9525" anchor="ctr">
+                    <a:solidFill>
+                      <a:srgbClr val="F4F4F4"/>
+                    </a:solidFill>
+                  </a:tcPr>
+                </a:tc>
+                <a:tc>
+                  <a:txBody>
+                    <a:bodyPr wrap="square" anchor="ctr">
+                      <a:normAutofit/>
+                    </a:bodyPr>
+                    <a:lstStyle/>
+                    <a:p>
+                      <a:pPr algn="ctr">
+                        <a:buNone/>
+                      </a:pPr>
+                      <a:r>
+                        <a:rPr sz="720">
+                          <a:solidFill>
+                            <a:srgbClr val="2B2B2B"/>
+                          </a:solidFill>
+                          <a:latin typeface="Itau Display"/>
+                          <a:ea typeface="Itau Display"/>
+                          <a:cs typeface="Itau Display"/>
+                        </a:rPr>
+                        <a:t>4,9% QC</a:t>
+                      </a:r>
+                    </a:p>
+                  </a:txBody>
+                  <a:tcPr marL="28575" marR="28575" marT="9525" marB="9525" anchor="ctr">
+                    <a:solidFill>
+                      <a:srgbClr val="F4F4F4"/>
+                    </a:solidFill>
+                  </a:tcPr>
+                </a:tc>
+                <a:tc>
+                  <a:txBody>
+                    <a:bodyPr wrap="square" anchor="ctr">
+                      <a:normAutofit/>
+                    </a:bodyPr>
+                    <a:lstStyle/>
+                    <a:p>
+                      <a:pPr algn="l">
+                        <a:buNone/>
+                      </a:pPr>
+                      <a:r>
+                        <a:rPr sz="720">
+                          <a:solidFill>
+                            <a:srgbClr val="2B2B2B"/>
+                          </a:solidFill>
+                          <a:latin typeface="Itau Display"/>
+                          <a:ea typeface="Itau Display"/>
+                          <a:cs typeface="Itau Display"/>
+                        </a:rPr>
+                        <a:t>2 blocos Sr e 1 posição Jr</a:t>
+                      </a:r>
+                    </a:p>
+                  </a:txBody>
+                  <a:tcPr marL="28575" marR="28575" marT="9525" marB="9525" anchor="ctr">
+                    <a:solidFill>
+                      <a:srgbClr val="F4F4F4"/>
+                    </a:solidFill>
+                  </a:tcPr>
+                </a:tc>
+              </a:tr>
+              <a:tr h="253603">
+                <a:tc>
+                  <a:txBody>
+                    <a:bodyPr wrap="square" anchor="ctr">
+                      <a:normAutofit/>
+                    </a:bodyPr>
+                    <a:lstStyle/>
+                    <a:p>
+                      <a:pPr algn="l">
+                        <a:buNone/>
+                      </a:pPr>
+                      <a:r>
+                        <a:rPr sz="720">
+                          <a:solidFill>
+                            <a:srgbClr val="2B2B2B"/>
+                          </a:solidFill>
+                          <a:latin typeface="Itau Display"/>
+                          <a:ea typeface="Itau Display"/>
+                          <a:cs typeface="Itau Display"/>
+                        </a:rPr>
+                        <a:t>Estratégia Vinculada I</a:t>
+                      </a:r>
+                    </a:p>
+                    <a:p>
+                      <a:pPr algn="l">
+                        <a:buNone/>
+                      </a:pPr>
+                      <a:r>
+                        <a:rPr sz="720">
+                          <a:solidFill>
+                            <a:srgbClr val="2B2B2B"/>
+                          </a:solidFill>
+                          <a:latin typeface="Itau Display"/>
+                          <a:ea typeface="Itau Display"/>
+                          <a:cs typeface="Itau Display"/>
+                        </a:rPr>
+                        <a:t>54.559.035/0001-94</a:t>
+                      </a:r>
+                    </a:p>
+                  </a:txBody>
+                  <a:tcPr marL="28575" marR="28575" marT="9525" marB="9525" anchor="ctr">
+                    <a:solidFill>
+                      <a:srgbClr val="FFFFFF"/>
+                    </a:solidFill>
+                  </a:tcPr>
+                </a:tc>
+                <a:tc>
+                  <a:txBody>
+                    <a:bodyPr wrap="square" anchor="ctr">
+                      <a:normAutofit/>
+                    </a:bodyPr>
+                    <a:lstStyle/>
+                    <a:p>
+                      <a:pPr algn="l">
+                        <a:buNone/>
+                      </a:pPr>
+                      <a:r>
+                        <a:rPr sz="720">
+                          <a:solidFill>
+                            <a:srgbClr val="2B2B2B"/>
+                          </a:solidFill>
+                          <a:latin typeface="Itau Display"/>
+                          <a:ea typeface="Itau Display"/>
+                          <a:cs typeface="Itau Display"/>
+                        </a:rPr>
+                        <a:t>1 série / 9 pos. · 86,2% PL</a:t>
+                      </a:r>
+                    </a:p>
+                  </a:txBody>
+                  <a:tcPr marL="28575" marR="28575" marT="9525" marB="9525" anchor="ctr">
+                    <a:solidFill>
+                      <a:srgbClr val="FFFFFF"/>
+                    </a:solidFill>
+                  </a:tcPr>
+                </a:tc>
+                <a:tc>
+                  <a:txBody>
+                    <a:bodyPr wrap="square" anchor="ctr">
+                      <a:normAutofit/>
+                    </a:bodyPr>
+                    <a:lstStyle/>
+                    <a:p>
+                      <a:pPr algn="l">
+                        <a:buNone/>
+                      </a:pPr>
+                      <a:r>
+                        <a:rPr sz="720">
+                          <a:solidFill>
+                            <a:srgbClr val="2B2B2B"/>
+                          </a:solidFill>
+                          <a:latin typeface="Itau Display"/>
+                          <a:ea typeface="Itau Display"/>
+                          <a:cs typeface="Itau Display"/>
+                        </a:rPr>
+                        <a:t>Jr 8 · 12,7% PL</a:t>
+                      </a:r>
+                    </a:p>
+                  </a:txBody>
+                  <a:tcPr marL="28575" marR="28575" marT="9525" marB="9525" anchor="ctr">
+                    <a:solidFill>
+                      <a:srgbClr val="FFFFFF"/>
+                    </a:solidFill>
+                  </a:tcPr>
+                </a:tc>
+                <a:tc>
+                  <a:txBody>
+                    <a:bodyPr wrap="square" anchor="ctr">
+                      <a:normAutofit/>
+                    </a:bodyPr>
+                    <a:lstStyle/>
+                    <a:p>
+                      <a:pPr algn="ctr">
+                        <a:buNone/>
+                      </a:pPr>
+                      <a:r>
+                        <a:rPr sz="720">
+                          <a:solidFill>
+                            <a:srgbClr val="2B2B2B"/>
+                          </a:solidFill>
+                          <a:latin typeface="Itau Display"/>
+                          <a:ea typeface="Itau Display"/>
+                          <a:cs typeface="Itau Display"/>
+                        </a:rPr>
+                        <a:t>11,4% QC</a:t>
+                      </a:r>
+                    </a:p>
+                  </a:txBody>
+                  <a:tcPr marL="28575" marR="28575" marT="9525" marB="9525" anchor="ctr">
+                    <a:solidFill>
+                      <a:srgbClr val="FFFFFF"/>
+                    </a:solidFill>
+                  </a:tcPr>
+                </a:tc>
+                <a:tc>
+                  <a:txBody>
+                    <a:bodyPr wrap="square" anchor="ctr">
+                      <a:normAutofit/>
+                    </a:bodyPr>
+                    <a:lstStyle/>
+                    <a:p>
+                      <a:pPr algn="l">
+                        <a:buNone/>
+                      </a:pPr>
+                      <a:r>
+                        <a:rPr sz="720">
+                          <a:solidFill>
+                            <a:srgbClr val="2B2B2B"/>
+                          </a:solidFill>
+                          <a:latin typeface="Itau Display"/>
+                          <a:ea typeface="Itau Display"/>
+                          <a:cs typeface="Itau Display"/>
+                        </a:rPr>
+                        <a:t>9 posições Sr + 8 Jr; X.2 reconcilia 98,9%</a:t>
+                      </a:r>
+                    </a:p>
+                  </a:txBody>
+                  <a:tcPr marL="28575" marR="28575" marT="9525" marB="9525" anchor="ctr">
+                    <a:solidFill>
+                      <a:srgbClr val="FFFFFF"/>
+                    </a:solidFill>
+                  </a:tcPr>
+                </a:tc>
+              </a:tr>
+              <a:tr h="253603">
+                <a:tc>
+                  <a:txBody>
+                    <a:bodyPr wrap="square" anchor="ctr">
+                      <a:normAutofit/>
+                    </a:bodyPr>
+                    <a:lstStyle/>
+                    <a:p>
+                      <a:pPr algn="l">
+                        <a:buNone/>
+                      </a:pPr>
+                      <a:r>
+                        <a:rPr sz="720">
+                          <a:solidFill>
+                            <a:srgbClr val="2B2B2B"/>
+                          </a:solidFill>
+                          <a:latin typeface="Itau Display"/>
+                          <a:ea typeface="Itau Display"/>
+                          <a:cs typeface="Itau Display"/>
+                        </a:rPr>
+                        <a:t>Agibank II</a:t>
+                      </a:r>
+                    </a:p>
+                    <a:p>
+                      <a:pPr algn="l">
+                        <a:buNone/>
+                      </a:pPr>
+                      <a:r>
+                        <a:rPr sz="720">
+                          <a:solidFill>
+                            <a:srgbClr val="2B2B2B"/>
+                          </a:solidFill>
+                          <a:latin typeface="Itau Display"/>
+                          <a:ea typeface="Itau Display"/>
+                          <a:cs typeface="Itau Display"/>
+                        </a:rPr>
+                        <a:t>65.976.848/0001-04</a:t>
+                      </a:r>
+                    </a:p>
+                  </a:txBody>
+                  <a:tcPr marL="28575" marR="28575" marT="9525" marB="9525" anchor="ctr">
+                    <a:solidFill>
+                      <a:srgbClr val="F4F4F4"/>
+                    </a:solidFill>
+                  </a:tcPr>
+                </a:tc>
+                <a:tc>
+                  <a:txBody>
+                    <a:bodyPr wrap="square" anchor="ctr">
+                      <a:normAutofit/>
+                    </a:bodyPr>
+                    <a:lstStyle/>
+                    <a:p>
+                      <a:pPr algn="l">
+                        <a:buNone/>
+                      </a:pPr>
+                      <a:r>
+                        <a:rPr sz="720">
+                          <a:solidFill>
+                            <a:srgbClr val="2B2B2B"/>
+                          </a:solidFill>
+                          <a:latin typeface="Itau Display"/>
+                          <a:ea typeface="Itau Display"/>
+                          <a:cs typeface="Itau Display"/>
+                        </a:rPr>
+                        <a:t>1 série / 104 pos. · 84,8% PL</a:t>
+                      </a:r>
+                    </a:p>
+                  </a:txBody>
+                  <a:tcPr marL="28575" marR="28575" marT="9525" marB="9525" anchor="ctr">
+                    <a:solidFill>
+                      <a:srgbClr val="F4F4F4"/>
+                    </a:solidFill>
+                  </a:tcPr>
+                </a:tc>
+                <a:tc>
+                  <a:txBody>
+                    <a:bodyPr wrap="square" anchor="ctr">
+                      <a:normAutofit/>
+                    </a:bodyPr>
+                    <a:lstStyle/>
+                    <a:p>
+                      <a:pPr algn="l">
+                        <a:buNone/>
+                      </a:pPr>
+                      <a:r>
+                        <a:rPr sz="720">
+                          <a:solidFill>
+                            <a:srgbClr val="2B2B2B"/>
+                          </a:solidFill>
+                          <a:latin typeface="Itau Display"/>
+                          <a:ea typeface="Itau Display"/>
+                          <a:cs typeface="Itau Display"/>
+                        </a:rPr>
+                        <a:t>Jr 1 · 15,3% PL</a:t>
+                      </a:r>
+                    </a:p>
+                  </a:txBody>
+                  <a:tcPr marL="28575" marR="28575" marT="9525" marB="9525" anchor="ctr">
+                    <a:solidFill>
+                      <a:srgbClr val="F4F4F4"/>
+                    </a:solidFill>
+                  </a:tcPr>
+                </a:tc>
+                <a:tc>
+                  <a:txBody>
+                    <a:bodyPr wrap="square" anchor="ctr">
+                      <a:normAutofit/>
+                    </a:bodyPr>
+                    <a:lstStyle/>
+                    <a:p>
+                      <a:pPr algn="ctr">
+                        <a:buNone/>
+                      </a:pPr>
+                      <a:r>
+                        <a:rPr sz="720">
+                          <a:solidFill>
+                            <a:srgbClr val="2B2B2B"/>
+                          </a:solidFill>
+                          <a:latin typeface="Itau Display"/>
+                          <a:ea typeface="Itau Display"/>
+                          <a:cs typeface="Itau Display"/>
+                        </a:rPr>
+                        <a:t>15,1% QC</a:t>
+                      </a:r>
+                    </a:p>
+                  </a:txBody>
+                  <a:tcPr marL="28575" marR="28575" marT="9525" marB="9525" anchor="ctr">
+                    <a:solidFill>
+                      <a:srgbClr val="F4F4F4"/>
+                    </a:solidFill>
+                  </a:tcPr>
+                </a:tc>
+                <a:tc>
+                  <a:txBody>
+                    <a:bodyPr wrap="square" anchor="ctr">
+                      <a:normAutofit/>
+                    </a:bodyPr>
+                    <a:lstStyle/>
+                    <a:p>
+                      <a:pPr algn="l">
+                        <a:buNone/>
+                      </a:pPr>
+                      <a:r>
+                        <a:rPr sz="720">
+                          <a:solidFill>
+                            <a:srgbClr val="2B2B2B"/>
+                          </a:solidFill>
+                          <a:latin typeface="Itau Display"/>
+                          <a:ea typeface="Itau Display"/>
+                          <a:cs typeface="Itau Display"/>
+                        </a:rPr>
+                        <a:t>104 posições Sr; coordenação assemblear elevada</a:t>
+                      </a:r>
+                    </a:p>
+                  </a:txBody>
+                  <a:tcPr marL="28575" marR="28575" marT="9525" marB="9525" anchor="ctr">
+                    <a:solidFill>
+                      <a:srgbClr val="F4F4F4"/>
+                    </a:solidFill>
+                  </a:tcPr>
+                </a:tc>
+              </a:tr>
+              <a:tr h="253603">
+                <a:tc>
+                  <a:txBody>
+                    <a:bodyPr wrap="square" anchor="ctr">
+                      <a:normAutofit/>
+                    </a:bodyPr>
+                    <a:lstStyle/>
+                    <a:p>
+                      <a:pPr algn="l">
+                        <a:buNone/>
+                      </a:pPr>
+                      <a:r>
+                        <a:rPr sz="720">
+                          <a:solidFill>
+                            <a:srgbClr val="2B2B2B"/>
+                          </a:solidFill>
+                          <a:latin typeface="Itau Display"/>
+                          <a:ea typeface="Itau Display"/>
+                          <a:cs typeface="Itau Display"/>
+                        </a:rPr>
+                        <a:t>Angá FGTS I</a:t>
+                      </a:r>
+                    </a:p>
+                    <a:p>
+                      <a:pPr algn="l">
+                        <a:buNone/>
+                      </a:pPr>
+                      <a:r>
+                        <a:rPr sz="720">
+                          <a:solidFill>
+                            <a:srgbClr val="2B2B2B"/>
+                          </a:solidFill>
+                          <a:latin typeface="Itau Display"/>
+                          <a:ea typeface="Itau Display"/>
+                          <a:cs typeface="Itau Display"/>
+                        </a:rPr>
+                        <a:t>51.957.370/0001-52</a:t>
+                      </a:r>
+                    </a:p>
+                  </a:txBody>
+                  <a:tcPr marL="28575" marR="28575" marT="9525" marB="9525" anchor="ctr">
+                    <a:solidFill>
+                      <a:srgbClr val="FFFFFF"/>
+                    </a:solidFill>
+                  </a:tcPr>
+                </a:tc>
+                <a:tc>
+                  <a:txBody>
+                    <a:bodyPr wrap="square" anchor="ctr">
+                      <a:normAutofit/>
+                    </a:bodyPr>
+                    <a:lstStyle/>
+                    <a:p>
+                      <a:pPr algn="l">
+                        <a:buNone/>
+                      </a:pPr>
+                      <a:r>
+                        <a:rPr sz="720">
+                          <a:solidFill>
+                            <a:srgbClr val="2B2B2B"/>
+                          </a:solidFill>
+                          <a:latin typeface="Itau Display"/>
+                          <a:ea typeface="Itau Display"/>
+                          <a:cs typeface="Itau Display"/>
+                        </a:rPr>
+                        <a:t>1 série / 1 pos. · 83,2% PL</a:t>
+                      </a:r>
+                    </a:p>
+                  </a:txBody>
+                  <a:tcPr marL="28575" marR="28575" marT="9525" marB="9525" anchor="ctr">
+                    <a:solidFill>
+                      <a:srgbClr val="FFFFFF"/>
+                    </a:solidFill>
+                  </a:tcPr>
+                </a:tc>
+                <a:tc>
+                  <a:txBody>
+                    <a:bodyPr wrap="square" anchor="ctr">
+                      <a:normAutofit/>
+                    </a:bodyPr>
+                    <a:lstStyle/>
+                    <a:p>
+                      <a:pPr algn="l">
+                        <a:buNone/>
+                      </a:pPr>
+                      <a:r>
+                        <a:rPr sz="720">
+                          <a:solidFill>
+                            <a:srgbClr val="2B2B2B"/>
+                          </a:solidFill>
+                          <a:latin typeface="Itau Display"/>
+                          <a:ea typeface="Itau Display"/>
+                          <a:cs typeface="Itau Display"/>
+                        </a:rPr>
+                        <a:t>Mez 12 + Jr 4 · 16,8% PL</a:t>
+                      </a:r>
+                    </a:p>
+                  </a:txBody>
+                  <a:tcPr marL="28575" marR="28575" marT="9525" marB="9525" anchor="ctr">
+                    <a:solidFill>
+                      <a:srgbClr val="FFFFFF"/>
+                    </a:solidFill>
+                  </a:tcPr>
+                </a:tc>
+                <a:tc>
+                  <a:txBody>
+                    <a:bodyPr wrap="square" anchor="ctr">
+                      <a:normAutofit/>
+                    </a:bodyPr>
+                    <a:lstStyle/>
+                    <a:p>
+                      <a:pPr algn="ctr">
+                        <a:buNone/>
+                      </a:pPr>
+                      <a:r>
+                        <a:rPr sz="720">
+                          <a:solidFill>
+                            <a:srgbClr val="2B2B2B"/>
+                          </a:solidFill>
+                          <a:latin typeface="Itau Display"/>
+                          <a:ea typeface="Itau Display"/>
+                          <a:cs typeface="Itau Display"/>
+                        </a:rPr>
+                        <a:t>10,3% QC</a:t>
+                      </a:r>
+                    </a:p>
+                  </a:txBody>
+                  <a:tcPr marL="28575" marR="28575" marT="9525" marB="9525" anchor="ctr">
+                    <a:solidFill>
+                      <a:srgbClr val="FFFFFF"/>
+                    </a:solidFill>
+                  </a:tcPr>
+                </a:tc>
+                <a:tc>
+                  <a:txBody>
+                    <a:bodyPr wrap="square" anchor="ctr">
+                      <a:normAutofit/>
+                    </a:bodyPr>
+                    <a:lstStyle/>
+                    <a:p>
+                      <a:pPr algn="l">
+                        <a:buNone/>
+                      </a:pPr>
+                      <a:r>
+                        <a:rPr sz="720">
+                          <a:solidFill>
+                            <a:srgbClr val="2B2B2B"/>
+                          </a:solidFill>
+                          <a:latin typeface="Itau Display"/>
+                          <a:ea typeface="Itau Display"/>
+                          <a:cs typeface="Itau Display"/>
+                        </a:rPr>
+                        <a:t>1 posição Sr; 16 posições sub e vetos</a:t>
+                      </a:r>
+                    </a:p>
+                  </a:txBody>
+                  <a:tcPr marL="28575" marR="28575" marT="9525" marB="9525" anchor="ctr">
+                    <a:solidFill>
+                      <a:srgbClr val="FFFFFF"/>
+                    </a:solidFill>
+                  </a:tcPr>
+                </a:tc>
+              </a:tr>
+              <a:tr h="253603">
+                <a:tc>
+                  <a:txBody>
+                    <a:bodyPr wrap="square" anchor="ctr">
+                      <a:normAutofit/>
+                    </a:bodyPr>
+                    <a:lstStyle/>
+                    <a:p>
+                      <a:pPr algn="l">
+                        <a:buNone/>
+                      </a:pPr>
+                      <a:r>
+                        <a:rPr sz="720">
+                          <a:solidFill>
+                            <a:srgbClr val="2B2B2B"/>
+                          </a:solidFill>
+                          <a:latin typeface="Itau Display"/>
+                          <a:ea typeface="Itau Display"/>
+                          <a:cs typeface="Itau Display"/>
+                        </a:rPr>
+                        <a:t>MT FGTS Receivables II</a:t>
+                      </a:r>
+                    </a:p>
+                    <a:p>
+                      <a:pPr algn="l">
+                        <a:buNone/>
+                      </a:pPr>
+                      <a:r>
+                        <a:rPr sz="720">
+                          <a:solidFill>
+                            <a:srgbClr val="2B2B2B"/>
+                          </a:solidFill>
+                          <a:latin typeface="Itau Display"/>
+                          <a:ea typeface="Itau Display"/>
+                          <a:cs typeface="Itau Display"/>
+                        </a:rPr>
+                        <a:t>54.464.892/0001-00</a:t>
+                      </a:r>
+                    </a:p>
+                  </a:txBody>
+                  <a:tcPr marL="28575" marR="28575" marT="9525" marB="9525" anchor="ctr">
+                    <a:solidFill>
+                      <a:srgbClr val="F4F4F4"/>
+                    </a:solidFill>
+                  </a:tcPr>
+                </a:tc>
+                <a:tc>
+                  <a:txBody>
+                    <a:bodyPr wrap="square" anchor="ctr">
+                      <a:normAutofit/>
+                    </a:bodyPr>
+                    <a:lstStyle/>
+                    <a:p>
+                      <a:pPr algn="l">
+                        <a:buNone/>
+                      </a:pPr>
+                      <a:r>
+                        <a:rPr sz="720">
+                          <a:solidFill>
+                            <a:srgbClr val="2B2B2B"/>
+                          </a:solidFill>
+                          <a:latin typeface="Itau Display"/>
+                          <a:ea typeface="Itau Display"/>
+                          <a:cs typeface="Itau Display"/>
+                        </a:rPr>
+                        <a:t>3 séries / 56 pos. · 80,3% PL</a:t>
+                      </a:r>
+                    </a:p>
+                  </a:txBody>
+                  <a:tcPr marL="28575" marR="28575" marT="9525" marB="9525" anchor="ctr">
+                    <a:solidFill>
+                      <a:srgbClr val="F4F4F4"/>
+                    </a:solidFill>
+                  </a:tcPr>
+                </a:tc>
+                <a:tc>
+                  <a:txBody>
+                    <a:bodyPr wrap="square" anchor="ctr">
+                      <a:normAutofit/>
+                    </a:bodyPr>
+                    <a:lstStyle/>
+                    <a:p>
+                      <a:pPr algn="l">
+                        <a:buNone/>
+                      </a:pPr>
+                      <a:r>
+                        <a:rPr sz="720">
+                          <a:solidFill>
+                            <a:srgbClr val="2B2B2B"/>
+                          </a:solidFill>
+                          <a:latin typeface="Itau Display"/>
+                          <a:ea typeface="Itau Display"/>
+                          <a:cs typeface="Itau Display"/>
+                        </a:rPr>
+                        <a:t>Mez 14 + Jr 1 · 19,7% PL</a:t>
+                      </a:r>
+                    </a:p>
+                  </a:txBody>
+                  <a:tcPr marL="28575" marR="28575" marT="9525" marB="9525" anchor="ctr">
+                    <a:solidFill>
+                      <a:srgbClr val="F4F4F4"/>
+                    </a:solidFill>
+                  </a:tcPr>
+                </a:tc>
+                <a:tc>
+                  <a:txBody>
+                    <a:bodyPr wrap="square" anchor="ctr">
+                      <a:normAutofit/>
+                    </a:bodyPr>
+                    <a:lstStyle/>
+                    <a:p>
+                      <a:pPr algn="ctr">
+                        <a:buNone/>
+                      </a:pPr>
+                      <a:r>
+                        <a:rPr sz="720">
+                          <a:solidFill>
+                            <a:srgbClr val="2B2B2B"/>
+                          </a:solidFill>
+                          <a:latin typeface="Itau Display"/>
+                          <a:ea typeface="Itau Display"/>
+                          <a:cs typeface="Itau Display"/>
+                        </a:rPr>
+                        <a:t>15,6% QC</a:t>
+                      </a:r>
+                    </a:p>
+                  </a:txBody>
+                  <a:tcPr marL="28575" marR="28575" marT="9525" marB="9525" anchor="ctr">
+                    <a:solidFill>
+                      <a:srgbClr val="F4F4F4"/>
+                    </a:solidFill>
+                  </a:tcPr>
+                </a:tc>
+                <a:tc>
+                  <a:txBody>
+                    <a:bodyPr wrap="square" anchor="ctr">
+                      <a:normAutofit/>
+                    </a:bodyPr>
+                    <a:lstStyle/>
+                    <a:p>
+                      <a:pPr algn="l">
+                        <a:buNone/>
+                      </a:pPr>
+                      <a:r>
+                        <a:rPr sz="720">
+                          <a:solidFill>
+                            <a:srgbClr val="2B2B2B"/>
+                          </a:solidFill>
+                          <a:latin typeface="Itau Display"/>
+                          <a:ea typeface="Itau Display"/>
+                          <a:cs typeface="Itau Display"/>
+                        </a:rPr>
+                        <a:t>56 posições Sr + 14 Mez; retenção mínima Jr</a:t>
+                      </a:r>
+                    </a:p>
+                  </a:txBody>
+                  <a:tcPr marL="28575" marR="28575" marT="9525" marB="9525" anchor="ctr">
+                    <a:solidFill>
+                      <a:srgbClr val="F4F4F4"/>
+                    </a:solidFill>
+                  </a:tcPr>
+                </a:tc>
+              </a:tr>
+              <a:tr h="253603">
+                <a:tc>
+                  <a:txBody>
+                    <a:bodyPr wrap="square" anchor="ctr">
+                      <a:normAutofit/>
+                    </a:bodyPr>
+                    <a:lstStyle/>
+                    <a:p>
+                      <a:pPr algn="l">
+                        <a:buNone/>
+                      </a:pPr>
+                      <a:r>
+                        <a:rPr sz="720">
+                          <a:solidFill>
+                            <a:srgbClr val="2B2B2B"/>
+                          </a:solidFill>
+                          <a:latin typeface="Itau Display"/>
+                          <a:ea typeface="Itau Display"/>
+                          <a:cs typeface="Itau Display"/>
+                        </a:rPr>
+                        <a:t>PagSeguro I</a:t>
+                      </a:r>
+                    </a:p>
+                    <a:p>
+                      <a:pPr algn="l">
+                        <a:buNone/>
+                      </a:pPr>
+                      <a:r>
+                        <a:rPr sz="720">
+                          <a:solidFill>
+                            <a:srgbClr val="2B2B2B"/>
+                          </a:solidFill>
+                          <a:latin typeface="Itau Display"/>
+                          <a:ea typeface="Itau Display"/>
+                          <a:cs typeface="Itau Display"/>
+                        </a:rPr>
+                        <a:t>28.169.275/0001-72</a:t>
+                      </a:r>
+                    </a:p>
+                  </a:txBody>
+                  <a:tcPr marL="28575" marR="28575" marT="9525" marB="9525" anchor="ctr">
+                    <a:solidFill>
+                      <a:srgbClr val="FFF1E6"/>
+                    </a:solidFill>
+                  </a:tcPr>
+                </a:tc>
+                <a:tc>
+                  <a:txBody>
+                    <a:bodyPr wrap="square" anchor="ctr">
+                      <a:normAutofit/>
+                    </a:bodyPr>
+                    <a:lstStyle/>
+                    <a:p>
+                      <a:pPr algn="l">
+                        <a:buNone/>
+                      </a:pPr>
+                      <a:r>
+                        <a:rPr sz="720">
+                          <a:solidFill>
+                            <a:srgbClr val="2B2B2B"/>
+                          </a:solidFill>
+                          <a:latin typeface="Itau Display"/>
+                          <a:ea typeface="Itau Display"/>
+                          <a:cs typeface="Itau Display"/>
+                        </a:rPr>
+                        <a:t>2 séries / 2 pos. · 34,6% PL</a:t>
+                      </a:r>
+                    </a:p>
+                  </a:txBody>
+                  <a:tcPr marL="28575" marR="28575" marT="9525" marB="9525" anchor="ctr">
+                    <a:solidFill>
+                      <a:srgbClr val="FFF1E6"/>
+                    </a:solidFill>
+                  </a:tcPr>
+                </a:tc>
+                <a:tc>
+                  <a:txBody>
+                    <a:bodyPr wrap="square" anchor="ctr">
+                      <a:normAutofit/>
+                    </a:bodyPr>
+                    <a:lstStyle/>
+                    <a:p>
+                      <a:pPr algn="l">
+                        <a:buNone/>
+                      </a:pPr>
+                      <a:r>
+                        <a:rPr sz="720">
+                          <a:solidFill>
+                            <a:srgbClr val="2B2B2B"/>
+                          </a:solidFill>
+                          <a:latin typeface="Itau Display"/>
+                          <a:ea typeface="Itau Display"/>
+                          <a:cs typeface="Itau Display"/>
+                        </a:rPr>
+                        <a:t>Jr 3 · 65,4% PL</a:t>
+                      </a:r>
+                    </a:p>
+                  </a:txBody>
+                  <a:tcPr marL="28575" marR="28575" marT="9525" marB="9525" anchor="ctr">
+                    <a:solidFill>
+                      <a:srgbClr val="FFF1E6"/>
+                    </a:solidFill>
+                  </a:tcPr>
+                </a:tc>
+                <a:tc>
+                  <a:txBody>
+                    <a:bodyPr wrap="square" anchor="ctr">
+                      <a:normAutofit/>
+                    </a:bodyPr>
+                    <a:lstStyle/>
+                    <a:p>
+                      <a:pPr algn="ctr">
+                        <a:buNone/>
+                      </a:pPr>
+                      <a:r>
+                        <a:rPr sz="720">
+                          <a:solidFill>
+                            <a:srgbClr val="2B2B2B"/>
+                          </a:solidFill>
+                          <a:latin typeface="Itau Display"/>
+                          <a:ea typeface="Itau Display"/>
+                          <a:cs typeface="Itau Display"/>
+                        </a:rPr>
+                        <a:t>98,95% QC</a:t>
+                      </a:r>
+                    </a:p>
+                  </a:txBody>
+                  <a:tcPr marL="28575" marR="28575" marT="9525" marB="9525" anchor="ctr">
+                    <a:solidFill>
+                      <a:srgbClr val="FFF1E6"/>
+                    </a:solidFill>
+                  </a:tcPr>
+                </a:tc>
+                <a:tc>
+                  <a:txBody>
+                    <a:bodyPr wrap="square" anchor="ctr">
+                      <a:normAutofit/>
+                    </a:bodyPr>
+                    <a:lstStyle/>
+                    <a:p>
+                      <a:pPr algn="l">
+                        <a:buNone/>
+                      </a:pPr>
+                      <a:r>
+                        <a:rPr sz="720">
+                          <a:solidFill>
+                            <a:srgbClr val="2B2B2B"/>
+                          </a:solidFill>
+                          <a:latin typeface="Itau Display"/>
+                          <a:ea typeface="Itau Display"/>
+                          <a:cs typeface="Itau Display"/>
+                        </a:rPr>
+                        <a:t>Jr exclusivamente PagSeguro; maioria econômica e assemblear</a:t>
+                      </a:r>
+                    </a:p>
+                  </a:txBody>
+                  <a:tcPr marL="28575" marR="28575" marT="9525" marB="9525" anchor="ctr">
+                    <a:solidFill>
+                      <a:srgbClr val="FFF1E6"/>
+                    </a:solidFill>
+                  </a:tcPr>
+                </a:tc>
+              </a:tr>
+              <a:tr h="253603">
+                <a:tc>
+                  <a:txBody>
+                    <a:bodyPr wrap="square" anchor="ctr">
+                      <a:normAutofit/>
+                    </a:bodyPr>
+                    <a:lstStyle/>
+                    <a:p>
+                      <a:pPr algn="l">
+                        <a:buNone/>
+                      </a:pPr>
+                      <a:r>
+                        <a:rPr sz="720">
+                          <a:solidFill>
+                            <a:srgbClr val="2B2B2B"/>
+                          </a:solidFill>
+                          <a:latin typeface="Itau Display"/>
+                          <a:ea typeface="Itau Display"/>
+                          <a:cs typeface="Itau Display"/>
+                        </a:rPr>
+                        <a:t>MT INSS Receivables III</a:t>
+                      </a:r>
+                    </a:p>
+                    <a:p>
+                      <a:pPr algn="l">
+                        <a:buNone/>
+                      </a:pPr>
+                      <a:r>
+                        <a:rPr sz="720">
+                          <a:solidFill>
+                            <a:srgbClr val="2B2B2B"/>
+                          </a:solidFill>
+                          <a:latin typeface="Itau Display"/>
+                          <a:ea typeface="Itau Display"/>
+                          <a:cs typeface="Itau Display"/>
+                        </a:rPr>
+                        <a:t>44.173.467/0001-09</a:t>
+                      </a:r>
+                    </a:p>
+                  </a:txBody>
+                  <a:tcPr marL="28575" marR="28575" marT="9525" marB="9525" anchor="ctr">
+                    <a:solidFill>
+                      <a:srgbClr val="FFF1E6"/>
+                    </a:solidFill>
+                  </a:tcPr>
+                </a:tc>
+                <a:tc>
+                  <a:txBody>
+                    <a:bodyPr wrap="square" anchor="ctr">
+                      <a:normAutofit/>
+                    </a:bodyPr>
+                    <a:lstStyle/>
+                    <a:p>
+                      <a:pPr algn="l">
+                        <a:buNone/>
+                      </a:pPr>
+                      <a:r>
+                        <a:rPr sz="720">
+                          <a:solidFill>
+                            <a:srgbClr val="2B2B2B"/>
+                          </a:solidFill>
+                          <a:latin typeface="Itau Display"/>
+                          <a:ea typeface="Itau Display"/>
+                          <a:cs typeface="Itau Display"/>
+                        </a:rPr>
+                        <a:t>1 série / 1 pos. · 90,2% PL</a:t>
+                      </a:r>
+                    </a:p>
+                  </a:txBody>
+                  <a:tcPr marL="28575" marR="28575" marT="9525" marB="9525" anchor="ctr">
+                    <a:solidFill>
+                      <a:srgbClr val="FFF1E6"/>
+                    </a:solidFill>
+                  </a:tcPr>
+                </a:tc>
+                <a:tc>
+                  <a:txBody>
+                    <a:bodyPr wrap="square" anchor="ctr">
+                      <a:normAutofit/>
+                    </a:bodyPr>
+                    <a:lstStyle/>
+                    <a:p>
+                      <a:pPr algn="l">
+                        <a:buNone/>
+                      </a:pPr>
+                      <a:r>
+                        <a:rPr sz="720">
+                          <a:solidFill>
+                            <a:srgbClr val="2B2B2B"/>
+                          </a:solidFill>
+                          <a:latin typeface="Itau Display"/>
+                          <a:ea typeface="Itau Display"/>
+                          <a:cs typeface="Itau Display"/>
+                        </a:rPr>
+                        <a:t>Mez 1 + Jr 1 · 9,8% PL</a:t>
+                      </a:r>
+                    </a:p>
+                  </a:txBody>
+                  <a:tcPr marL="28575" marR="28575" marT="9525" marB="9525" anchor="ctr">
+                    <a:solidFill>
+                      <a:srgbClr val="FFF1E6"/>
+                    </a:solidFill>
+                  </a:tcPr>
+                </a:tc>
+                <a:tc>
+                  <a:txBody>
+                    <a:bodyPr wrap="square" anchor="ctr">
+                      <a:normAutofit/>
+                    </a:bodyPr>
+                    <a:lstStyle/>
+                    <a:p>
+                      <a:pPr algn="ctr">
+                        <a:buNone/>
+                      </a:pPr>
+                      <a:r>
+                        <a:rPr sz="720">
+                          <a:solidFill>
+                            <a:srgbClr val="2B2B2B"/>
+                          </a:solidFill>
+                          <a:latin typeface="Itau Display"/>
+                          <a:ea typeface="Itau Display"/>
+                          <a:cs typeface="Itau Display"/>
+                        </a:rPr>
+                        <a:t>98,77% QC</a:t>
+                      </a:r>
+                    </a:p>
+                  </a:txBody>
+                  <a:tcPr marL="28575" marR="28575" marT="9525" marB="9525" anchor="ctr">
+                    <a:solidFill>
+                      <a:srgbClr val="FFF1E6"/>
+                    </a:solidFill>
+                  </a:tcPr>
+                </a:tc>
+                <a:tc>
+                  <a:txBody>
+                    <a:bodyPr wrap="square" anchor="ctr">
+                      <a:normAutofit/>
+                    </a:bodyPr>
+                    <a:lstStyle/>
+                    <a:p>
+                      <a:pPr algn="l">
+                        <a:buNone/>
+                      </a:pPr>
+                      <a:r>
+                        <a:rPr sz="720">
+                          <a:solidFill>
+                            <a:srgbClr val="2B2B2B"/>
+                          </a:solidFill>
+                          <a:latin typeface="Itau Display"/>
+                          <a:ea typeface="Itau Display"/>
+                          <a:cs typeface="Itau Display"/>
+                        </a:rPr>
+                        <a:t>Sub domina votos gerais; decisões-chave reservadas a Sr+Mez</a:t>
+                      </a:r>
+                    </a:p>
+                  </a:txBody>
+                  <a:tcPr marL="28575" marR="28575" marT="9525" marB="9525" anchor="ctr">
+                    <a:solidFill>
+                      <a:srgbClr val="FFF1E6"/>
+                    </a:solidFill>
+                  </a:tcPr>
+                </a:tc>
+              </a:tr>
+            </a:tbl>
+          </a:graphicData>
+        </a:graphic>
+      </p:graphicFrame>
+      <p:sp>
+        <p:nvSpPr>
+          <p:cNvPr id="14" name="">
+            <a:extLst xmlns:a="http://schemas.openxmlformats.org/drawingml/2006/main">
+              <a:ext uri="{FF2B5EF4-FFF2-40B4-BE49-F238E27FC236}">
+                <a16:creationId xmlns:a16="http://schemas.microsoft.com/office/drawing/2014/main" id="{DEDFCDCA-AC87-43FC-ABA2-1D2B7CFAFB33}"/>
+              </a:ext>
+            </a:extLst>
+          </p:cNvPr>
+          <p:cNvSpPr>
+            <a:spLocks xmlns:a="http://schemas.openxmlformats.org/drawingml/2006/main" noGrp="1"/>
+          </p:cNvSpPr>
+          <p:nvPr/>
+        </p:nvSpPr>
+        <p:spPr>
+          <a:xfrm xmlns:a="http://schemas.openxmlformats.org/drawingml/2006/main">
+            <a:off x="552450" y="6438900"/>
+            <a:ext cx="11068050" cy="180975"/>
+          </a:xfrm>
+          <a:prstGeom xmlns:a="http://schemas.openxmlformats.org/drawingml/2006/main" prst="rect">
+            <a:avLst/>
+          </a:prstGeom>
+          <a:noFill xmlns:a="http://schemas.openxmlformats.org/drawingml/2006/main"/>
+          <a:ln xmlns:a="http://schemas.openxmlformats.org/drawingml/2006/main" w="0">
+            <a:noFill/>
+            <a:prstDash val="solid"/>
+          </a:ln>
+        </p:spPr>
+        <p:txBody>
+          <a:bodyPr xmlns:a="http://schemas.openxmlformats.org/drawingml/2006/main" wrap="none" anchor="ctr">
+            <a:normAutofit fontScale="82398"/>
+          </a:bodyPr>
+          <a:lstStyle xmlns:a="http://schemas.openxmlformats.org/drawingml/2006/main"/>
+          <a:p xmlns:a="http://schemas.openxmlformats.org/drawingml/2006/main">
+            <a:pPr algn="l">
+              <a:lnSpc>
+                <a:spcPct val="100000"/>
+              </a:lnSpc>
+              <a:buNone/>
+              <a:defRPr sz="713" b="0">
+                <a:solidFill>
+                  <a:srgbClr val="858585"/>
+                </a:solidFill>
+                <a:latin typeface="Itau Display"/>
+                <a:ea typeface="Itau Display"/>
+                <a:cs typeface="Itau Display"/>
+              </a:defRPr>
+            </a:pPr>
+            <a:r>
+              <a:rPr sz="713" b="0">
+                <a:solidFill>
+                  <a:srgbClr val="858585"/>
+                </a:solidFill>
+                <a:latin typeface="Itau Display"/>
+                <a:ea typeface="Itau Display"/>
+                <a:cs typeface="Itau Display"/>
+              </a:rPr>
+              <a:t>Posições = contas por série no Informe Mensal; podem repetir o investidor. QC = 1 cota/1 voto; FP = posição financeira. % por beneficiário exige registro do escriturador/B3.</a:t>
+            </a:r>
+          </a:p>
+        </p:txBody>
+      </p:sp>
+      <p:graphicFrame>
+        <p:nvGraphicFramePr>
+          <p:cNvPr id="31" name=""/>
+          <p:cNvGraphicFramePr/>
+          <p:nvPr/>
+        </p:nvGraphicFramePr>
+        <p:xfrm>
+          <a:off xmlns:a="http://schemas.openxmlformats.org/drawingml/2006/main" x="6210300" y="2009775"/>
+          <a:ext xmlns:a="http://schemas.openxmlformats.org/drawingml/2006/main" cx="5410200" cy="4048125"/>
+        </p:xfrm>
+        <a:graphic xmlns:a="http://schemas.openxmlformats.org/drawingml/2006/main">
+          <a:graphicData uri="http://schemas.openxmlformats.org/drawingml/2006/table">
+            <a:tbl>
+              <a:tblPr firstRow="0" firstCol="0" lastRow="0" lastCol="0" bandRow="0" bandCol="0"/>
+              <a:tblGrid>
+                <a:gridCol w="1657350"/>
+                <a:gridCol w="1066800"/>
+                <a:gridCol w="1009650"/>
+                <a:gridCol w="628650"/>
+                <a:gridCol w="1047750"/>
+              </a:tblGrid>
+              <a:tr h="214313">
+                <a:tc>
+                  <a:txBody>
+                    <a:bodyPr wrap="square" anchor="ctr">
+                      <a:normAutofit/>
+                    </a:bodyPr>
+                    <a:lstStyle/>
+                    <a:p>
+                      <a:pPr algn="l"/>
+                      <a:r>
+                        <a:rPr sz="630" b="1">
+                          <a:solidFill>
+                            <a:srgbClr val="FFFFFF"/>
+                          </a:solidFill>
+                          <a:latin typeface="Itau Display X-Bold"/>
+                          <a:ea typeface="Itau Display X-Bold"/>
+                          <a:cs typeface="Itau Display X-Bold"/>
+                        </a:rPr>
+                        <a:t>FIDC / CNPJ</a:t>
+                      </a:r>
+                    </a:p>
+                  </a:txBody>
+                  <a:tcPr marL="28575" marR="28575" marT="14288" marB="14288" anchor="ctr">
+                    <a:solidFill>
+                      <a:srgbClr val="161616"/>
+                    </a:solidFill>
+                  </a:tcPr>
+                </a:tc>
+                <a:tc>
+                  <a:txBody>
+                    <a:bodyPr wrap="square" anchor="ctr">
+                      <a:normAutofit/>
+                    </a:bodyPr>
+                    <a:lstStyle/>
+                    <a:p>
+                      <a:pPr algn="l"/>
+                      <a:r>
+                        <a:rPr sz="630" b="1">
+                          <a:solidFill>
+                            <a:srgbClr val="FFFFFF"/>
+                          </a:solidFill>
+                          <a:latin typeface="Itau Display X-Bold"/>
+                          <a:ea typeface="Itau Display X-Bold"/>
+                          <a:cs typeface="Itau Display X-Bold"/>
+                        </a:rPr>
+                        <a:t>Sênior</a:t>
+                      </a:r>
+                    </a:p>
+                  </a:txBody>
+                  <a:tcPr marL="28575" marR="28575" marT="14288" marB="14288" anchor="ctr">
+                    <a:solidFill>
+                      <a:srgbClr val="161616"/>
+                    </a:solidFill>
+                  </a:tcPr>
+                </a:tc>
+                <a:tc>
+                  <a:txBody>
+                    <a:bodyPr wrap="square" anchor="ctr">
+                      <a:normAutofit/>
+                    </a:bodyPr>
+                    <a:lstStyle/>
+                    <a:p>
+                      <a:pPr algn="l"/>
+                      <a:r>
+                        <a:rPr sz="630" b="1">
+                          <a:solidFill>
+                            <a:srgbClr val="FFFFFF"/>
+                          </a:solidFill>
+                          <a:latin typeface="Itau Display X-Bold"/>
+                          <a:ea typeface="Itau Display X-Bold"/>
+                          <a:cs typeface="Itau Display X-Bold"/>
+                        </a:rPr>
+                        <a:t>Mez + Jr</a:t>
+                      </a:r>
+                    </a:p>
+                  </a:txBody>
+                  <a:tcPr marL="28575" marR="28575" marT="14288" marB="14288" anchor="ctr">
+                    <a:solidFill>
+                      <a:srgbClr val="161616"/>
+                    </a:solidFill>
+                  </a:tcPr>
+                </a:tc>
+                <a:tc>
+                  <a:txBody>
+                    <a:bodyPr wrap="square" anchor="ctr">
+                      <a:normAutofit/>
+                    </a:bodyPr>
+                    <a:lstStyle/>
+                    <a:p>
+                      <a:pPr algn="l"/>
+                      <a:r>
+                        <a:rPr sz="630" b="1">
+                          <a:solidFill>
+                            <a:srgbClr val="FFFFFF"/>
+                          </a:solidFill>
+                          <a:latin typeface="Itau Display X-Bold"/>
+                          <a:ea typeface="Itau Display X-Bold"/>
+                          <a:cs typeface="Itau Display X-Bold"/>
+                        </a:rPr>
+                        <a:t>Voto sub.</a:t>
+                      </a:r>
+                    </a:p>
+                  </a:txBody>
+                  <a:tcPr marL="28575" marR="28575" marT="14288" marB="14288" anchor="ctr">
+                    <a:solidFill>
+                      <a:srgbClr val="161616"/>
+                    </a:solidFill>
+                  </a:tcPr>
+                </a:tc>
+                <a:tc>
+                  <a:txBody>
+                    <a:bodyPr wrap="square" anchor="ctr">
+                      <a:normAutofit/>
+                    </a:bodyPr>
+                    <a:lstStyle/>
+                    <a:p>
+                      <a:pPr algn="l"/>
+                      <a:r>
+                        <a:rPr sz="630" b="1">
+                          <a:solidFill>
+                            <a:srgbClr val="FFFFFF"/>
+                          </a:solidFill>
+                          <a:latin typeface="Itau Display X-Bold"/>
+                          <a:ea typeface="Itau Display X-Bold"/>
+                          <a:cs typeface="Itau Display X-Bold"/>
+                        </a:rPr>
+                        <a:t>Conclusão documental</a:t>
+                      </a:r>
+                    </a:p>
+                  </a:txBody>
+                  <a:tcPr marL="28575" marR="28575" marT="14288" marB="14288" anchor="ctr">
+                    <a:solidFill>
+                      <a:srgbClr val="161616"/>
+                    </a:solidFill>
+                  </a:tcPr>
+                </a:tc>
+              </a:tr>
+              <a:tr h="253603">
+                <a:tc>
+                  <a:txBody>
+                    <a:bodyPr wrap="square" anchor="ctr">
+                      <a:normAutofit/>
+                    </a:bodyPr>
+                    <a:lstStyle/>
+                    <a:p>
+                      <a:pPr algn="l"/>
+                      <a:r>
+                        <a:rPr sz="604">
+                          <a:solidFill>
+                            <a:srgbClr val="2B2B2B"/>
+                          </a:solidFill>
+                          <a:latin typeface="Itau Display"/>
+                          <a:ea typeface="Itau Display"/>
+                          <a:cs typeface="Itau Display"/>
+                        </a:rPr>
+                        <a:t>iFood Pago Crédito I</a:t>
+                      </a:r>
+                    </a:p>
+                    <a:p>
+                      <a:pPr algn="l"/>
+                      <a:r>
+                        <a:rPr sz="604">
+                          <a:solidFill>
+                            <a:srgbClr val="2B2B2B"/>
+                          </a:solidFill>
+                          <a:latin typeface="Itau Display"/>
+                          <a:ea typeface="Itau Display"/>
+                          <a:cs typeface="Itau Display"/>
+                        </a:rPr>
+                        <a:t>41.197.066/0001-09</a:t>
+                      </a:r>
+                    </a:p>
+                  </a:txBody>
+                  <a:tcPr marL="28575" marR="28575" marT="9525" marB="9525" anchor="ctr">
+                    <a:solidFill>
+                      <a:srgbClr val="ECECEC"/>
+                    </a:solidFill>
+                  </a:tcPr>
+                </a:tc>
+                <a:tc>
+                  <a:txBody>
+                    <a:bodyPr wrap="square" anchor="ctr">
+                      <a:normAutofit/>
+                    </a:bodyPr>
+                    <a:lstStyle/>
+                    <a:p>
+                      <a:pPr algn="l"/>
+                      <a:r>
+                        <a:rPr sz="604">
+                          <a:solidFill>
+                            <a:srgbClr val="2B2B2B"/>
+                          </a:solidFill>
+                          <a:latin typeface="Itau Display"/>
+                          <a:ea typeface="Itau Display"/>
+                          <a:cs typeface="Itau Display"/>
+                        </a:rPr>
+                        <a:t>4 séries / 154 pos. · PL N/R</a:t>
+                      </a:r>
+                    </a:p>
+                  </a:txBody>
+                  <a:tcPr marL="28575" marR="28575" marT="9525" marB="9525" anchor="ctr">
+                    <a:solidFill>
+                      <a:srgbClr val="ECECEC"/>
+                    </a:solidFill>
+                  </a:tcPr>
+                </a:tc>
+                <a:tc>
+                  <a:txBody>
+                    <a:bodyPr wrap="square" anchor="ctr">
+                      <a:normAutofit/>
+                    </a:bodyPr>
+                    <a:lstStyle/>
+                    <a:p>
+                      <a:pPr algn="l"/>
+                      <a:r>
+                        <a:rPr sz="604">
+                          <a:solidFill>
+                            <a:srgbClr val="2B2B2B"/>
+                          </a:solidFill>
+                          <a:latin typeface="Itau Display"/>
+                          <a:ea typeface="Itau Display"/>
+                          <a:cs typeface="Itau Display"/>
+                        </a:rPr>
+                        <a:t>Mez 32 + Jr 1 · PL N/R</a:t>
+                      </a:r>
+                    </a:p>
+                  </a:txBody>
+                  <a:tcPr marL="28575" marR="28575" marT="9525" marB="9525" anchor="ctr">
+                    <a:solidFill>
+                      <a:srgbClr val="ECECEC"/>
+                    </a:solidFill>
+                  </a:tcPr>
+                </a:tc>
+                <a:tc>
+                  <a:txBody>
+                    <a:bodyPr wrap="square" anchor="ctr">
+                      <a:normAutofit/>
+                    </a:bodyPr>
+                    <a:lstStyle/>
+                    <a:p>
+                      <a:pPr algn="ctr"/>
+                      <a:r>
+                        <a:rPr sz="604">
+                          <a:solidFill>
+                            <a:srgbClr val="2B2B2B"/>
+                          </a:solidFill>
+                          <a:latin typeface="Itau Display"/>
+                          <a:ea typeface="Itau Display"/>
+                          <a:cs typeface="Itau Display"/>
+                        </a:rPr>
+                        <a:t>29,0% QC · proxy</a:t>
+                      </a:r>
+                    </a:p>
+                  </a:txBody>
+                  <a:tcPr marL="28575" marR="28575" marT="9525" marB="9525" anchor="ctr">
+                    <a:solidFill>
+                      <a:srgbClr val="ECECEC"/>
+                    </a:solidFill>
+                  </a:tcPr>
+                </a:tc>
+                <a:tc>
+                  <a:txBody>
+                    <a:bodyPr wrap="square" anchor="ctr">
+                      <a:normAutofit/>
+                    </a:bodyPr>
+                    <a:lstStyle/>
+                    <a:p>
+                      <a:pPr algn="l"/>
+                      <a:r>
+                        <a:rPr sz="604">
+                          <a:solidFill>
+                            <a:srgbClr val="2B2B2B"/>
+                          </a:solidFill>
+                          <a:latin typeface="Itau Display"/>
+                          <a:ea typeface="Itau Display"/>
+                          <a:cs typeface="Itau Display"/>
+                        </a:rPr>
+                        <a:t>154 posições Sr; X.2 soma 127,9% do PL</a:t>
+                      </a:r>
+                    </a:p>
+                  </a:txBody>
+                  <a:tcPr marL="28575" marR="28575" marT="9525" marB="9525" anchor="ctr">
+                    <a:solidFill>
+                      <a:srgbClr val="ECECEC"/>
+                    </a:solidFill>
+                  </a:tcPr>
+                </a:tc>
+              </a:tr>
+              <a:tr h="253603">
+                <a:tc>
+                  <a:txBody>
+                    <a:bodyPr wrap="square" anchor="ctr">
+                      <a:normAutofit/>
+                    </a:bodyPr>
+                    <a:lstStyle/>
+                    <a:p>
+                      <a:pPr algn="l"/>
+                      <a:r>
+                        <a:rPr sz="604">
+                          <a:solidFill>
+                            <a:srgbClr val="2B2B2B"/>
+                          </a:solidFill>
+                          <a:latin typeface="Itau Display"/>
+                          <a:ea typeface="Itau Display"/>
+                          <a:cs typeface="Itau Display"/>
+                        </a:rPr>
+                        <a:t>Pine INSS III</a:t>
+                      </a:r>
+                    </a:p>
+                    <a:p>
+                      <a:pPr algn="l"/>
+                      <a:r>
+                        <a:rPr sz="604">
+                          <a:solidFill>
+                            <a:srgbClr val="2B2B2B"/>
+                          </a:solidFill>
+                          <a:latin typeface="Itau Display"/>
+                          <a:ea typeface="Itau Display"/>
+                          <a:cs typeface="Itau Display"/>
+                        </a:rPr>
+                        <a:t>63.546.406/0001-94</a:t>
+                      </a:r>
+                    </a:p>
+                  </a:txBody>
+                  <a:tcPr marL="28575" marR="28575" marT="9525" marB="9525" anchor="ctr">
+                    <a:solidFill>
+                      <a:srgbClr val="ECECEC"/>
+                    </a:solidFill>
+                  </a:tcPr>
+                </a:tc>
+                <a:tc>
+                  <a:txBody>
+                    <a:bodyPr wrap="square" anchor="ctr">
+                      <a:normAutofit/>
+                    </a:bodyPr>
+                    <a:lstStyle/>
+                    <a:p>
+                      <a:pPr algn="l"/>
+                      <a:r>
+                        <a:rPr sz="604">
+                          <a:solidFill>
+                            <a:srgbClr val="2B2B2B"/>
+                          </a:solidFill>
+                          <a:latin typeface="Itau Display"/>
+                          <a:ea typeface="Itau Display"/>
+                          <a:cs typeface="Itau Display"/>
+                        </a:rPr>
+                        <a:t>1 série / 1 pos. · 84,6% PL</a:t>
+                      </a:r>
+                    </a:p>
+                  </a:txBody>
+                  <a:tcPr marL="28575" marR="28575" marT="9525" marB="9525" anchor="ctr">
+                    <a:solidFill>
+                      <a:srgbClr val="ECECEC"/>
+                    </a:solidFill>
+                  </a:tcPr>
+                </a:tc>
+                <a:tc>
+                  <a:txBody>
+                    <a:bodyPr wrap="square" anchor="ctr">
+                      <a:normAutofit/>
+                    </a:bodyPr>
+                    <a:lstStyle/>
+                    <a:p>
+                      <a:pPr algn="l"/>
+                      <a:r>
+                        <a:rPr sz="604">
+                          <a:solidFill>
+                            <a:srgbClr val="2B2B2B"/>
+                          </a:solidFill>
+                          <a:latin typeface="Itau Display"/>
+                          <a:ea typeface="Itau Display"/>
+                          <a:cs typeface="Itau Display"/>
+                        </a:rPr>
+                        <a:t>Mez 3 + Jr 1 · 15,4% PL</a:t>
+                      </a:r>
+                    </a:p>
+                  </a:txBody>
+                  <a:tcPr marL="28575" marR="28575" marT="9525" marB="9525" anchor="ctr">
+                    <a:solidFill>
+                      <a:srgbClr val="ECECEC"/>
+                    </a:solidFill>
+                  </a:tcPr>
+                </a:tc>
+                <a:tc>
+                  <a:txBody>
+                    <a:bodyPr wrap="square" anchor="ctr">
+                      <a:normAutofit/>
+                    </a:bodyPr>
+                    <a:lstStyle/>
+                    <a:p>
+                      <a:pPr algn="ctr"/>
+                      <a:r>
+                        <a:rPr sz="604">
+                          <a:solidFill>
+                            <a:srgbClr val="2B2B2B"/>
+                          </a:solidFill>
+                          <a:latin typeface="Itau Display"/>
+                          <a:ea typeface="Itau Display"/>
+                          <a:cs typeface="Itau Display"/>
+                        </a:rPr>
+                        <a:t>14,5% QC</a:t>
+                      </a:r>
+                    </a:p>
+                  </a:txBody>
+                  <a:tcPr marL="28575" marR="28575" marT="9525" marB="9525" anchor="ctr">
+                    <a:solidFill>
+                      <a:srgbClr val="ECECEC"/>
+                    </a:solidFill>
+                  </a:tcPr>
+                </a:tc>
+                <a:tc>
+                  <a:txBody>
+                    <a:bodyPr wrap="square" anchor="ctr">
+                      <a:normAutofit/>
+                    </a:bodyPr>
+                    <a:lstStyle/>
+                    <a:p>
+                      <a:pPr algn="l"/>
+                      <a:r>
+                        <a:rPr sz="604">
+                          <a:solidFill>
+                            <a:srgbClr val="2B2B2B"/>
+                          </a:solidFill>
+                          <a:latin typeface="Itau Display"/>
+                          <a:ea typeface="Itau Display"/>
+                          <a:cs typeface="Itau Display"/>
+                        </a:rPr>
+                        <a:t>CVM: 1 posição atual; oferta: 41 subscritores</a:t>
+                      </a:r>
+                    </a:p>
+                  </a:txBody>
+                  <a:tcPr marL="28575" marR="28575" marT="9525" marB="9525" anchor="ctr">
+                    <a:solidFill>
+                      <a:srgbClr val="ECECEC"/>
+                    </a:solidFill>
+                  </a:tcPr>
+                </a:tc>
+              </a:tr>
+              <a:tr h="253603">
+                <a:tc>
+                  <a:txBody>
+                    <a:bodyPr wrap="square" anchor="ctr">
+                      <a:normAutofit/>
+                    </a:bodyPr>
+                    <a:lstStyle/>
+                    <a:p>
+                      <a:pPr algn="l"/>
+                      <a:r>
+                        <a:rPr sz="604">
+                          <a:solidFill>
+                            <a:srgbClr val="2B2B2B"/>
+                          </a:solidFill>
+                          <a:latin typeface="Itau Display"/>
+                          <a:ea typeface="Itau Display"/>
+                          <a:cs typeface="Itau Display"/>
+                        </a:rPr>
+                        <a:t>Investcred</a:t>
+                      </a:r>
+                    </a:p>
+                    <a:p>
+                      <a:pPr algn="l"/>
+                      <a:r>
+                        <a:rPr sz="604">
+                          <a:solidFill>
+                            <a:srgbClr val="2B2B2B"/>
+                          </a:solidFill>
+                          <a:latin typeface="Itau Display"/>
+                          <a:ea typeface="Itau Display"/>
+                          <a:cs typeface="Itau Display"/>
+                        </a:rPr>
+                        <a:t>29.226.654/0001-10</a:t>
+                      </a:r>
+                    </a:p>
+                  </a:txBody>
+                  <a:tcPr marL="28575" marR="28575" marT="9525" marB="9525" anchor="ctr">
+                    <a:solidFill>
+                      <a:srgbClr val="FFF1E6"/>
+                    </a:solidFill>
+                  </a:tcPr>
+                </a:tc>
+                <a:tc>
+                  <a:txBody>
+                    <a:bodyPr wrap="square" anchor="ctr">
+                      <a:normAutofit/>
+                    </a:bodyPr>
+                    <a:lstStyle/>
+                    <a:p>
+                      <a:pPr algn="l"/>
+                      <a:r>
+                        <a:rPr sz="604">
+                          <a:solidFill>
+                            <a:srgbClr val="2B2B2B"/>
+                          </a:solidFill>
+                          <a:latin typeface="Itau Display"/>
+                          <a:ea typeface="Itau Display"/>
+                          <a:cs typeface="Itau Display"/>
+                        </a:rPr>
+                        <a:t>2 séries / 2 pos. · 20,0% PL</a:t>
+                      </a:r>
+                    </a:p>
+                  </a:txBody>
+                  <a:tcPr marL="28575" marR="28575" marT="9525" marB="9525" anchor="ctr">
+                    <a:solidFill>
+                      <a:srgbClr val="FFF1E6"/>
+                    </a:solidFill>
+                  </a:tcPr>
+                </a:tc>
+                <a:tc>
+                  <a:txBody>
+                    <a:bodyPr wrap="square" anchor="ctr">
+                      <a:normAutofit/>
+                    </a:bodyPr>
+                    <a:lstStyle/>
+                    <a:p>
+                      <a:pPr algn="l"/>
+                      <a:r>
+                        <a:rPr sz="604">
+                          <a:solidFill>
+                            <a:srgbClr val="2B2B2B"/>
+                          </a:solidFill>
+                          <a:latin typeface="Itau Display"/>
+                          <a:ea typeface="Itau Display"/>
+                          <a:cs typeface="Itau Display"/>
+                        </a:rPr>
+                        <a:t>Jr 2 · 80,0% PL</a:t>
+                      </a:r>
+                    </a:p>
+                  </a:txBody>
+                  <a:tcPr marL="28575" marR="28575" marT="9525" marB="9525" anchor="ctr">
+                    <a:solidFill>
+                      <a:srgbClr val="FFF1E6"/>
+                    </a:solidFill>
+                  </a:tcPr>
+                </a:tc>
+                <a:tc>
+                  <a:txBody>
+                    <a:bodyPr wrap="square" anchor="ctr">
+                      <a:normAutofit/>
+                    </a:bodyPr>
+                    <a:lstStyle/>
+                    <a:p>
+                      <a:pPr algn="ctr"/>
+                      <a:r>
+                        <a:rPr sz="604">
+                          <a:solidFill>
+                            <a:srgbClr val="2B2B2B"/>
+                          </a:solidFill>
+                          <a:latin typeface="Itau Display"/>
+                          <a:ea typeface="Itau Display"/>
+                          <a:cs typeface="Itau Display"/>
+                        </a:rPr>
+                        <a:t>80,69% QC</a:t>
+                      </a:r>
+                    </a:p>
+                  </a:txBody>
+                  <a:tcPr marL="28575" marR="28575" marT="9525" marB="9525" anchor="ctr">
+                    <a:solidFill>
+                      <a:srgbClr val="FFF1E6"/>
+                    </a:solidFill>
+                  </a:tcPr>
+                </a:tc>
+                <a:tc>
+                  <a:txBody>
+                    <a:bodyPr wrap="square" anchor="ctr">
+                      <a:normAutofit/>
+                    </a:bodyPr>
+                    <a:lstStyle/>
+                    <a:p>
+                      <a:pPr algn="l"/>
+                      <a:r>
+                        <a:rPr sz="604">
+                          <a:solidFill>
+                            <a:srgbClr val="2B2B2B"/>
+                          </a:solidFill>
+                          <a:latin typeface="Itau Display"/>
+                          <a:ea typeface="Itau Display"/>
+                          <a:cs typeface="Itau Display"/>
+                        </a:rPr>
+                        <a:t>Bloco subordinado com interesse único controla maioria</a:t>
+                      </a:r>
+                    </a:p>
+                  </a:txBody>
+                  <a:tcPr marL="28575" marR="28575" marT="9525" marB="9525" anchor="ctr">
+                    <a:solidFill>
+                      <a:srgbClr val="FFF1E6"/>
+                    </a:solidFill>
+                  </a:tcPr>
+                </a:tc>
+              </a:tr>
+              <a:tr h="253603">
+                <a:tc>
+                  <a:txBody>
+                    <a:bodyPr wrap="square" anchor="ctr">
+                      <a:normAutofit/>
+                    </a:bodyPr>
+                    <a:lstStyle/>
+                    <a:p>
+                      <a:pPr algn="l"/>
+                      <a:r>
+                        <a:rPr sz="604">
+                          <a:solidFill>
+                            <a:srgbClr val="2B2B2B"/>
+                          </a:solidFill>
+                          <a:latin typeface="Itau Display"/>
+                          <a:ea typeface="Itau Display"/>
+                          <a:cs typeface="Itau Display"/>
+                        </a:rPr>
+                        <a:t>IS Green Solfácil VI</a:t>
+                      </a:r>
+                    </a:p>
+                    <a:p>
+                      <a:pPr algn="l"/>
+                      <a:r>
+                        <a:rPr sz="604">
+                          <a:solidFill>
+                            <a:srgbClr val="2B2B2B"/>
+                          </a:solidFill>
+                          <a:latin typeface="Itau Display"/>
+                          <a:ea typeface="Itau Display"/>
+                          <a:cs typeface="Itau Display"/>
+                        </a:rPr>
+                        <a:t>57.028.406/0001-08</a:t>
+                      </a:r>
+                    </a:p>
+                  </a:txBody>
+                  <a:tcPr marL="28575" marR="28575" marT="9525" marB="9525" anchor="ctr">
+                    <a:solidFill>
+                      <a:srgbClr val="F4F4F4"/>
+                    </a:solidFill>
+                  </a:tcPr>
+                </a:tc>
+                <a:tc>
+                  <a:txBody>
+                    <a:bodyPr wrap="square" anchor="ctr">
+                      <a:normAutofit/>
+                    </a:bodyPr>
+                    <a:lstStyle/>
+                    <a:p>
+                      <a:pPr algn="l"/>
+                      <a:r>
+                        <a:rPr sz="604">
+                          <a:solidFill>
+                            <a:srgbClr val="2B2B2B"/>
+                          </a:solidFill>
+                          <a:latin typeface="Itau Display"/>
+                          <a:ea typeface="Itau Display"/>
+                          <a:cs typeface="Itau Display"/>
+                        </a:rPr>
+                        <a:t>1 série / 5 pos. · 66,4% PL</a:t>
+                      </a:r>
+                    </a:p>
+                  </a:txBody>
+                  <a:tcPr marL="28575" marR="28575" marT="9525" marB="9525" anchor="ctr">
+                    <a:solidFill>
+                      <a:srgbClr val="F4F4F4"/>
+                    </a:solidFill>
+                  </a:tcPr>
+                </a:tc>
+                <a:tc>
+                  <a:txBody>
+                    <a:bodyPr wrap="square" anchor="ctr">
+                      <a:normAutofit/>
+                    </a:bodyPr>
+                    <a:lstStyle/>
+                    <a:p>
+                      <a:pPr algn="l"/>
+                      <a:r>
+                        <a:rPr sz="604">
+                          <a:solidFill>
+                            <a:srgbClr val="2B2B2B"/>
+                          </a:solidFill>
+                          <a:latin typeface="Itau Display"/>
+                          <a:ea typeface="Itau Display"/>
+                          <a:cs typeface="Itau Display"/>
+                        </a:rPr>
+                        <a:t>Mez 7 + Jr 1 · 33,6% PL</a:t>
+                      </a:r>
+                    </a:p>
+                  </a:txBody>
+                  <a:tcPr marL="28575" marR="28575" marT="9525" marB="9525" anchor="ctr">
+                    <a:solidFill>
+                      <a:srgbClr val="F4F4F4"/>
+                    </a:solidFill>
+                  </a:tcPr>
+                </a:tc>
+                <a:tc>
+                  <a:txBody>
+                    <a:bodyPr wrap="square" anchor="ctr">
+                      <a:normAutofit/>
+                    </a:bodyPr>
+                    <a:lstStyle/>
+                    <a:p>
+                      <a:pPr algn="ctr"/>
+                      <a:r>
+                        <a:rPr sz="604">
+                          <a:solidFill>
+                            <a:srgbClr val="2B2B2B"/>
+                          </a:solidFill>
+                          <a:latin typeface="Itau Display"/>
+                          <a:ea typeface="Itau Display"/>
+                          <a:cs typeface="Itau Display"/>
+                        </a:rPr>
+                        <a:t>24,6% QC</a:t>
+                      </a:r>
+                    </a:p>
+                  </a:txBody>
+                  <a:tcPr marL="28575" marR="28575" marT="9525" marB="9525" anchor="ctr">
+                    <a:solidFill>
+                      <a:srgbClr val="F4F4F4"/>
+                    </a:solidFill>
+                  </a:tcPr>
+                </a:tc>
+                <a:tc>
+                  <a:txBody>
+                    <a:bodyPr wrap="square" anchor="ctr">
+                      <a:normAutofit/>
+                    </a:bodyPr>
+                    <a:lstStyle/>
+                    <a:p>
+                      <a:pPr algn="l"/>
+                      <a:r>
+                        <a:rPr sz="604">
+                          <a:solidFill>
+                            <a:srgbClr val="2B2B2B"/>
+                          </a:solidFill>
+                          <a:latin typeface="Itau Display"/>
+                          <a:ea typeface="Itau Display"/>
+                          <a:cs typeface="Itau Display"/>
+                        </a:rPr>
+                        <a:t>Jr 75% pode solicitar amortização das cotas públicas</a:t>
+                      </a:r>
+                    </a:p>
+                  </a:txBody>
+                  <a:tcPr marL="28575" marR="28575" marT="9525" marB="9525" anchor="ctr">
+                    <a:solidFill>
+                      <a:srgbClr val="F4F4F4"/>
+                    </a:solidFill>
+                  </a:tcPr>
+                </a:tc>
+              </a:tr>
+              <a:tr h="253603">
+                <a:tc>
+                  <a:txBody>
+                    <a:bodyPr wrap="square" anchor="ctr">
+                      <a:normAutofit/>
+                    </a:bodyPr>
+                    <a:lstStyle/>
+                    <a:p>
+                      <a:pPr algn="l"/>
+                      <a:r>
+                        <a:rPr sz="604">
+                          <a:solidFill>
+                            <a:srgbClr val="2B2B2B"/>
+                          </a:solidFill>
+                          <a:latin typeface="Itau Display"/>
+                          <a:ea typeface="Itau Display"/>
+                          <a:cs typeface="Itau Display"/>
+                        </a:rPr>
+                        <a:t>LRS</a:t>
+                      </a:r>
+                    </a:p>
+                    <a:p>
+                      <a:pPr algn="l"/>
+                      <a:r>
+                        <a:rPr sz="604">
+                          <a:solidFill>
+                            <a:srgbClr val="2B2B2B"/>
+                          </a:solidFill>
+                          <a:latin typeface="Itau Display"/>
+                          <a:ea typeface="Itau Display"/>
+                          <a:cs typeface="Itau Display"/>
+                        </a:rPr>
+                        <a:t>60.851.290/0001-09</a:t>
+                      </a:r>
+                    </a:p>
+                  </a:txBody>
+                  <a:tcPr marL="28575" marR="28575" marT="9525" marB="9525" anchor="ctr">
+                    <a:solidFill>
+                      <a:srgbClr val="FFFFFF"/>
+                    </a:solidFill>
+                  </a:tcPr>
+                </a:tc>
+                <a:tc>
+                  <a:txBody>
+                    <a:bodyPr wrap="square" anchor="ctr">
+                      <a:normAutofit/>
+                    </a:bodyPr>
+                    <a:lstStyle/>
+                    <a:p>
+                      <a:pPr algn="l"/>
+                      <a:r>
+                        <a:rPr sz="604">
+                          <a:solidFill>
+                            <a:srgbClr val="2B2B2B"/>
+                          </a:solidFill>
+                          <a:latin typeface="Itau Display"/>
+                          <a:ea typeface="Itau Display"/>
+                          <a:cs typeface="Itau Display"/>
+                        </a:rPr>
+                        <a:t>1 série / 3 pos. · 100% PL</a:t>
+                      </a:r>
+                    </a:p>
+                  </a:txBody>
+                  <a:tcPr marL="28575" marR="28575" marT="9525" marB="9525" anchor="ctr">
+                    <a:solidFill>
+                      <a:srgbClr val="FFFFFF"/>
+                    </a:solidFill>
+                  </a:tcPr>
+                </a:tc>
+                <a:tc>
+                  <a:txBody>
+                    <a:bodyPr wrap="square" anchor="ctr">
+                      <a:normAutofit/>
+                    </a:bodyPr>
+                    <a:lstStyle/>
+                    <a:p>
+                      <a:pPr algn="l"/>
+                      <a:r>
+                        <a:rPr sz="604">
+                          <a:solidFill>
+                            <a:srgbClr val="2B2B2B"/>
+                          </a:solidFill>
+                          <a:latin typeface="Itau Display"/>
+                          <a:ea typeface="Itau Display"/>
+                          <a:cs typeface="Itau Display"/>
+                        </a:rPr>
+                        <a:t>Sem Mez/Jr</a:t>
+                      </a:r>
+                    </a:p>
+                  </a:txBody>
+                  <a:tcPr marL="28575" marR="28575" marT="9525" marB="9525" anchor="ctr">
+                    <a:solidFill>
+                      <a:srgbClr val="FFFFFF"/>
+                    </a:solidFill>
+                  </a:tcPr>
+                </a:tc>
+                <a:tc>
+                  <a:txBody>
+                    <a:bodyPr wrap="square" anchor="ctr">
+                      <a:normAutofit/>
+                    </a:bodyPr>
+                    <a:lstStyle/>
+                    <a:p>
+                      <a:pPr algn="ctr"/>
+                      <a:r>
+                        <a:rPr sz="604">
+                          <a:solidFill>
+                            <a:srgbClr val="2B2B2B"/>
+                          </a:solidFill>
+                          <a:latin typeface="Itau Display"/>
+                          <a:ea typeface="Itau Display"/>
+                          <a:cs typeface="Itau Display"/>
+                        </a:rPr>
+                        <a:t>0,0%</a:t>
+                      </a:r>
+                    </a:p>
+                  </a:txBody>
+                  <a:tcPr marL="28575" marR="28575" marT="9525" marB="9525" anchor="ctr">
+                    <a:solidFill>
+                      <a:srgbClr val="FFFFFF"/>
+                    </a:solidFill>
+                  </a:tcPr>
+                </a:tc>
+                <a:tc>
+                  <a:txBody>
+                    <a:bodyPr wrap="square" anchor="ctr">
+                      <a:normAutofit/>
+                    </a:bodyPr>
+                    <a:lstStyle/>
+                    <a:p>
+                      <a:pPr algn="l"/>
+                      <a:r>
+                        <a:rPr sz="604">
+                          <a:solidFill>
+                            <a:srgbClr val="2B2B2B"/>
+                          </a:solidFill>
+                          <a:latin typeface="Itau Display"/>
+                          <a:ea typeface="Itau Display"/>
+                          <a:cs typeface="Itau Display"/>
+                        </a:rPr>
+                        <a:t>Conflito potencial entre 3 posições Sr</a:t>
+                      </a:r>
+                    </a:p>
+                  </a:txBody>
+                  <a:tcPr marL="28575" marR="28575" marT="9525" marB="9525" anchor="ctr">
+                    <a:solidFill>
+                      <a:srgbClr val="FFFFFF"/>
+                    </a:solidFill>
+                  </a:tcPr>
+                </a:tc>
+              </a:tr>
+              <a:tr h="253603">
+                <a:tc>
+                  <a:txBody>
+                    <a:bodyPr wrap="square" anchor="ctr">
+                      <a:normAutofit/>
+                    </a:bodyPr>
+                    <a:lstStyle/>
+                    <a:p>
+                      <a:pPr algn="l"/>
+                      <a:r>
+                        <a:rPr sz="604">
+                          <a:solidFill>
+                            <a:srgbClr val="2B2B2B"/>
+                          </a:solidFill>
+                          <a:latin typeface="Itau Display"/>
+                          <a:ea typeface="Itau Display"/>
+                          <a:cs typeface="Itau Display"/>
+                        </a:rPr>
+                        <a:t>Multiplike Plus</a:t>
+                      </a:r>
+                    </a:p>
+                    <a:p>
+                      <a:pPr algn="l"/>
+                      <a:r>
+                        <a:rPr sz="604">
+                          <a:solidFill>
+                            <a:srgbClr val="2B2B2B"/>
+                          </a:solidFill>
+                          <a:latin typeface="Itau Display"/>
+                          <a:ea typeface="Itau Display"/>
+                          <a:cs typeface="Itau Display"/>
+                        </a:rPr>
+                        <a:t>42.154.687/0001-60</a:t>
+                      </a:r>
+                    </a:p>
+                  </a:txBody>
+                  <a:tcPr marL="28575" marR="28575" marT="9525" marB="9525" anchor="ctr">
+                    <a:solidFill>
+                      <a:srgbClr val="F4F4F4"/>
+                    </a:solidFill>
+                  </a:tcPr>
+                </a:tc>
+                <a:tc>
+                  <a:txBody>
+                    <a:bodyPr wrap="square" anchor="ctr">
+                      <a:normAutofit/>
+                    </a:bodyPr>
+                    <a:lstStyle/>
+                    <a:p>
+                      <a:pPr algn="l"/>
+                      <a:r>
+                        <a:rPr sz="604">
+                          <a:solidFill>
+                            <a:srgbClr val="2B2B2B"/>
+                          </a:solidFill>
+                          <a:latin typeface="Itau Display"/>
+                          <a:ea typeface="Itau Display"/>
+                          <a:cs typeface="Itau Display"/>
+                        </a:rPr>
+                        <a:t>14 séries / 175 pos. · 57,3% PL</a:t>
+                      </a:r>
+                    </a:p>
+                  </a:txBody>
+                  <a:tcPr marL="28575" marR="28575" marT="9525" marB="9525" anchor="ctr">
+                    <a:solidFill>
+                      <a:srgbClr val="F4F4F4"/>
+                    </a:solidFill>
+                  </a:tcPr>
+                </a:tc>
+                <a:tc>
+                  <a:txBody>
+                    <a:bodyPr wrap="square" anchor="ctr">
+                      <a:normAutofit/>
+                    </a:bodyPr>
+                    <a:lstStyle/>
+                    <a:p>
+                      <a:pPr algn="l"/>
+                      <a:r>
+                        <a:rPr sz="604">
+                          <a:solidFill>
+                            <a:srgbClr val="2B2B2B"/>
+                          </a:solidFill>
+                          <a:latin typeface="Itau Display"/>
+                          <a:ea typeface="Itau Display"/>
+                          <a:cs typeface="Itau Display"/>
+                        </a:rPr>
+                        <a:t>Mez 101 + Jr 1 · 42,7% PL</a:t>
+                      </a:r>
+                    </a:p>
+                  </a:txBody>
+                  <a:tcPr marL="28575" marR="28575" marT="9525" marB="9525" anchor="ctr">
+                    <a:solidFill>
+                      <a:srgbClr val="F4F4F4"/>
+                    </a:solidFill>
+                  </a:tcPr>
+                </a:tc>
+                <a:tc>
+                  <a:txBody>
+                    <a:bodyPr wrap="square" anchor="ctr">
+                      <a:normAutofit/>
+                    </a:bodyPr>
+                    <a:lstStyle/>
+                    <a:p>
+                      <a:pPr algn="ctr"/>
+                      <a:r>
+                        <a:rPr sz="604">
+                          <a:solidFill>
+                            <a:srgbClr val="2B2B2B"/>
+                          </a:solidFill>
+                          <a:latin typeface="Itau Display"/>
+                          <a:ea typeface="Itau Display"/>
+                          <a:cs typeface="Itau Display"/>
+                        </a:rPr>
+                        <a:t>42,7% FP</a:t>
+                      </a:r>
+                    </a:p>
+                  </a:txBody>
+                  <a:tcPr marL="28575" marR="28575" marT="9525" marB="9525" anchor="ctr">
+                    <a:solidFill>
+                      <a:srgbClr val="F4F4F4"/>
+                    </a:solidFill>
+                  </a:tcPr>
+                </a:tc>
+                <a:tc>
+                  <a:txBody>
+                    <a:bodyPr wrap="square" anchor="ctr">
+                      <a:normAutofit/>
+                    </a:bodyPr>
+                    <a:lstStyle/>
+                    <a:p>
+                      <a:pPr algn="l"/>
+                      <a:r>
+                        <a:rPr sz="604">
+                          <a:solidFill>
+                            <a:srgbClr val="2B2B2B"/>
+                          </a:solidFill>
+                          <a:latin typeface="Itau Display"/>
+                          <a:ea typeface="Itau Display"/>
+                          <a:cs typeface="Itau Display"/>
+                        </a:rPr>
+                        <a:t>Maior fragmentação; bloco sub próximo de 50%</a:t>
+                      </a:r>
+                    </a:p>
+                  </a:txBody>
+                  <a:tcPr marL="28575" marR="28575" marT="9525" marB="9525" anchor="ctr">
+                    <a:solidFill>
+                      <a:srgbClr val="F4F4F4"/>
+                    </a:solidFill>
+                  </a:tcPr>
+                </a:tc>
+              </a:tr>
+              <a:tr h="253603">
+                <a:tc>
+                  <a:txBody>
+                    <a:bodyPr wrap="square" anchor="ctr">
+                      <a:normAutofit/>
+                    </a:bodyPr>
+                    <a:lstStyle/>
+                    <a:p>
+                      <a:pPr algn="l"/>
+                      <a:r>
+                        <a:rPr sz="604">
+                          <a:solidFill>
+                            <a:srgbClr val="2B2B2B"/>
+                          </a:solidFill>
+                          <a:latin typeface="Itau Display"/>
+                          <a:ea typeface="Itau Display"/>
+                          <a:cs typeface="Itau Display"/>
+                        </a:rPr>
+                        <a:t>Pravaler Crédito Universitário II</a:t>
+                      </a:r>
+                    </a:p>
+                    <a:p>
+                      <a:pPr algn="l"/>
+                      <a:r>
+                        <a:rPr sz="604">
+                          <a:solidFill>
+                            <a:srgbClr val="2B2B2B"/>
+                          </a:solidFill>
+                          <a:latin typeface="Itau Display"/>
+                          <a:ea typeface="Itau Display"/>
+                          <a:cs typeface="Itau Display"/>
+                        </a:rPr>
+                        <a:t>26.749.095/0001-34</a:t>
+                      </a:r>
+                    </a:p>
+                  </a:txBody>
+                  <a:tcPr marL="28575" marR="28575" marT="9525" marB="9525" anchor="ctr">
+                    <a:solidFill>
+                      <a:srgbClr val="FFFFFF"/>
+                    </a:solidFill>
+                  </a:tcPr>
+                </a:tc>
+                <a:tc>
+                  <a:txBody>
+                    <a:bodyPr wrap="square" anchor="ctr">
+                      <a:normAutofit/>
+                    </a:bodyPr>
+                    <a:lstStyle/>
+                    <a:p>
+                      <a:pPr algn="l"/>
+                      <a:r>
+                        <a:rPr sz="604">
+                          <a:solidFill>
+                            <a:srgbClr val="2B2B2B"/>
+                          </a:solidFill>
+                          <a:latin typeface="Itau Display"/>
+                          <a:ea typeface="Itau Display"/>
+                          <a:cs typeface="Itau Display"/>
+                        </a:rPr>
+                        <a:t>8 séries / 8 pos. · 76,1% PL</a:t>
+                      </a:r>
+                    </a:p>
+                  </a:txBody>
+                  <a:tcPr marL="28575" marR="28575" marT="9525" marB="9525" anchor="ctr">
+                    <a:solidFill>
+                      <a:srgbClr val="FFFFFF"/>
+                    </a:solidFill>
+                  </a:tcPr>
+                </a:tc>
+                <a:tc>
+                  <a:txBody>
+                    <a:bodyPr wrap="square" anchor="ctr">
+                      <a:normAutofit/>
+                    </a:bodyPr>
+                    <a:lstStyle/>
+                    <a:p>
+                      <a:pPr algn="l"/>
+                      <a:r>
+                        <a:rPr sz="604">
+                          <a:solidFill>
+                            <a:srgbClr val="2B2B2B"/>
+                          </a:solidFill>
+                          <a:latin typeface="Itau Display"/>
+                          <a:ea typeface="Itau Display"/>
+                          <a:cs typeface="Itau Display"/>
+                        </a:rPr>
+                        <a:t>Mez 33 + Jr 1 · 23,9% PL</a:t>
+                      </a:r>
+                    </a:p>
+                  </a:txBody>
+                  <a:tcPr marL="28575" marR="28575" marT="9525" marB="9525" anchor="ctr">
+                    <a:solidFill>
+                      <a:srgbClr val="FFFFFF"/>
+                    </a:solidFill>
+                  </a:tcPr>
+                </a:tc>
+                <a:tc>
+                  <a:txBody>
+                    <a:bodyPr wrap="square" anchor="ctr">
+                      <a:normAutofit/>
+                    </a:bodyPr>
+                    <a:lstStyle/>
+                    <a:p>
+                      <a:pPr algn="ctr"/>
+                      <a:r>
+                        <a:rPr sz="604">
+                          <a:solidFill>
+                            <a:srgbClr val="2B2B2B"/>
+                          </a:solidFill>
+                          <a:latin typeface="Itau Display"/>
+                          <a:ea typeface="Itau Display"/>
+                          <a:cs typeface="Itau Display"/>
+                        </a:rPr>
+                        <a:t>16,3% QC</a:t>
+                      </a:r>
+                    </a:p>
+                  </a:txBody>
+                  <a:tcPr marL="28575" marR="28575" marT="9525" marB="9525" anchor="ctr">
+                    <a:solidFill>
+                      <a:srgbClr val="FFFFFF"/>
+                    </a:solidFill>
+                  </a:tcPr>
+                </a:tc>
+                <a:tc>
+                  <a:txBody>
+                    <a:bodyPr wrap="square" anchor="ctr">
+                      <a:normAutofit/>
+                    </a:bodyPr>
+                    <a:lstStyle/>
+                    <a:p>
+                      <a:pPr algn="l"/>
+                      <a:r>
+                        <a:rPr sz="604">
+                          <a:solidFill>
+                            <a:srgbClr val="2B2B2B"/>
+                          </a:solidFill>
+                          <a:latin typeface="Itau Display"/>
+                          <a:ea typeface="Itau Display"/>
+                          <a:cs typeface="Itau Display"/>
+                        </a:rPr>
+                        <a:t>1 posição por série Sr; Mez disperso; Jr da gestora</a:t>
+                      </a:r>
+                    </a:p>
+                  </a:txBody>
+                  <a:tcPr marL="28575" marR="28575" marT="9525" marB="9525" anchor="ctr">
+                    <a:solidFill>
+                      <a:srgbClr val="FFFFFF"/>
+                    </a:solidFill>
+                  </a:tcPr>
+                </a:tc>
+              </a:tr>
+              <a:tr h="253603">
+                <a:tc>
+                  <a:txBody>
+                    <a:bodyPr wrap="square" anchor="ctr">
+                      <a:normAutofit/>
+                    </a:bodyPr>
+                    <a:lstStyle/>
+                    <a:p>
+                      <a:pPr algn="l"/>
+                      <a:r>
+                        <a:rPr sz="604">
+                          <a:solidFill>
+                            <a:srgbClr val="2B2B2B"/>
+                          </a:solidFill>
+                          <a:latin typeface="Itau Display"/>
+                          <a:ea typeface="Itau Display"/>
+                          <a:cs typeface="Itau Display"/>
+                        </a:rPr>
+                        <a:t>Quatá FIDC FGTS</a:t>
+                      </a:r>
+                    </a:p>
+                    <a:p>
+                      <a:pPr algn="l"/>
+                      <a:r>
+                        <a:rPr sz="604">
+                          <a:solidFill>
+                            <a:srgbClr val="2B2B2B"/>
+                          </a:solidFill>
+                          <a:latin typeface="Itau Display"/>
+                          <a:ea typeface="Itau Display"/>
+                          <a:cs typeface="Itau Display"/>
+                        </a:rPr>
+                        <a:t>55.401.645/0001-28</a:t>
+                      </a:r>
+                    </a:p>
+                  </a:txBody>
+                  <a:tcPr marL="28575" marR="28575" marT="9525" marB="9525" anchor="ctr">
+                    <a:solidFill>
+                      <a:srgbClr val="F4F4F4"/>
+                    </a:solidFill>
+                  </a:tcPr>
+                </a:tc>
+                <a:tc>
+                  <a:txBody>
+                    <a:bodyPr wrap="square" anchor="ctr">
+                      <a:normAutofit/>
+                    </a:bodyPr>
+                    <a:lstStyle/>
+                    <a:p>
+                      <a:pPr algn="l"/>
+                      <a:r>
+                        <a:rPr sz="604">
+                          <a:solidFill>
+                            <a:srgbClr val="2B2B2B"/>
+                          </a:solidFill>
+                          <a:latin typeface="Itau Display"/>
+                          <a:ea typeface="Itau Display"/>
+                          <a:cs typeface="Itau Display"/>
+                        </a:rPr>
+                        <a:t>2 séries / 2 pos. · 82,7% PL</a:t>
+                      </a:r>
+                    </a:p>
+                  </a:txBody>
+                  <a:tcPr marL="28575" marR="28575" marT="9525" marB="9525" anchor="ctr">
+                    <a:solidFill>
+                      <a:srgbClr val="F4F4F4"/>
+                    </a:solidFill>
+                  </a:tcPr>
+                </a:tc>
+                <a:tc>
+                  <a:txBody>
+                    <a:bodyPr wrap="square" anchor="ctr">
+                      <a:normAutofit/>
+                    </a:bodyPr>
+                    <a:lstStyle/>
+                    <a:p>
+                      <a:pPr algn="l"/>
+                      <a:r>
+                        <a:rPr sz="604">
+                          <a:solidFill>
+                            <a:srgbClr val="2B2B2B"/>
+                          </a:solidFill>
+                          <a:latin typeface="Itau Display"/>
+                          <a:ea typeface="Itau Display"/>
+                          <a:cs typeface="Itau Display"/>
+                        </a:rPr>
+                        <a:t>Mez 2 + Jr 2 · 17,3% PL</a:t>
+                      </a:r>
+                    </a:p>
+                  </a:txBody>
+                  <a:tcPr marL="28575" marR="28575" marT="9525" marB="9525" anchor="ctr">
+                    <a:solidFill>
+                      <a:srgbClr val="F4F4F4"/>
+                    </a:solidFill>
+                  </a:tcPr>
+                </a:tc>
+                <a:tc>
+                  <a:txBody>
+                    <a:bodyPr wrap="square" anchor="ctr">
+                      <a:normAutofit/>
+                    </a:bodyPr>
+                    <a:lstStyle/>
+                    <a:p>
+                      <a:pPr algn="ctr"/>
+                      <a:r>
+                        <a:rPr sz="604">
+                          <a:solidFill>
+                            <a:srgbClr val="2B2B2B"/>
+                          </a:solidFill>
+                          <a:latin typeface="Itau Display"/>
+                          <a:ea typeface="Itau Display"/>
+                          <a:cs typeface="Itau Display"/>
+                        </a:rPr>
+                        <a:t>12,2% QC</a:t>
+                      </a:r>
+                    </a:p>
+                  </a:txBody>
+                  <a:tcPr marL="28575" marR="28575" marT="9525" marB="9525" anchor="ctr">
+                    <a:solidFill>
+                      <a:srgbClr val="F4F4F4"/>
+                    </a:solidFill>
+                  </a:tcPr>
+                </a:tc>
+                <a:tc>
+                  <a:txBody>
+                    <a:bodyPr wrap="square" anchor="ctr">
+                      <a:normAutofit/>
+                    </a:bodyPr>
+                    <a:lstStyle/>
+                    <a:p>
+                      <a:pPr algn="l"/>
+                      <a:r>
+                        <a:rPr sz="604">
+                          <a:solidFill>
+                            <a:srgbClr val="2B2B2B"/>
+                          </a:solidFill>
+                          <a:latin typeface="Itau Display"/>
+                          <a:ea typeface="Itau Display"/>
+                          <a:cs typeface="Itau Display"/>
+                        </a:rPr>
+                        <a:t>2 blocos Sr; Jr vinculada e vetos</a:t>
+                      </a:r>
+                    </a:p>
+                  </a:txBody>
+                  <a:tcPr marL="28575" marR="28575" marT="9525" marB="9525" anchor="ctr">
+                    <a:solidFill>
+                      <a:srgbClr val="F4F4F4"/>
+                    </a:solidFill>
+                  </a:tcPr>
+                </a:tc>
+              </a:tr>
+              <a:tr h="253603">
+                <a:tc>
+                  <a:txBody>
+                    <a:bodyPr wrap="square" anchor="ctr">
+                      <a:normAutofit/>
+                    </a:bodyPr>
+                    <a:lstStyle/>
+                    <a:p>
+                      <a:pPr algn="l"/>
+                      <a:r>
+                        <a:rPr sz="604">
+                          <a:solidFill>
+                            <a:srgbClr val="2B2B2B"/>
+                          </a:solidFill>
+                          <a:latin typeface="Itau Display"/>
+                          <a:ea typeface="Itau Display"/>
+                          <a:cs typeface="Itau Display"/>
+                        </a:rPr>
+                        <a:t>SumUp Solo</a:t>
+                      </a:r>
+                    </a:p>
+                    <a:p>
+                      <a:pPr algn="l"/>
+                      <a:r>
+                        <a:rPr sz="604">
+                          <a:solidFill>
+                            <a:srgbClr val="2B2B2B"/>
+                          </a:solidFill>
+                          <a:latin typeface="Itau Display"/>
+                          <a:ea typeface="Itau Display"/>
+                          <a:cs typeface="Itau Display"/>
+                        </a:rPr>
+                        <a:t>45.598.747/0001-21</a:t>
+                      </a:r>
+                    </a:p>
+                  </a:txBody>
+                  <a:tcPr marL="28575" marR="28575" marT="9525" marB="9525" anchor="ctr">
+                    <a:solidFill>
+                      <a:srgbClr val="FFFFFF"/>
+                    </a:solidFill>
+                  </a:tcPr>
+                </a:tc>
+                <a:tc>
+                  <a:txBody>
+                    <a:bodyPr wrap="square" anchor="ctr">
+                      <a:normAutofit/>
+                    </a:bodyPr>
+                    <a:lstStyle/>
+                    <a:p>
+                      <a:pPr algn="l"/>
+                      <a:r>
+                        <a:rPr sz="604">
+                          <a:solidFill>
+                            <a:srgbClr val="2B2B2B"/>
+                          </a:solidFill>
+                          <a:latin typeface="Itau Display"/>
+                          <a:ea typeface="Itau Display"/>
+                          <a:cs typeface="Itau Display"/>
+                        </a:rPr>
+                        <a:t>1 série / 2 pos. · 92,3% PL</a:t>
+                      </a:r>
+                    </a:p>
+                  </a:txBody>
+                  <a:tcPr marL="28575" marR="28575" marT="9525" marB="9525" anchor="ctr">
+                    <a:solidFill>
+                      <a:srgbClr val="FFFFFF"/>
+                    </a:solidFill>
+                  </a:tcPr>
+                </a:tc>
+                <a:tc>
+                  <a:txBody>
+                    <a:bodyPr wrap="square" anchor="ctr">
+                      <a:normAutofit/>
+                    </a:bodyPr>
+                    <a:lstStyle/>
+                    <a:p>
+                      <a:pPr algn="l"/>
+                      <a:r>
+                        <a:rPr sz="604">
+                          <a:solidFill>
+                            <a:srgbClr val="2B2B2B"/>
+                          </a:solidFill>
+                          <a:latin typeface="Itau Display"/>
+                          <a:ea typeface="Itau Display"/>
+                          <a:cs typeface="Itau Display"/>
+                        </a:rPr>
+                        <a:t>Jr 1 · 7,7% PL</a:t>
+                      </a:r>
+                    </a:p>
+                  </a:txBody>
+                  <a:tcPr marL="28575" marR="28575" marT="9525" marB="9525" anchor="ctr">
+                    <a:solidFill>
+                      <a:srgbClr val="FFFFFF"/>
+                    </a:solidFill>
+                  </a:tcPr>
+                </a:tc>
+                <a:tc>
+                  <a:txBody>
+                    <a:bodyPr wrap="square" anchor="ctr">
+                      <a:normAutofit/>
+                    </a:bodyPr>
+                    <a:lstStyle/>
+                    <a:p>
+                      <a:pPr algn="ctr"/>
+                      <a:r>
+                        <a:rPr sz="604">
+                          <a:solidFill>
+                            <a:srgbClr val="2B2B2B"/>
+                          </a:solidFill>
+                          <a:latin typeface="Itau Display"/>
+                          <a:ea typeface="Itau Display"/>
+                          <a:cs typeface="Itau Display"/>
+                        </a:rPr>
+                        <a:t>8,7% QC</a:t>
+                      </a:r>
+                    </a:p>
+                  </a:txBody>
+                  <a:tcPr marL="28575" marR="28575" marT="9525" marB="9525" anchor="ctr">
+                    <a:solidFill>
+                      <a:srgbClr val="FFFFFF"/>
+                    </a:solidFill>
+                  </a:tcPr>
+                </a:tc>
+                <a:tc>
+                  <a:txBody>
+                    <a:bodyPr wrap="square" anchor="ctr">
+                      <a:normAutofit/>
+                    </a:bodyPr>
+                    <a:lstStyle/>
+                    <a:p>
+                      <a:pPr algn="l"/>
+                      <a:r>
+                        <a:rPr sz="604">
+                          <a:solidFill>
+                            <a:srgbClr val="2B2B2B"/>
+                          </a:solidFill>
+                          <a:latin typeface="Itau Display"/>
+                          <a:ea typeface="Itau Display"/>
+                          <a:cs typeface="Itau Display"/>
+                        </a:rPr>
+                        <a:t>2 posições Sr; Jr exclusivamente cedente</a:t>
+                      </a:r>
+                    </a:p>
+                  </a:txBody>
+                  <a:tcPr marL="28575" marR="28575" marT="9525" marB="9525" anchor="ctr">
+                    <a:solidFill>
+                      <a:srgbClr val="FFFFFF"/>
+                    </a:solidFill>
+                  </a:tcPr>
+                </a:tc>
+              </a:tr>
+              <a:tr h="253603">
+                <a:tc>
+                  <a:txBody>
+                    <a:bodyPr wrap="square" anchor="ctr">
+                      <a:normAutofit/>
+                    </a:bodyPr>
+                    <a:lstStyle/>
+                    <a:p>
+                      <a:pPr algn="l"/>
+                      <a:r>
+                        <a:rPr sz="604">
+                          <a:solidFill>
+                            <a:srgbClr val="2B2B2B"/>
+                          </a:solidFill>
+                          <a:latin typeface="Itau Display"/>
+                          <a:ea typeface="Itau Display"/>
+                          <a:cs typeface="Itau Display"/>
+                        </a:rPr>
+                        <a:t>VTK</a:t>
+                      </a:r>
+                    </a:p>
+                    <a:p>
+                      <a:pPr algn="l"/>
+                      <a:r>
+                        <a:rPr sz="604">
+                          <a:solidFill>
+                            <a:srgbClr val="2B2B2B"/>
+                          </a:solidFill>
+                          <a:latin typeface="Itau Display"/>
+                          <a:ea typeface="Itau Display"/>
+                          <a:cs typeface="Itau Display"/>
+                        </a:rPr>
+                        <a:t>62.588.266/0001-54</a:t>
+                      </a:r>
+                    </a:p>
+                  </a:txBody>
+                  <a:tcPr marL="28575" marR="28575" marT="9525" marB="9525" anchor="ctr">
+                    <a:solidFill>
+                      <a:srgbClr val="ECECEC"/>
+                    </a:solidFill>
+                  </a:tcPr>
+                </a:tc>
+                <a:tc>
+                  <a:txBody>
+                    <a:bodyPr wrap="square" anchor="ctr">
+                      <a:normAutofit/>
+                    </a:bodyPr>
+                    <a:lstStyle/>
+                    <a:p>
+                      <a:pPr algn="l"/>
+                      <a:r>
+                        <a:rPr sz="604">
+                          <a:solidFill>
+                            <a:srgbClr val="2B2B2B"/>
+                          </a:solidFill>
+                          <a:latin typeface="Itau Display"/>
+                          <a:ea typeface="Itau Display"/>
+                          <a:cs typeface="Itau Display"/>
+                        </a:rPr>
+                        <a:t>1 série / 93 pos. · PL N/R</a:t>
+                      </a:r>
+                    </a:p>
+                  </a:txBody>
+                  <a:tcPr marL="28575" marR="28575" marT="9525" marB="9525" anchor="ctr">
+                    <a:solidFill>
+                      <a:srgbClr val="ECECEC"/>
+                    </a:solidFill>
+                  </a:tcPr>
+                </a:tc>
+                <a:tc>
+                  <a:txBody>
+                    <a:bodyPr wrap="square" anchor="ctr">
+                      <a:normAutofit/>
+                    </a:bodyPr>
+                    <a:lstStyle/>
+                    <a:p>
+                      <a:pPr algn="l"/>
+                      <a:r>
+                        <a:rPr sz="604">
+                          <a:solidFill>
+                            <a:srgbClr val="2B2B2B"/>
+                          </a:solidFill>
+                          <a:latin typeface="Itau Display"/>
+                          <a:ea typeface="Itau Display"/>
+                          <a:cs typeface="Itau Display"/>
+                        </a:rPr>
+                        <a:t>Mez 20 + Jr 3 · PL N/R</a:t>
+                      </a:r>
+                    </a:p>
+                  </a:txBody>
+                  <a:tcPr marL="28575" marR="28575" marT="9525" marB="9525" anchor="ctr">
+                    <a:solidFill>
+                      <a:srgbClr val="ECECEC"/>
+                    </a:solidFill>
+                  </a:tcPr>
+                </a:tc>
+                <a:tc>
+                  <a:txBody>
+                    <a:bodyPr wrap="square" anchor="ctr">
+                      <a:normAutofit/>
+                    </a:bodyPr>
+                    <a:lstStyle/>
+                    <a:p>
+                      <a:pPr algn="ctr"/>
+                      <a:r>
+                        <a:rPr sz="604">
+                          <a:solidFill>
+                            <a:srgbClr val="2B2B2B"/>
+                          </a:solidFill>
+                          <a:latin typeface="Itau Display"/>
+                          <a:ea typeface="Itau Display"/>
+                          <a:cs typeface="Itau Display"/>
+                        </a:rPr>
+                        <a:t>16,1% QC · proxy</a:t>
+                      </a:r>
+                    </a:p>
+                  </a:txBody>
+                  <a:tcPr marL="28575" marR="28575" marT="9525" marB="9525" anchor="ctr">
+                    <a:solidFill>
+                      <a:srgbClr val="ECECEC"/>
+                    </a:solidFill>
+                  </a:tcPr>
+                </a:tc>
+                <a:tc>
+                  <a:txBody>
+                    <a:bodyPr wrap="square" anchor="ctr">
+                      <a:normAutofit/>
+                    </a:bodyPr>
+                    <a:lstStyle/>
+                    <a:p>
+                      <a:pPr algn="l"/>
+                      <a:r>
+                        <a:rPr sz="604">
+                          <a:solidFill>
+                            <a:srgbClr val="2B2B2B"/>
+                          </a:solidFill>
+                          <a:latin typeface="Itau Display"/>
+                          <a:ea typeface="Itau Display"/>
+                          <a:cs typeface="Itau Display"/>
+                        </a:rPr>
+                        <a:t>93 posições Sr; X.2 soma 81,2% do PL</a:t>
+                      </a:r>
+                    </a:p>
+                  </a:txBody>
+                  <a:tcPr marL="28575" marR="28575" marT="9525" marB="9525" anchor="ctr">
+                    <a:solidFill>
+                      <a:srgbClr val="ECECEC"/>
+                    </a:solidFill>
+                  </a:tcPr>
+                </a:tc>
+              </a:tr>
+            </a:tbl>
+          </a:graphicData>
+        </a:graphic>
+      </p:graphicFrame>
+    </p:spTree>
+    <p:extLst>
+      <p:ext uri="{BB962C8B-B14F-4D97-AF65-F5344CB8AC3E}">
+        <p14:creationId xmlns:p14="http://schemas.microsoft.com/office/powerpoint/2010/main" val="703766921"/>
+      </p:ext>
+    </p:extLst>
+  </p:cSld>
+</p:sld>
+</file>
+
+<file path=ppt/slides/slide12.xml><?xml version="1.0" encoding="utf-8"?>
 <p:sld xmlns:p="http://schemas.openxmlformats.org/presentationml/2006/main">
   <p:cSld>
     <p:bg>
@@ -7569,7 +12137,7 @@
                 <a:ea typeface="Itau Display X-Bold"/>
                 <a:cs typeface="Itau Display X-Bold"/>
               </a:rPr>
-              <a:t>11</a:t>
+              <a:t>12</a:t>
             </a:r>
           </a:p>
         </p:txBody>
@@ -8072,7 +12640,7 @@
       </p:sp>
       <p:graphicFrame>
         <p:nvGraphicFramePr>
-          <p:cNvPr id="27" name=""/>
+          <p:cNvPr id="29" name=""/>
           <p:cNvGraphicFramePr/>
           <p:nvPr/>
         </p:nvGraphicFramePr>
@@ -8099,7 +12667,9 @@
                     </a:bodyPr>
                     <a:lstStyle/>
                     <a:p>
-                      <a:pPr algn="l"/>
+                      <a:pPr algn="l">
+                        <a:buNone/>
+                      </a:pPr>
                       <a:r>
                         <a:rPr sz="788" b="1">
                           <a:solidFill>
@@ -8126,7 +12696,9 @@
                     </a:bodyPr>
                     <a:lstStyle/>
                     <a:p>
-                      <a:pPr algn="r"/>
+                      <a:pPr algn="r">
+                        <a:buNone/>
+                      </a:pPr>
                       <a:r>
                         <a:rPr sz="788" b="1">
                           <a:solidFill>
@@ -8153,7 +12725,9 @@
                     </a:bodyPr>
                     <a:lstStyle/>
                     <a:p>
-                      <a:pPr algn="r"/>
+                      <a:pPr algn="r">
+                        <a:buNone/>
+                      </a:pPr>
                       <a:r>
                         <a:rPr sz="788" b="1">
                           <a:solidFill>
@@ -8180,7 +12754,9 @@
                     </a:bodyPr>
                     <a:lstStyle/>
                     <a:p>
-                      <a:pPr algn="r"/>
+                      <a:pPr algn="r">
+                        <a:buNone/>
+                      </a:pPr>
                       <a:r>
                         <a:rPr sz="788" b="1">
                           <a:solidFill>
@@ -8207,7 +12783,9 @@
                     </a:bodyPr>
                     <a:lstStyle/>
                     <a:p>
-                      <a:pPr algn="l"/>
+                      <a:pPr algn="l">
+                        <a:buNone/>
+                      </a:pPr>
                       <a:r>
                         <a:rPr sz="788" b="1">
                           <a:solidFill>
@@ -8236,7 +12814,9 @@
                     </a:bodyPr>
                     <a:lstStyle/>
                     <a:p>
-                      <a:pPr algn="l"/>
+                      <a:pPr algn="l">
+                        <a:buNone/>
+                      </a:pPr>
                       <a:r>
                         <a:rPr sz="788">
                           <a:solidFill>
@@ -8263,7 +12843,9 @@
                     </a:bodyPr>
                     <a:lstStyle/>
                     <a:p>
-                      <a:pPr algn="r"/>
+                      <a:pPr algn="r">
+                        <a:buNone/>
+                      </a:pPr>
                       <a:r>
                         <a:rPr sz="788">
                           <a:solidFill>
@@ -8290,7 +12872,9 @@
                     </a:bodyPr>
                     <a:lstStyle/>
                     <a:p>
-                      <a:pPr algn="r"/>
+                      <a:pPr algn="r">
+                        <a:buNone/>
+                      </a:pPr>
                       <a:r>
                         <a:rPr sz="788">
                           <a:solidFill>
@@ -8317,7 +12901,9 @@
                     </a:bodyPr>
                     <a:lstStyle/>
                     <a:p>
-                      <a:pPr algn="r"/>
+                      <a:pPr algn="r">
+                        <a:buNone/>
+                      </a:pPr>
                       <a:r>
                         <a:rPr sz="788">
                           <a:solidFill>
@@ -8344,7 +12930,9 @@
                     </a:bodyPr>
                     <a:lstStyle/>
                     <a:p>
-                      <a:pPr algn="l"/>
+                      <a:pPr algn="l">
+                        <a:buNone/>
+                      </a:pPr>
                       <a:r>
                         <a:rPr sz="788">
                           <a:solidFill>
@@ -8373,7 +12961,9 @@
                     </a:bodyPr>
                     <a:lstStyle/>
                     <a:p>
-                      <a:pPr algn="l"/>
+                      <a:pPr algn="l">
+                        <a:buNone/>
+                      </a:pPr>
                       <a:r>
                         <a:rPr sz="788">
                           <a:solidFill>
@@ -8400,7 +12990,9 @@
                     </a:bodyPr>
                     <a:lstStyle/>
                     <a:p>
-                      <a:pPr algn="r"/>
+                      <a:pPr algn="r">
+                        <a:buNone/>
+                      </a:pPr>
                       <a:r>
                         <a:rPr sz="788">
                           <a:solidFill>
@@ -8427,7 +13019,9 @@
                     </a:bodyPr>
                     <a:lstStyle/>
                     <a:p>
-                      <a:pPr algn="r"/>
+                      <a:pPr algn="r">
+                        <a:buNone/>
+                      </a:pPr>
                       <a:r>
                         <a:rPr sz="788">
                           <a:solidFill>
@@ -8454,7 +13048,9 @@
                     </a:bodyPr>
                     <a:lstStyle/>
                     <a:p>
-                      <a:pPr algn="r"/>
+                      <a:pPr algn="r">
+                        <a:buNone/>
+                      </a:pPr>
                       <a:r>
                         <a:rPr sz="788">
                           <a:solidFill>
@@ -8481,7 +13077,9 @@
                     </a:bodyPr>
                     <a:lstStyle/>
                     <a:p>
-                      <a:pPr algn="l"/>
+                      <a:pPr algn="l">
+                        <a:buNone/>
+                      </a:pPr>
                       <a:r>
                         <a:rPr sz="788">
                           <a:solidFill>
@@ -8510,7 +13108,9 @@
                     </a:bodyPr>
                     <a:lstStyle/>
                     <a:p>
-                      <a:pPr algn="l"/>
+                      <a:pPr algn="l">
+                        <a:buNone/>
+                      </a:pPr>
                       <a:r>
                         <a:rPr sz="788">
                           <a:solidFill>
@@ -8537,7 +13137,9 @@
                     </a:bodyPr>
                     <a:lstStyle/>
                     <a:p>
-                      <a:pPr algn="r"/>
+                      <a:pPr algn="r">
+                        <a:buNone/>
+                      </a:pPr>
                       <a:r>
                         <a:rPr sz="788">
                           <a:solidFill>
@@ -8564,7 +13166,9 @@
                     </a:bodyPr>
                     <a:lstStyle/>
                     <a:p>
-                      <a:pPr algn="r"/>
+                      <a:pPr algn="r">
+                        <a:buNone/>
+                      </a:pPr>
                       <a:r>
                         <a:rPr sz="788">
                           <a:solidFill>
@@ -8591,7 +13195,9 @@
                     </a:bodyPr>
                     <a:lstStyle/>
                     <a:p>
-                      <a:pPr algn="r"/>
+                      <a:pPr algn="r">
+                        <a:buNone/>
+                      </a:pPr>
                       <a:r>
                         <a:rPr sz="788">
                           <a:solidFill>
@@ -8618,7 +13224,9 @@
                     </a:bodyPr>
                     <a:lstStyle/>
                     <a:p>
-                      <a:pPr algn="l"/>
+                      <a:pPr algn="l">
+                        <a:buNone/>
+                      </a:pPr>
                       <a:r>
                         <a:rPr sz="788">
                           <a:solidFill>
@@ -8647,7 +13255,9 @@
                     </a:bodyPr>
                     <a:lstStyle/>
                     <a:p>
-                      <a:pPr algn="l"/>
+                      <a:pPr algn="l">
+                        <a:buNone/>
+                      </a:pPr>
                       <a:r>
                         <a:rPr sz="788">
                           <a:solidFill>
@@ -8674,7 +13284,9 @@
                     </a:bodyPr>
                     <a:lstStyle/>
                     <a:p>
-                      <a:pPr algn="r"/>
+                      <a:pPr algn="r">
+                        <a:buNone/>
+                      </a:pPr>
                       <a:r>
                         <a:rPr sz="788">
                           <a:solidFill>
@@ -8701,7 +13313,9 @@
                     </a:bodyPr>
                     <a:lstStyle/>
                     <a:p>
-                      <a:pPr algn="r"/>
+                      <a:pPr algn="r">
+                        <a:buNone/>
+                      </a:pPr>
                       <a:r>
                         <a:rPr sz="788">
                           <a:solidFill>
@@ -8728,7 +13342,9 @@
                     </a:bodyPr>
                     <a:lstStyle/>
                     <a:p>
-                      <a:pPr algn="r"/>
+                      <a:pPr algn="r">
+                        <a:buNone/>
+                      </a:pPr>
                       <a:r>
                         <a:rPr sz="788">
                           <a:solidFill>
@@ -8755,7 +13371,9 @@
                     </a:bodyPr>
                     <a:lstStyle/>
                     <a:p>
-                      <a:pPr algn="l"/>
+                      <a:pPr algn="l">
+                        <a:buNone/>
+                      </a:pPr>
                       <a:r>
                         <a:rPr sz="788">
                           <a:solidFill>
@@ -8784,7 +13402,9 @@
                     </a:bodyPr>
                     <a:lstStyle/>
                     <a:p>
-                      <a:pPr algn="l"/>
+                      <a:pPr algn="l">
+                        <a:buNone/>
+                      </a:pPr>
                       <a:r>
                         <a:rPr sz="788">
                           <a:solidFill>
@@ -8811,7 +13431,9 @@
                     </a:bodyPr>
                     <a:lstStyle/>
                     <a:p>
-                      <a:pPr algn="r"/>
+                      <a:pPr algn="r">
+                        <a:buNone/>
+                      </a:pPr>
                       <a:r>
                         <a:rPr sz="788">
                           <a:solidFill>
@@ -8838,7 +13460,9 @@
                     </a:bodyPr>
                     <a:lstStyle/>
                     <a:p>
-                      <a:pPr algn="r"/>
+                      <a:pPr algn="r">
+                        <a:buNone/>
+                      </a:pPr>
                       <a:r>
                         <a:rPr sz="788">
                           <a:solidFill>
@@ -8865,7 +13489,9 @@
                     </a:bodyPr>
                     <a:lstStyle/>
                     <a:p>
-                      <a:pPr algn="r"/>
+                      <a:pPr algn="r">
+                        <a:buNone/>
+                      </a:pPr>
                       <a:r>
                         <a:rPr sz="788">
                           <a:solidFill>
@@ -8892,7 +13518,9 @@
                     </a:bodyPr>
                     <a:lstStyle/>
                     <a:p>
-                      <a:pPr algn="l"/>
+                      <a:pPr algn="l">
+                        <a:buNone/>
+                      </a:pPr>
                       <a:r>
                         <a:rPr sz="788">
                           <a:solidFill>
@@ -8921,7 +13549,9 @@
                     </a:bodyPr>
                     <a:lstStyle/>
                     <a:p>
-                      <a:pPr algn="l"/>
+                      <a:pPr algn="l">
+                        <a:buNone/>
+                      </a:pPr>
                       <a:r>
                         <a:rPr sz="788">
                           <a:solidFill>
@@ -8948,7 +13578,9 @@
                     </a:bodyPr>
                     <a:lstStyle/>
                     <a:p>
-                      <a:pPr algn="r"/>
+                      <a:pPr algn="r">
+                        <a:buNone/>
+                      </a:pPr>
                       <a:r>
                         <a:rPr sz="788">
                           <a:solidFill>
@@ -8975,7 +13607,9 @@
                     </a:bodyPr>
                     <a:lstStyle/>
                     <a:p>
-                      <a:pPr algn="r"/>
+                      <a:pPr algn="r">
+                        <a:buNone/>
+                      </a:pPr>
                       <a:r>
                         <a:rPr sz="788">
                           <a:solidFill>
@@ -9002,7 +13636,9 @@
                     </a:bodyPr>
                     <a:lstStyle/>
                     <a:p>
-                      <a:pPr algn="r"/>
+                      <a:pPr algn="r">
+                        <a:buNone/>
+                      </a:pPr>
                       <a:r>
                         <a:rPr sz="788">
                           <a:solidFill>
@@ -9029,7 +13665,9 @@
                     </a:bodyPr>
                     <a:lstStyle/>
                     <a:p>
-                      <a:pPr algn="l"/>
+                      <a:pPr algn="l">
+                        <a:buNone/>
+                      </a:pPr>
                       <a:r>
                         <a:rPr sz="788">
                           <a:solidFill>
@@ -9058,7 +13696,9 @@
                     </a:bodyPr>
                     <a:lstStyle/>
                     <a:p>
-                      <a:pPr algn="l"/>
+                      <a:pPr algn="l">
+                        <a:buNone/>
+                      </a:pPr>
                       <a:r>
                         <a:rPr sz="788">
                           <a:solidFill>
@@ -9085,7 +13725,9 @@
                     </a:bodyPr>
                     <a:lstStyle/>
                     <a:p>
-                      <a:pPr algn="r"/>
+                      <a:pPr algn="r">
+                        <a:buNone/>
+                      </a:pPr>
                       <a:r>
                         <a:rPr sz="788">
                           <a:solidFill>
@@ -9112,7 +13754,9 @@
                     </a:bodyPr>
                     <a:lstStyle/>
                     <a:p>
-                      <a:pPr algn="r"/>
+                      <a:pPr algn="r">
+                        <a:buNone/>
+                      </a:pPr>
                       <a:r>
                         <a:rPr sz="788">
                           <a:solidFill>
@@ -9139,7 +13783,9 @@
                     </a:bodyPr>
                     <a:lstStyle/>
                     <a:p>
-                      <a:pPr algn="r"/>
+                      <a:pPr algn="r">
+                        <a:buNone/>
+                      </a:pPr>
                       <a:r>
                         <a:rPr sz="788">
                           <a:solidFill>
@@ -9166,7 +13812,9 @@
                     </a:bodyPr>
                     <a:lstStyle/>
                     <a:p>
-                      <a:pPr algn="l"/>
+                      <a:pPr algn="l">
+                        <a:buNone/>
+                      </a:pPr>
                       <a:r>
                         <a:rPr sz="788">
                           <a:solidFill>
@@ -9195,7 +13843,9 @@
                     </a:bodyPr>
                     <a:lstStyle/>
                     <a:p>
-                      <a:pPr algn="l"/>
+                      <a:pPr algn="l">
+                        <a:buNone/>
+                      </a:pPr>
                       <a:r>
                         <a:rPr sz="788">
                           <a:solidFill>
@@ -9222,7 +13872,9 @@
                     </a:bodyPr>
                     <a:lstStyle/>
                     <a:p>
-                      <a:pPr algn="r"/>
+                      <a:pPr algn="r">
+                        <a:buNone/>
+                      </a:pPr>
                       <a:r>
                         <a:rPr sz="788">
                           <a:solidFill>
@@ -9249,7 +13901,9 @@
                     </a:bodyPr>
                     <a:lstStyle/>
                     <a:p>
-                      <a:pPr algn="r"/>
+                      <a:pPr algn="r">
+                        <a:buNone/>
+                      </a:pPr>
                       <a:r>
                         <a:rPr sz="788">
                           <a:solidFill>
@@ -9276,7 +13930,9 @@
                     </a:bodyPr>
                     <a:lstStyle/>
                     <a:p>
-                      <a:pPr algn="r"/>
+                      <a:pPr algn="r">
+                        <a:buNone/>
+                      </a:pPr>
                       <a:r>
                         <a:rPr sz="788">
                           <a:solidFill>
@@ -9303,7 +13959,9 @@
                     </a:bodyPr>
                     <a:lstStyle/>
                     <a:p>
-                      <a:pPr algn="l"/>
+                      <a:pPr algn="l">
+                        <a:buNone/>
+                      </a:pPr>
                       <a:r>
                         <a:rPr sz="788">
                           <a:solidFill>
@@ -9332,7 +13990,9 @@
                     </a:bodyPr>
                     <a:lstStyle/>
                     <a:p>
-                      <a:pPr algn="l"/>
+                      <a:pPr algn="l">
+                        <a:buNone/>
+                      </a:pPr>
                       <a:r>
                         <a:rPr sz="788">
                           <a:solidFill>
@@ -9359,7 +14019,9 @@
                     </a:bodyPr>
                     <a:lstStyle/>
                     <a:p>
-                      <a:pPr algn="r"/>
+                      <a:pPr algn="r">
+                        <a:buNone/>
+                      </a:pPr>
                       <a:r>
                         <a:rPr sz="788">
                           <a:solidFill>
@@ -9386,7 +14048,9 @@
                     </a:bodyPr>
                     <a:lstStyle/>
                     <a:p>
-                      <a:pPr algn="r"/>
+                      <a:pPr algn="r">
+                        <a:buNone/>
+                      </a:pPr>
                       <a:r>
                         <a:rPr sz="788">
                           <a:solidFill>
@@ -9413,7 +14077,9 @@
                     </a:bodyPr>
                     <a:lstStyle/>
                     <a:p>
-                      <a:pPr algn="r"/>
+                      <a:pPr algn="r">
+                        <a:buNone/>
+                      </a:pPr>
                       <a:r>
                         <a:rPr sz="788">
                           <a:solidFill>
@@ -9440,7 +14106,9 @@
                     </a:bodyPr>
                     <a:lstStyle/>
                     <a:p>
-                      <a:pPr algn="l"/>
+                      <a:pPr algn="l">
+                        <a:buNone/>
+                      </a:pPr>
                       <a:r>
                         <a:rPr sz="788">
                           <a:solidFill>
@@ -9661,7 +14329,7 @@
 </p:sld>
 </file>
 
-<file path=ppt/slides/slide12.xml><?xml version="1.0" encoding="utf-8"?>
+<file path=ppt/slides/slide13.xml><?xml version="1.0" encoding="utf-8"?>
 <p:sld xmlns:p="http://schemas.openxmlformats.org/presentationml/2006/main">
   <p:cSld>
     <p:bg>
@@ -9861,14 +14529,14 @@
                 <a:ea typeface="Itau Display X-Bold"/>
                 <a:cs typeface="Itau Display X-Bold"/>
               </a:rPr>
-              <a:t>12</a:t>
+              <a:t>13</a:t>
             </a:r>
           </a:p>
         </p:txBody>
       </p:sp>
       <p:graphicFrame>
         <p:nvGraphicFramePr>
-          <p:cNvPr id="11" name=""/>
+          <p:cNvPr id="13" name=""/>
           <p:cNvGraphicFramePr/>
           <p:nvPr/>
         </p:nvGraphicFramePr>
@@ -9894,7 +14562,9 @@
                     </a:bodyPr>
                     <a:lstStyle/>
                     <a:p>
-                      <a:pPr algn="ctr"/>
+                      <a:pPr algn="ctr">
+                        <a:buNone/>
+                      </a:pPr>
                       <a:r>
                         <a:rPr sz="788" b="1">
                           <a:solidFill>
@@ -9921,7 +14591,9 @@
                     </a:bodyPr>
                     <a:lstStyle/>
                     <a:p>
-                      <a:pPr algn="l"/>
+                      <a:pPr algn="l">
+                        <a:buNone/>
+                      </a:pPr>
                       <a:r>
                         <a:rPr sz="788" b="1">
                           <a:solidFill>
@@ -9948,7 +14620,9 @@
                     </a:bodyPr>
                     <a:lstStyle/>
                     <a:p>
-                      <a:pPr algn="l"/>
+                      <a:pPr algn="l">
+                        <a:buNone/>
+                      </a:pPr>
                       <a:r>
                         <a:rPr sz="788" b="1">
                           <a:solidFill>
@@ -9975,7 +14649,9 @@
                     </a:bodyPr>
                     <a:lstStyle/>
                     <a:p>
-                      <a:pPr algn="l"/>
+                      <a:pPr algn="l">
+                        <a:buNone/>
+                      </a:pPr>
                       <a:r>
                         <a:rPr sz="788" b="1">
                           <a:solidFill>
@@ -10004,7 +14680,9 @@
                     </a:bodyPr>
                     <a:lstStyle/>
                     <a:p>
-                      <a:pPr algn="ctr"/>
+                      <a:pPr algn="ctr">
+                        <a:buNone/>
+                      </a:pPr>
                       <a:r>
                         <a:rPr sz="780">
                           <a:solidFill>
@@ -10031,7 +14709,9 @@
                     </a:bodyPr>
                     <a:lstStyle/>
                     <a:p>
-                      <a:pPr algn="l"/>
+                      <a:pPr algn="l">
+                        <a:buNone/>
+                      </a:pPr>
                       <a:r>
                         <a:rPr sz="780">
                           <a:solidFill>
@@ -10058,7 +14738,9 @@
                     </a:bodyPr>
                     <a:lstStyle/>
                     <a:p>
-                      <a:pPr algn="l"/>
+                      <a:pPr algn="l">
+                        <a:buNone/>
+                      </a:pPr>
                       <a:r>
                         <a:rPr sz="780">
                           <a:solidFill>
@@ -10085,7 +14767,9 @@
                     </a:bodyPr>
                     <a:lstStyle/>
                     <a:p>
-                      <a:pPr algn="l"/>
+                      <a:pPr algn="l">
+                        <a:buNone/>
+                      </a:pPr>
                       <a:r>
                         <a:rPr sz="780">
                           <a:solidFill>
@@ -10114,7 +14798,9 @@
                     </a:bodyPr>
                     <a:lstStyle/>
                     <a:p>
-                      <a:pPr algn="ctr"/>
+                      <a:pPr algn="ctr">
+                        <a:buNone/>
+                      </a:pPr>
                       <a:r>
                         <a:rPr sz="780">
                           <a:solidFill>
@@ -10141,7 +14827,9 @@
                     </a:bodyPr>
                     <a:lstStyle/>
                     <a:p>
-                      <a:pPr algn="l"/>
+                      <a:pPr algn="l">
+                        <a:buNone/>
+                      </a:pPr>
                       <a:r>
                         <a:rPr sz="780">
                           <a:solidFill>
@@ -10168,7 +14856,9 @@
                     </a:bodyPr>
                     <a:lstStyle/>
                     <a:p>
-                      <a:pPr algn="l"/>
+                      <a:pPr algn="l">
+                        <a:buNone/>
+                      </a:pPr>
                       <a:r>
                         <a:rPr sz="780">
                           <a:solidFill>
@@ -10195,7 +14885,9 @@
                     </a:bodyPr>
                     <a:lstStyle/>
                     <a:p>
-                      <a:pPr algn="l"/>
+                      <a:pPr algn="l">
+                        <a:buNone/>
+                      </a:pPr>
                       <a:r>
                         <a:rPr sz="780">
                           <a:solidFill>
@@ -10224,7 +14916,9 @@
                     </a:bodyPr>
                     <a:lstStyle/>
                     <a:p>
-                      <a:pPr algn="ctr"/>
+                      <a:pPr algn="ctr">
+                        <a:buNone/>
+                      </a:pPr>
                       <a:r>
                         <a:rPr sz="780">
                           <a:solidFill>
@@ -10251,7 +14945,9 @@
                     </a:bodyPr>
                     <a:lstStyle/>
                     <a:p>
-                      <a:pPr algn="l"/>
+                      <a:pPr algn="l">
+                        <a:buNone/>
+                      </a:pPr>
                       <a:r>
                         <a:rPr sz="780">
                           <a:solidFill>
@@ -10278,7 +14974,9 @@
                     </a:bodyPr>
                     <a:lstStyle/>
                     <a:p>
-                      <a:pPr algn="l"/>
+                      <a:pPr algn="l">
+                        <a:buNone/>
+                      </a:pPr>
                       <a:r>
                         <a:rPr sz="780">
                           <a:solidFill>
@@ -10305,7 +15003,9 @@
                     </a:bodyPr>
                     <a:lstStyle/>
                     <a:p>
-                      <a:pPr algn="l"/>
+                      <a:pPr algn="l">
+                        <a:buNone/>
+                      </a:pPr>
                       <a:r>
                         <a:rPr sz="780">
                           <a:solidFill>
@@ -10334,7 +15034,9 @@
                     </a:bodyPr>
                     <a:lstStyle/>
                     <a:p>
-                      <a:pPr algn="ctr"/>
+                      <a:pPr algn="ctr">
+                        <a:buNone/>
+                      </a:pPr>
                       <a:r>
                         <a:rPr sz="780">
                           <a:solidFill>
@@ -10361,7 +15063,9 @@
                     </a:bodyPr>
                     <a:lstStyle/>
                     <a:p>
-                      <a:pPr algn="l"/>
+                      <a:pPr algn="l">
+                        <a:buNone/>
+                      </a:pPr>
                       <a:r>
                         <a:rPr sz="780">
                           <a:solidFill>
@@ -10388,7 +15092,9 @@
                     </a:bodyPr>
                     <a:lstStyle/>
                     <a:p>
-                      <a:pPr algn="l"/>
+                      <a:pPr algn="l">
+                        <a:buNone/>
+                      </a:pPr>
                       <a:r>
                         <a:rPr sz="780">
                           <a:solidFill>
@@ -10415,7 +15121,9 @@
                     </a:bodyPr>
                     <a:lstStyle/>
                     <a:p>
-                      <a:pPr algn="l"/>
+                      <a:pPr algn="l">
+                        <a:buNone/>
+                      </a:pPr>
                       <a:r>
                         <a:rPr sz="780">
                           <a:solidFill>
@@ -10444,7 +15152,9 @@
                     </a:bodyPr>
                     <a:lstStyle/>
                     <a:p>
-                      <a:pPr algn="ctr"/>
+                      <a:pPr algn="ctr">
+                        <a:buNone/>
+                      </a:pPr>
                       <a:r>
                         <a:rPr sz="780">
                           <a:solidFill>
@@ -10471,7 +15181,9 @@
                     </a:bodyPr>
                     <a:lstStyle/>
                     <a:p>
-                      <a:pPr algn="l"/>
+                      <a:pPr algn="l">
+                        <a:buNone/>
+                      </a:pPr>
                       <a:r>
                         <a:rPr sz="780">
                           <a:solidFill>
@@ -10498,7 +15210,9 @@
                     </a:bodyPr>
                     <a:lstStyle/>
                     <a:p>
-                      <a:pPr algn="l"/>
+                      <a:pPr algn="l">
+                        <a:buNone/>
+                      </a:pPr>
                       <a:r>
                         <a:rPr sz="780">
                           <a:solidFill>
@@ -10525,7 +15239,9 @@
                     </a:bodyPr>
                     <a:lstStyle/>
                     <a:p>
-                      <a:pPr algn="l"/>
+                      <a:pPr algn="l">
+                        <a:buNone/>
+                      </a:pPr>
                       <a:r>
                         <a:rPr sz="780">
                           <a:solidFill>
@@ -10746,7 +15462,7 @@
 </p:sld>
 </file>
 
-<file path=ppt/slides/slide13.xml><?xml version="1.0" encoding="utf-8"?>
+<file path=ppt/slides/slide14.xml><?xml version="1.0" encoding="utf-8"?>
 <p:sld xmlns:p="http://schemas.openxmlformats.org/presentationml/2006/main">
   <p:cSld>
     <p:bg>
@@ -10946,7 +15662,7 @@
                 <a:ea typeface="Itau Display X-Bold"/>
                 <a:cs typeface="Itau Display X-Bold"/>
               </a:rPr>
-              <a:t>13</a:t>
+              <a:t>14</a:t>
             </a:r>
           </a:p>
         </p:txBody>
@@ -11883,7 +16599,7 @@
       </p:sp>
       <p:graphicFrame>
         <p:nvGraphicFramePr>
-          <p:cNvPr id="41" name=""/>
+          <p:cNvPr id="43" name=""/>
           <p:cNvGraphicFramePr/>
           <p:nvPr/>
         </p:nvGraphicFramePr>
@@ -11909,7 +16625,9 @@
                     </a:bodyPr>
                     <a:lstStyle/>
                     <a:p>
-                      <a:pPr algn="ctr"/>
+                      <a:pPr algn="ctr">
+                        <a:buNone/>
+                      </a:pPr>
                       <a:r>
                         <a:rPr sz="788" b="1">
                           <a:solidFill>
@@ -11936,7 +16654,9 @@
                     </a:bodyPr>
                     <a:lstStyle/>
                     <a:p>
-                      <a:pPr algn="l"/>
+                      <a:pPr algn="l">
+                        <a:buNone/>
+                      </a:pPr>
                       <a:r>
                         <a:rPr sz="788" b="1">
                           <a:solidFill>
@@ -11963,7 +16683,9 @@
                     </a:bodyPr>
                     <a:lstStyle/>
                     <a:p>
-                      <a:pPr algn="l"/>
+                      <a:pPr algn="l">
+                        <a:buNone/>
+                      </a:pPr>
                       <a:r>
                         <a:rPr sz="788" b="1">
                           <a:solidFill>
@@ -11990,7 +16712,9 @@
                     </a:bodyPr>
                     <a:lstStyle/>
                     <a:p>
-                      <a:pPr algn="l"/>
+                      <a:pPr algn="l">
+                        <a:buNone/>
+                      </a:pPr>
                       <a:r>
                         <a:rPr sz="788" b="1">
                           <a:solidFill>
@@ -12019,7 +16743,9 @@
                     </a:bodyPr>
                     <a:lstStyle/>
                     <a:p>
-                      <a:pPr algn="ctr"/>
+                      <a:pPr algn="ctr">
+                        <a:buNone/>
+                      </a:pPr>
                       <a:r>
                         <a:rPr sz="780">
                           <a:solidFill>
@@ -12046,7 +16772,9 @@
                     </a:bodyPr>
                     <a:lstStyle/>
                     <a:p>
-                      <a:pPr algn="l"/>
+                      <a:pPr algn="l">
+                        <a:buNone/>
+                      </a:pPr>
                       <a:r>
                         <a:rPr sz="780">
                           <a:solidFill>
@@ -12073,7 +16801,9 @@
                     </a:bodyPr>
                     <a:lstStyle/>
                     <a:p>
-                      <a:pPr algn="l"/>
+                      <a:pPr algn="l">
+                        <a:buNone/>
+                      </a:pPr>
                       <a:r>
                         <a:rPr sz="780">
                           <a:solidFill>
@@ -12100,7 +16830,9 @@
                     </a:bodyPr>
                     <a:lstStyle/>
                     <a:p>
-                      <a:pPr algn="l"/>
+                      <a:pPr algn="l">
+                        <a:buNone/>
+                      </a:pPr>
                       <a:r>
                         <a:rPr sz="780">
                           <a:solidFill>
@@ -12129,7 +16861,9 @@
                     </a:bodyPr>
                     <a:lstStyle/>
                     <a:p>
-                      <a:pPr algn="ctr"/>
+                      <a:pPr algn="ctr">
+                        <a:buNone/>
+                      </a:pPr>
                       <a:r>
                         <a:rPr sz="780">
                           <a:solidFill>
@@ -12156,7 +16890,9 @@
                     </a:bodyPr>
                     <a:lstStyle/>
                     <a:p>
-                      <a:pPr algn="l"/>
+                      <a:pPr algn="l">
+                        <a:buNone/>
+                      </a:pPr>
                       <a:r>
                         <a:rPr sz="780">
                           <a:solidFill>
@@ -12183,7 +16919,9 @@
                     </a:bodyPr>
                     <a:lstStyle/>
                     <a:p>
-                      <a:pPr algn="l"/>
+                      <a:pPr algn="l">
+                        <a:buNone/>
+                      </a:pPr>
                       <a:r>
                         <a:rPr sz="780">
                           <a:solidFill>
@@ -12210,7 +16948,9 @@
                     </a:bodyPr>
                     <a:lstStyle/>
                     <a:p>
-                      <a:pPr algn="l"/>
+                      <a:pPr algn="l">
+                        <a:buNone/>
+                      </a:pPr>
                       <a:r>
                         <a:rPr sz="780">
                           <a:solidFill>
@@ -12239,7 +16979,9 @@
                     </a:bodyPr>
                     <a:lstStyle/>
                     <a:p>
-                      <a:pPr algn="ctr"/>
+                      <a:pPr algn="ctr">
+                        <a:buNone/>
+                      </a:pPr>
                       <a:r>
                         <a:rPr sz="780">
                           <a:solidFill>
@@ -12266,7 +17008,9 @@
                     </a:bodyPr>
                     <a:lstStyle/>
                     <a:p>
-                      <a:pPr algn="l"/>
+                      <a:pPr algn="l">
+                        <a:buNone/>
+                      </a:pPr>
                       <a:r>
                         <a:rPr sz="780">
                           <a:solidFill>
@@ -12293,7 +17037,9 @@
                     </a:bodyPr>
                     <a:lstStyle/>
                     <a:p>
-                      <a:pPr algn="l"/>
+                      <a:pPr algn="l">
+                        <a:buNone/>
+                      </a:pPr>
                       <a:r>
                         <a:rPr sz="780">
                           <a:solidFill>
@@ -12320,7 +17066,9 @@
                     </a:bodyPr>
                     <a:lstStyle/>
                     <a:p>
-                      <a:pPr algn="l"/>
+                      <a:pPr algn="l">
+                        <a:buNone/>
+                      </a:pPr>
                       <a:r>
                         <a:rPr sz="780">
                           <a:solidFill>
@@ -12349,7 +17097,9 @@
                     </a:bodyPr>
                     <a:lstStyle/>
                     <a:p>
-                      <a:pPr algn="ctr"/>
+                      <a:pPr algn="ctr">
+                        <a:buNone/>
+                      </a:pPr>
                       <a:r>
                         <a:rPr sz="780">
                           <a:solidFill>
@@ -12376,7 +17126,9 @@
                     </a:bodyPr>
                     <a:lstStyle/>
                     <a:p>
-                      <a:pPr algn="l"/>
+                      <a:pPr algn="l">
+                        <a:buNone/>
+                      </a:pPr>
                       <a:r>
                         <a:rPr sz="780">
                           <a:solidFill>
@@ -12403,7 +17155,9 @@
                     </a:bodyPr>
                     <a:lstStyle/>
                     <a:p>
-                      <a:pPr algn="l"/>
+                      <a:pPr algn="l">
+                        <a:buNone/>
+                      </a:pPr>
                       <a:r>
                         <a:rPr sz="780">
                           <a:solidFill>
@@ -12430,7 +17184,9 @@
                     </a:bodyPr>
                     <a:lstStyle/>
                     <a:p>
-                      <a:pPr algn="l"/>
+                      <a:pPr algn="l">
+                        <a:buNone/>
+                      </a:pPr>
                       <a:r>
                         <a:rPr sz="780">
                           <a:solidFill>
@@ -12651,7 +17407,7 @@
 </p:sld>
 </file>
 
-<file path=ppt/slides/slide14.xml><?xml version="1.0" encoding="utf-8"?>
+<file path=ppt/slides/slide15.xml><?xml version="1.0" encoding="utf-8"?>
 <p:sld xmlns:p="http://schemas.openxmlformats.org/presentationml/2006/main">
   <p:cSld>
     <p:bg>
@@ -12851,7 +17607,7 @@
                 <a:ea typeface="Itau Display"/>
                 <a:cs typeface="Itau Display"/>
               </a:rPr>
-              <a:t>14</a:t>
+              <a:t>15</a:t>
             </a:r>
           </a:p>
         </p:txBody>
@@ -13966,7 +18722,7 @@
 </p:sld>
 </file>
 
-<file path=ppt/slides/slide15.xml><?xml version="1.0" encoding="utf-8"?>
+<file path=ppt/slides/slide16.xml><?xml version="1.0" encoding="utf-8"?>
 <p:sld xmlns:p="http://schemas.openxmlformats.org/presentationml/2006/main">
   <p:cSld>
     <p:bg>
@@ -14166,7 +18922,7 @@
                 <a:ea typeface="Itau Display"/>
                 <a:cs typeface="Itau Display"/>
               </a:rPr>
-              <a:t>15</a:t>
+              <a:t>16</a:t>
             </a:r>
           </a:p>
         </p:txBody>
@@ -15231,7 +19987,7 @@
 </p:sld>
 </file>
 
-<file path=ppt/slides/slide16.xml><?xml version="1.0" encoding="utf-8"?>
+<file path=ppt/slides/slide17.xml><?xml version="1.0" encoding="utf-8"?>
 <p:sld xmlns:p="http://schemas.openxmlformats.org/presentationml/2006/main">
   <p:cSld>
     <p:bg>
@@ -15431,7 +20187,7 @@
                 <a:ea typeface="Itau Display"/>
                 <a:cs typeface="Itau Display"/>
               </a:rPr>
-              <a:t>16</a:t>
+              <a:t>17</a:t>
             </a:r>
           </a:p>
         </p:txBody>
@@ -16348,7 +21104,7 @@
 </p:sld>
 </file>
 
-<file path=ppt/slides/slide17.xml><?xml version="1.0" encoding="utf-8"?>
+<file path=ppt/slides/slide18.xml><?xml version="1.0" encoding="utf-8"?>
 <p:sld xmlns:p="http://schemas.openxmlformats.org/presentationml/2006/main">
   <p:cSld>
     <p:bg>
@@ -16548,7 +21304,7 @@
                 <a:ea typeface="Itau Display"/>
                 <a:cs typeface="Itau Display"/>
               </a:rPr>
-              <a:t>17</a:t>
+              <a:t>18</a:t>
             </a:r>
           </a:p>
         </p:txBody>
@@ -17291,7 +22047,7 @@
 </p:sld>
 </file>
 
-<file path=ppt/slides/slide18.xml><?xml version="1.0" encoding="utf-8"?>
+<file path=ppt/slides/slide19.xml><?xml version="1.0" encoding="utf-8"?>
 <p:sld xmlns:p="http://schemas.openxmlformats.org/presentationml/2006/main">
   <p:cSld>
     <p:bg>
@@ -17491,7 +22247,7 @@
                 <a:ea typeface="Itau Display"/>
                 <a:cs typeface="Itau Display"/>
               </a:rPr>
-              <a:t>18</a:t>
+              <a:t>19</a:t>
             </a:r>
           </a:p>
         </p:txBody>
@@ -18293,918 +23049,6 @@
     <p:extLst>
       <p:ext uri="{BB962C8B-B14F-4D97-AF65-F5344CB8AC3E}">
         <p14:creationId xmlns:p14="http://schemas.microsoft.com/office/powerpoint/2010/main" val="1176993362"/>
-      </p:ext>
-    </p:extLst>
-  </p:cSld>
-</p:sld>
-</file>
-
-<file path=ppt/slides/slide19.xml><?xml version="1.0" encoding="utf-8"?>
-<p:sld xmlns:p="http://schemas.openxmlformats.org/presentationml/2006/main">
-  <p:cSld>
-    <p:bg>
-      <p:bgPr>
-        <a:solidFill xmlns:a="http://schemas.openxmlformats.org/drawingml/2006/main">
-          <a:srgbClr val="FFFFFF"/>
-        </a:solidFill>
-      </p:bgPr>
-    </p:bg>
-    <p:spTree>
-      <p:nvGrpSpPr>
-        <p:cNvPr id="1" name=""/>
-        <p:cNvGrpSpPr/>
-        <p:nvPr/>
-      </p:nvGrpSpPr>
-      <p:grpSpPr>
-        <a:xfrm xmlns:a="http://schemas.openxmlformats.org/drawingml/2006/main"/>
-      </p:grpSpPr>
-      <p:sp>
-        <p:nvSpPr>
-          <p:cNvPr id="7" name="">
-            <a:extLst xmlns:a="http://schemas.openxmlformats.org/drawingml/2006/main">
-              <a:ext uri="{FF2B5EF4-FFF2-40B4-BE49-F238E27FC236}">
-                <a16:creationId xmlns:a16="http://schemas.microsoft.com/office/drawing/2014/main" id="{9ACE6745-2987-45C2-B9F4-94995BA0CF1D}"/>
-              </a:ext>
-            </a:extLst>
-          </p:cNvPr>
-          <p:cNvSpPr>
-            <a:spLocks xmlns:a="http://schemas.openxmlformats.org/drawingml/2006/main" noGrp="1"/>
-          </p:cNvSpPr>
-          <p:nvPr/>
-        </p:nvSpPr>
-        <p:spPr>
-          <a:xfrm xmlns:a="http://schemas.openxmlformats.org/drawingml/2006/main">
-            <a:off x="552450" y="285750"/>
-            <a:ext cx="5048250" cy="190500"/>
-          </a:xfrm>
-          <a:prstGeom xmlns:a="http://schemas.openxmlformats.org/drawingml/2006/main" prst="rect">
-            <a:avLst/>
-          </a:prstGeom>
-          <a:noFill xmlns:a="http://schemas.openxmlformats.org/drawingml/2006/main"/>
-          <a:ln xmlns:a="http://schemas.openxmlformats.org/drawingml/2006/main" w="0">
-            <a:noFill/>
-            <a:prstDash val="solid"/>
-          </a:ln>
-        </p:spPr>
-        <p:txBody>
-          <a:bodyPr xmlns:a="http://schemas.openxmlformats.org/drawingml/2006/main" wrap="square" lIns="0" tIns="0" rIns="0" bIns="0" anchor="t">
-            <a:normAutofit fontScale="100000"/>
-          </a:bodyPr>
-          <a:lstStyle xmlns:a="http://schemas.openxmlformats.org/drawingml/2006/main"/>
-          <a:p xmlns:a="http://schemas.openxmlformats.org/drawingml/2006/main">
-            <a:pPr algn="l">
-              <a:lnSpc>
-                <a:spcPct val="105000"/>
-              </a:lnSpc>
-              <a:buNone/>
-              <a:defRPr sz="825" b="1">
-                <a:solidFill>
-                  <a:srgbClr val="B85300"/>
-                </a:solidFill>
-                <a:latin typeface="Itau Display X-Bold"/>
-                <a:ea typeface="Itau Display X-Bold"/>
-                <a:cs typeface="Itau Display X-Bold"/>
-              </a:defRPr>
-            </a:pPr>
-            <a:r>
-              <a:rPr sz="825" b="1">
-                <a:solidFill>
-                  <a:srgbClr val="B85300"/>
-                </a:solidFill>
-                <a:latin typeface="Itau Display X-Bold"/>
-                <a:ea typeface="Itau Display X-Bold"/>
-                <a:cs typeface="Itau Display X-Bold"/>
-              </a:rPr>
-              <a:t>Sanções e fiscalização</a:t>
-            </a:r>
-          </a:p>
-        </p:txBody>
-      </p:sp>
-      <p:sp>
-        <p:nvSpPr>
-          <p:cNvPr id="2" name="">
-            <a:extLst xmlns:a="http://schemas.openxmlformats.org/drawingml/2006/main">
-              <a:ext uri="{FF2B5EF4-FFF2-40B4-BE49-F238E27FC236}">
-                <a16:creationId xmlns:a16="http://schemas.microsoft.com/office/drawing/2014/main" id="{4EFED08C-9435-4DB2-9A68-C9F3902AB70B}"/>
-              </a:ext>
-            </a:extLst>
-          </p:cNvPr>
-          <p:cNvSpPr>
-            <a:spLocks xmlns:a="http://schemas.openxmlformats.org/drawingml/2006/main" noGrp="1"/>
-          </p:cNvSpPr>
-          <p:nvPr/>
-        </p:nvSpPr>
-        <p:spPr>
-          <a:xfrm xmlns:a="http://schemas.openxmlformats.org/drawingml/2006/main">
-            <a:off x="552450" y="514350"/>
-            <a:ext cx="11068050" cy="552450"/>
-          </a:xfrm>
-          <a:prstGeom xmlns:a="http://schemas.openxmlformats.org/drawingml/2006/main" prst="rect">
-            <a:avLst/>
-          </a:prstGeom>
-          <a:noFill xmlns:a="http://schemas.openxmlformats.org/drawingml/2006/main"/>
-          <a:ln xmlns:a="http://schemas.openxmlformats.org/drawingml/2006/main" w="0">
-            <a:noFill/>
-            <a:prstDash val="solid"/>
-          </a:ln>
-        </p:spPr>
-        <p:txBody>
-          <a:bodyPr xmlns:a="http://schemas.openxmlformats.org/drawingml/2006/main" wrap="square" lIns="0" tIns="0" rIns="0" bIns="0" anchor="t">
-            <a:normAutofit fontScale="100000"/>
-          </a:bodyPr>
-          <a:lstStyle xmlns:a="http://schemas.openxmlformats.org/drawingml/2006/main"/>
-          <a:p xmlns:a="http://schemas.openxmlformats.org/drawingml/2006/main">
-            <a:pPr algn="l">
-              <a:lnSpc>
-                <a:spcPct val="98000"/>
-              </a:lnSpc>
-              <a:buNone/>
-              <a:defRPr sz="2250" b="1">
-                <a:solidFill>
-                  <a:srgbClr val="161616"/>
-                </a:solidFill>
-                <a:latin typeface="Itau Display Black"/>
-                <a:ea typeface="Itau Display Black"/>
-                <a:cs typeface="Itau Display Black"/>
-              </a:defRPr>
-            </a:pPr>
-            <a:r>
-              <a:rPr sz="2250" b="1">
-                <a:solidFill>
-                  <a:srgbClr val="161616"/>
-                </a:solidFill>
-                <a:latin typeface="Itau Display Black"/>
-                <a:ea typeface="Itau Display Black"/>
-                <a:cs typeface="Itau Display Black"/>
-              </a:rPr>
-              <a:t>A CVM aplicou multas em falhas de FIDC; termos recentes têm natureza consensual</a:t>
-            </a:r>
-          </a:p>
-        </p:txBody>
-      </p:sp>
-      <p:sp>
-        <p:nvSpPr>
-          <p:cNvPr id="3" name="">
-            <a:extLst xmlns:a="http://schemas.openxmlformats.org/drawingml/2006/main">
-              <a:ext uri="{FF2B5EF4-FFF2-40B4-BE49-F238E27FC236}">
-                <a16:creationId xmlns:a16="http://schemas.microsoft.com/office/drawing/2014/main" id="{9ED82242-5644-4D86-8E75-C70A4F971545}"/>
-              </a:ext>
-            </a:extLst>
-          </p:cNvPr>
-          <p:cNvSpPr>
-            <a:spLocks xmlns:a="http://schemas.openxmlformats.org/drawingml/2006/main" noGrp="1"/>
-          </p:cNvSpPr>
-          <p:nvPr/>
-        </p:nvSpPr>
-        <p:spPr>
-          <a:xfrm xmlns:a="http://schemas.openxmlformats.org/drawingml/2006/main">
-            <a:off x="11182350" y="6486525"/>
-            <a:ext cx="438150" cy="152400"/>
-          </a:xfrm>
-          <a:prstGeom xmlns:a="http://schemas.openxmlformats.org/drawingml/2006/main" prst="rect">
-            <a:avLst/>
-          </a:prstGeom>
-          <a:noFill xmlns:a="http://schemas.openxmlformats.org/drawingml/2006/main"/>
-          <a:ln xmlns:a="http://schemas.openxmlformats.org/drawingml/2006/main" w="0">
-            <a:noFill/>
-            <a:prstDash val="solid"/>
-          </a:ln>
-        </p:spPr>
-        <p:txBody>
-          <a:bodyPr xmlns:a="http://schemas.openxmlformats.org/drawingml/2006/main" wrap="square" lIns="0" tIns="0" rIns="0" bIns="0" anchor="t">
-            <a:normAutofit fontScale="100000"/>
-          </a:bodyPr>
-          <a:lstStyle xmlns:a="http://schemas.openxmlformats.org/drawingml/2006/main"/>
-          <a:p xmlns:a="http://schemas.openxmlformats.org/drawingml/2006/main">
-            <a:pPr algn="r">
-              <a:lnSpc>
-                <a:spcPct val="105000"/>
-              </a:lnSpc>
-              <a:buNone/>
-              <a:defRPr sz="750" b="0">
-                <a:solidFill>
-                  <a:srgbClr val="858585"/>
-                </a:solidFill>
-                <a:latin typeface="Itau Display"/>
-                <a:ea typeface="Itau Display"/>
-                <a:cs typeface="Itau Display"/>
-              </a:defRPr>
-            </a:pPr>
-            <a:r>
-              <a:rPr sz="750" b="0">
-                <a:solidFill>
-                  <a:srgbClr val="858585"/>
-                </a:solidFill>
-                <a:latin typeface="Itau Display"/>
-                <a:ea typeface="Itau Display"/>
-                <a:cs typeface="Itau Display"/>
-              </a:rPr>
-              <a:t>19</a:t>
-            </a:r>
-          </a:p>
-        </p:txBody>
-      </p:sp>
-      <p:graphicFrame>
-        <p:nvGraphicFramePr>
-          <p:cNvPr id="12" name=""/>
-          <p:cNvGraphicFramePr/>
-          <p:nvPr/>
-        </p:nvGraphicFramePr>
-        <p:xfrm>
-          <a:off xmlns:a="http://schemas.openxmlformats.org/drawingml/2006/main" x="552450" y="1428750"/>
-          <a:ext xmlns:a="http://schemas.openxmlformats.org/drawingml/2006/main" cx="11068050" cy="3905250"/>
-        </p:xfrm>
-        <a:graphic xmlns:a="http://schemas.openxmlformats.org/drawingml/2006/main">
-          <a:graphicData uri="http://schemas.openxmlformats.org/drawingml/2006/table">
-            <a:tbl>
-              <a:tblPr/>
-              <a:tblGrid>
-                <a:gridCol w="1809750"/>
-                <a:gridCol w="2286000"/>
-                <a:gridCol w="1190625"/>
-                <a:gridCol w="3667125"/>
-                <a:gridCol w="2114550"/>
-              </a:tblGrid>
-              <a:tr h="381000">
-                <a:tc>
-                  <a:txBody>
-                    <a:bodyPr/>
-                    <a:lstStyle/>
-                    <a:p>
-                      <a:r>
-                        <a:rPr sz="870" b="1">
-                          <a:solidFill>
-                            <a:srgbClr val="161616"/>
-                          </a:solidFill>
-                          <a:latin typeface="Itau Display X-Bold"/>
-                          <a:ea typeface="Itau Display X-Bold"/>
-                          <a:cs typeface="Itau Display X-Bold"/>
-                        </a:rPr>
-                        <a:t>Categoria</a:t>
-                      </a:r>
-                    </a:p>
-                  </a:txBody>
-                  <a:tcPr marL="91440" marR="91440" marT="45720" marB="45720"/>
-                </a:tc>
-                <a:tc>
-                  <a:txBody>
-                    <a:bodyPr/>
-                    <a:lstStyle/>
-                    <a:p>
-                      <a:r>
-                        <a:rPr sz="870" b="1">
-                          <a:solidFill>
-                            <a:srgbClr val="161616"/>
-                          </a:solidFill>
-                          <a:latin typeface="Itau Display X-Bold"/>
-                          <a:ea typeface="Itau Display X-Bold"/>
-                          <a:cs typeface="Itau Display X-Bold"/>
-                        </a:rPr>
-                        <a:t>Caso / instituição</a:t>
-                      </a:r>
-                    </a:p>
-                  </a:txBody>
-                  <a:tcPr marL="91440" marR="91440" marT="45720" marB="45720"/>
-                </a:tc>
-                <a:tc>
-                  <a:txBody>
-                    <a:bodyPr/>
-                    <a:lstStyle/>
-                    <a:p>
-                      <a:r>
-                        <a:rPr sz="870" b="1">
-                          <a:solidFill>
-                            <a:srgbClr val="161616"/>
-                          </a:solidFill>
-                          <a:latin typeface="Itau Display X-Bold"/>
-                          <a:ea typeface="Itau Display X-Bold"/>
-                          <a:cs typeface="Itau Display X-Bold"/>
-                        </a:rPr>
-                        <a:t>Valor</a:t>
-                      </a:r>
-                    </a:p>
-                  </a:txBody>
-                  <a:tcPr marL="91440" marR="91440" marT="45720" marB="45720"/>
-                </a:tc>
-                <a:tc>
-                  <a:txBody>
-                    <a:bodyPr/>
-                    <a:lstStyle/>
-                    <a:p>
-                      <a:r>
-                        <a:rPr sz="870" b="1">
-                          <a:solidFill>
-                            <a:srgbClr val="161616"/>
-                          </a:solidFill>
-                          <a:latin typeface="Itau Display X-Bold"/>
-                          <a:ea typeface="Itau Display X-Bold"/>
-                          <a:cs typeface="Itau Display X-Bold"/>
-                        </a:rPr>
-                        <a:t>Conduta e resultado</a:t>
-                      </a:r>
-                    </a:p>
-                  </a:txBody>
-                  <a:tcPr marL="91440" marR="91440" marT="45720" marB="45720"/>
-                </a:tc>
-                <a:tc>
-                  <a:txBody>
-                    <a:bodyPr/>
-                    <a:lstStyle/>
-                    <a:p>
-                      <a:r>
-                        <a:rPr sz="870" b="1">
-                          <a:solidFill>
-                            <a:srgbClr val="161616"/>
-                          </a:solidFill>
-                          <a:latin typeface="Itau Display X-Bold"/>
-                          <a:ea typeface="Itau Display X-Bold"/>
-                          <a:cs typeface="Itau Display X-Bold"/>
-                        </a:rPr>
-                        <a:t>Coleta / fonte</a:t>
-                      </a:r>
-                    </a:p>
-                  </a:txBody>
-                  <a:tcPr marL="91440" marR="91440" marT="45720" marB="45720"/>
-                </a:tc>
-              </a:tr>
-              <a:tr h="876300">
-                <a:tc>
-                  <a:txBody>
-                    <a:bodyPr>
-                      <a:normAutofit/>
-                    </a:bodyPr>
-                    <a:lstStyle/>
-                    <a:p>
-                      <a:r>
-                        <a:rPr sz="810" b="1">
-                          <a:solidFill>
-                            <a:srgbClr val="161616"/>
-                          </a:solidFill>
-                          <a:latin typeface="Itau Display X-Bold"/>
-                          <a:ea typeface="Itau Display X-Bold"/>
-                          <a:cs typeface="Itau Display X-Bold"/>
-                        </a:rPr>
-                        <a:t>Sanção CVM</a:t>
-                      </a:r>
-                    </a:p>
-                  </a:txBody>
-                  <a:tcPr marL="91440" marR="91440" marT="45720" marB="45720"/>
-                </a:tc>
-                <a:tc>
-                  <a:txBody>
-                    <a:bodyPr/>
-                    <a:lstStyle/>
-                    <a:p>
-                      <a:r>
-                        <a:rPr sz="810" b="0">
-                          <a:solidFill>
-                            <a:srgbClr val="161616"/>
-                          </a:solidFill>
-                          <a:latin typeface="Itau Display"/>
-                          <a:ea typeface="Itau Display"/>
-                          <a:cs typeface="Itau Display"/>
-                        </a:rPr>
-                        <a:t>PAS RJ2013/5456 · Oliveira Trust · FIDC Union e FIDC Agro</a:t>
-                      </a:r>
-                    </a:p>
-                  </a:txBody>
-                  <a:tcPr marL="91440" marR="91440" marT="45720" marB="45720"/>
-                </a:tc>
-                <a:tc>
-                  <a:txBody>
-                    <a:bodyPr>
-                      <a:normAutofit/>
-                    </a:bodyPr>
-                    <a:lstStyle/>
-                    <a:p>
-                      <a:r>
-                        <a:rPr sz="810" b="0">
-                          <a:solidFill>
-                            <a:srgbClr val="161616"/>
-                          </a:solidFill>
-                          <a:latin typeface="Itau Display"/>
-                          <a:ea typeface="Itau Display"/>
-                          <a:cs typeface="Itau Display"/>
-                        </a:rPr>
-                        <a:t>R$ 3,0 mi</a:t>
-                      </a:r>
-                    </a:p>
-                  </a:txBody>
-                  <a:tcPr marL="91440" marR="91440" marT="45720" marB="45720"/>
-                </a:tc>
-                <a:tc>
-                  <a:txBody>
-                    <a:bodyPr/>
-                    <a:lstStyle/>
-                    <a:p>
-                      <a:r>
-                        <a:rPr sz="810" b="0">
-                          <a:solidFill>
-                            <a:srgbClr val="161616"/>
-                          </a:solidFill>
-                          <a:latin typeface="Itau Display"/>
-                          <a:ea typeface="Itau Display"/>
-                          <a:cs typeface="Itau Display"/>
-                        </a:rPr>
-                        <a:t>Três multas de R$1,0 mi por documentação, PDD/classificação de risco e descumprimento de regulamento; diretor proibido por 2 anos e 6 meses</a:t>
-                      </a:r>
-                    </a:p>
-                  </a:txBody>
-                  <a:tcPr marL="91440" marR="91440" marT="45720" marB="45720"/>
-                </a:tc>
-                <a:tc>
-                  <a:txBody>
-                    <a:bodyPr/>
-                    <a:lstStyle/>
-                    <a:p>
-                      <a:r>
-                        <a:rPr sz="810" b="0">
-                          <a:solidFill>
-                            <a:srgbClr val="161616"/>
-                          </a:solidFill>
-                          <a:latin typeface="Itau Display"/>
-                          <a:ea typeface="Itau Display"/>
-                          <a:cs typeface="Itau Display"/>
-                        </a:rPr>
-                        <a:t>Decisão e notícia CVM · julgamento 2015</a:t>
-                      </a:r>
-                    </a:p>
-                  </a:txBody>
-                  <a:tcPr marL="91440" marR="91440" marT="45720" marB="45720"/>
-                </a:tc>
-              </a:tr>
-              <a:tr h="876300">
-                <a:tc>
-                  <a:txBody>
-                    <a:bodyPr>
-                      <a:normAutofit/>
-                    </a:bodyPr>
-                    <a:lstStyle/>
-                    <a:p>
-                      <a:r>
-                        <a:rPr sz="810" b="1">
-                          <a:solidFill>
-                            <a:srgbClr val="161616"/>
-                          </a:solidFill>
-                          <a:latin typeface="Itau Display X-Bold"/>
-                          <a:ea typeface="Itau Display X-Bold"/>
-                          <a:cs typeface="Itau Display X-Bold"/>
-                        </a:rPr>
-                        <a:t>Sanção CVM</a:t>
-                      </a:r>
-                    </a:p>
-                  </a:txBody>
-                  <a:tcPr marL="91440" marR="91440" marT="45720" marB="45720"/>
-                </a:tc>
-                <a:tc>
-                  <a:txBody>
-                    <a:bodyPr/>
-                    <a:lstStyle/>
-                    <a:p>
-                      <a:r>
-                        <a:rPr sz="810" b="0">
-                          <a:solidFill>
-                            <a:srgbClr val="161616"/>
-                          </a:solidFill>
-                          <a:latin typeface="Itau Display"/>
-                          <a:ea typeface="Itau Display"/>
-                          <a:cs typeface="Itau Display"/>
-                        </a:rPr>
-                        <a:t>PAS RJ2013/5456 · Bradesco como custodiante</a:t>
-                      </a:r>
-                    </a:p>
-                  </a:txBody>
-                  <a:tcPr marL="91440" marR="91440" marT="45720" marB="45720"/>
-                </a:tc>
-                <a:tc>
-                  <a:txBody>
-                    <a:bodyPr>
-                      <a:normAutofit/>
-                    </a:bodyPr>
-                    <a:lstStyle/>
-                    <a:p>
-                      <a:r>
-                        <a:rPr sz="810" b="0">
-                          <a:solidFill>
-                            <a:srgbClr val="161616"/>
-                          </a:solidFill>
-                          <a:latin typeface="Itau Display"/>
-                          <a:ea typeface="Itau Display"/>
-                          <a:cs typeface="Itau Display"/>
-                        </a:rPr>
-                        <a:t>R$ 1,5 mi</a:t>
-                      </a:r>
-                    </a:p>
-                  </a:txBody>
-                  <a:tcPr marL="91440" marR="91440" marT="45720" marB="45720"/>
-                </a:tc>
-                <a:tc>
-                  <a:txBody>
-                    <a:bodyPr/>
-                    <a:lstStyle/>
-                    <a:p>
-                      <a:r>
-                        <a:rPr sz="810" b="0">
-                          <a:solidFill>
-                            <a:srgbClr val="161616"/>
-                          </a:solidFill>
-                          <a:latin typeface="Itau Display"/>
-                          <a:ea typeface="Itau Display"/>
-                          <a:cs typeface="Itau Display"/>
-                        </a:rPr>
-                        <a:t>Três multas de R$500 mil por liquidação, guarda de lastro e documentação; houve absolvições em imputações específicas</a:t>
-                      </a:r>
-                    </a:p>
-                  </a:txBody>
-                  <a:tcPr marL="91440" marR="91440" marT="45720" marB="45720"/>
-                </a:tc>
-                <a:tc>
-                  <a:txBody>
-                    <a:bodyPr/>
-                    <a:lstStyle/>
-                    <a:p>
-                      <a:r>
-                        <a:rPr sz="810" b="0">
-                          <a:solidFill>
-                            <a:srgbClr val="161616"/>
-                          </a:solidFill>
-                          <a:latin typeface="Itau Display"/>
-                          <a:ea typeface="Itau Display"/>
-                          <a:cs typeface="Itau Display"/>
-                        </a:rPr>
-                        <a:t>Decisão e notícia CVM · julgamento 2015</a:t>
-                      </a:r>
-                    </a:p>
-                  </a:txBody>
-                  <a:tcPr marL="91440" marR="91440" marT="45720" marB="45720"/>
-                </a:tc>
-              </a:tr>
-              <a:tr h="876300">
-                <a:tc>
-                  <a:txBody>
-                    <a:bodyPr>
-                      <a:normAutofit/>
-                    </a:bodyPr>
-                    <a:lstStyle/>
-                    <a:p>
-                      <a:r>
-                        <a:rPr sz="810" b="1">
-                          <a:solidFill>
-                            <a:srgbClr val="161616"/>
-                          </a:solidFill>
-                          <a:latin typeface="Itau Display X-Bold"/>
-                          <a:ea typeface="Itau Display X-Bold"/>
-                          <a:cs typeface="Itau Display X-Bold"/>
-                        </a:rPr>
-                        <a:t>Termo de Compromisso</a:t>
-                      </a:r>
-                    </a:p>
-                  </a:txBody>
-                  <a:tcPr marL="91440" marR="91440" marT="45720" marB="45720"/>
-                </a:tc>
-                <a:tc>
-                  <a:txBody>
-                    <a:bodyPr/>
-                    <a:lstStyle/>
-                    <a:p>
-                      <a:r>
-                        <a:rPr sz="810" b="0">
-                          <a:solidFill>
-                            <a:srgbClr val="161616"/>
-                          </a:solidFill>
-                          <a:latin typeface="Itau Display"/>
-                          <a:ea typeface="Itau Display"/>
-                          <a:cs typeface="Itau Display"/>
-                        </a:rPr>
-                        <a:t>BEM DTVM e diretor · 2025</a:t>
-                      </a:r>
-                    </a:p>
-                  </a:txBody>
-                  <a:tcPr marL="91440" marR="91440" marT="45720" marB="45720"/>
-                </a:tc>
-                <a:tc>
-                  <a:txBody>
-                    <a:bodyPr>
-                      <a:normAutofit/>
-                    </a:bodyPr>
-                    <a:lstStyle/>
-                    <a:p>
-                      <a:r>
-                        <a:rPr sz="810" b="0">
-                          <a:solidFill>
-                            <a:srgbClr val="161616"/>
-                          </a:solidFill>
-                          <a:latin typeface="Itau Display"/>
-                          <a:ea typeface="Itau Display"/>
-                          <a:cs typeface="Itau Display"/>
-                        </a:rPr>
-                        <a:t>R$ 1,0 mi</a:t>
-                      </a:r>
-                    </a:p>
-                  </a:txBody>
-                  <a:tcPr marL="91440" marR="91440" marT="45720" marB="45720"/>
-                </a:tc>
-                <a:tc>
-                  <a:txBody>
-                    <a:bodyPr/>
-                    <a:lstStyle/>
-                    <a:p>
-                      <a:r>
-                        <a:rPr sz="810" b="0">
-                          <a:solidFill>
-                            <a:srgbClr val="161616"/>
-                          </a:solidFill>
-                          <a:latin typeface="Itau Display"/>
-                          <a:ea typeface="Itau Display"/>
-                          <a:cs typeface="Itau Display"/>
-                        </a:rPr>
-                        <a:t>BEM R$750 mil e diretor R$250 mil em compromisso sobre controles de liquidez e diligência de fundo multimercado; tema fora do núcleo FIDC/PDD</a:t>
-                      </a:r>
-                    </a:p>
-                  </a:txBody>
-                  <a:tcPr marL="91440" marR="91440" marT="45720" marB="45720"/>
-                </a:tc>
-                <a:tc>
-                  <a:txBody>
-                    <a:bodyPr/>
-                    <a:lstStyle/>
-                    <a:p>
-                      <a:r>
-                        <a:rPr sz="810" b="0">
-                          <a:solidFill>
-                            <a:srgbClr val="161616"/>
-                          </a:solidFill>
-                          <a:latin typeface="Itau Display"/>
-                          <a:ea typeface="Itau Display"/>
-                          <a:cs typeface="Itau Display"/>
-                        </a:rPr>
-                        <a:t>Notícia e termo CVM · 2025</a:t>
-                      </a:r>
-                    </a:p>
-                  </a:txBody>
-                  <a:tcPr marL="91440" marR="91440" marT="45720" marB="45720"/>
-                </a:tc>
-              </a:tr>
-              <a:tr h="876300">
-                <a:tc>
-                  <a:txBody>
-                    <a:bodyPr>
-                      <a:normAutofit/>
-                    </a:bodyPr>
-                    <a:lstStyle/>
-                    <a:p>
-                      <a:r>
-                        <a:rPr sz="810" b="1">
-                          <a:solidFill>
-                            <a:srgbClr val="161616"/>
-                          </a:solidFill>
-                          <a:latin typeface="Itau Display X-Bold"/>
-                          <a:ea typeface="Itau Display X-Bold"/>
-                          <a:cs typeface="Itau Display X-Bold"/>
-                        </a:rPr>
-                        <a:t>Pesquisa sem sanção confirmada</a:t>
-                      </a:r>
-                    </a:p>
-                  </a:txBody>
-                  <a:tcPr marL="91440" marR="91440" marT="45720" marB="45720"/>
-                </a:tc>
-                <a:tc>
-                  <a:txBody>
-                    <a:bodyPr/>
-                    <a:lstStyle/>
-                    <a:p>
-                      <a:r>
-                        <a:rPr sz="810" b="0">
-                          <a:solidFill>
-                            <a:srgbClr val="161616"/>
-                          </a:solidFill>
-                          <a:latin typeface="Itau Display"/>
-                          <a:ea typeface="Itau Display"/>
-                          <a:cs typeface="Itau Display"/>
-                        </a:rPr>
-                        <a:t>REAG e demais nomes</a:t>
-                      </a:r>
-                    </a:p>
-                  </a:txBody>
-                  <a:tcPr marL="91440" marR="91440" marT="45720" marB="45720"/>
-                </a:tc>
-                <a:tc>
-                  <a:txBody>
-                    <a:bodyPr>
-                      <a:normAutofit/>
-                    </a:bodyPr>
-                    <a:lstStyle/>
-                    <a:p>
-                      <a:r>
-                        <a:rPr sz="810" b="0">
-                          <a:solidFill>
-                            <a:srgbClr val="161616"/>
-                          </a:solidFill>
-                          <a:latin typeface="Itau Display"/>
-                          <a:ea typeface="Itau Display"/>
-                          <a:cs typeface="Itau Display"/>
-                        </a:rPr>
-                        <a:t>N/D</a:t>
-                      </a:r>
-                    </a:p>
-                  </a:txBody>
-                  <a:tcPr marL="91440" marR="91440" marT="45720" marB="45720"/>
-                </a:tc>
-                <a:tc>
-                  <a:txBody>
-                    <a:bodyPr/>
-                    <a:lstStyle/>
-                    <a:p>
-                      <a:r>
-                        <a:rPr sz="810" b="0">
-                          <a:solidFill>
-                            <a:srgbClr val="161616"/>
-                          </a:solidFill>
-                          <a:latin typeface="Itau Display"/>
-                          <a:ea typeface="Itau Display"/>
-                          <a:cs typeface="Itau Display"/>
-                        </a:rPr>
-                        <a:t>Processos e notícias em curso foram preservados como pesquisa. Até 20 ago/26, não foi localizada decisão CVM que transforme os achados dos termos ANBIMA de 2024/25 em condenação sancionadora equivalente</a:t>
-                      </a:r>
-                    </a:p>
-                  </a:txBody>
-                  <a:tcPr marL="91440" marR="91440" marT="45720" marB="45720"/>
-                </a:tc>
-                <a:tc>
-                  <a:txBody>
-                    <a:bodyPr/>
-                    <a:lstStyle/>
-                    <a:p>
-                      <a:r>
-                        <a:rPr sz="810" b="0">
-                          <a:solidFill>
-                            <a:srgbClr val="161616"/>
-                          </a:solidFill>
-                          <a:latin typeface="Itau Display"/>
-                          <a:ea typeface="Itau Display"/>
-                          <a:cs typeface="Itau Display"/>
-                        </a:rPr>
-                        <a:t>CVM, ANBIMA e notícias · corte 20 ago/26</a:t>
-                      </a:r>
-                    </a:p>
-                  </a:txBody>
-                  <a:tcPr marL="91440" marR="91440" marT="45720" marB="45720"/>
-                </a:tc>
-              </a:tr>
-            </a:tbl>
-          </a:graphicData>
-        </a:graphic>
-      </p:graphicFrame>
-      <p:sp>
-        <p:nvSpPr>
-          <p:cNvPr id="5" name="">
-            <a:extLst xmlns:a="http://schemas.openxmlformats.org/drawingml/2006/main">
-              <a:ext uri="{FF2B5EF4-FFF2-40B4-BE49-F238E27FC236}">
-                <a16:creationId xmlns:a16="http://schemas.microsoft.com/office/drawing/2014/main" id="{5842CB98-061A-46A6-90DC-16B273A85A23}"/>
-              </a:ext>
-            </a:extLst>
-          </p:cNvPr>
-          <p:cNvSpPr>
-            <a:spLocks xmlns:a="http://schemas.openxmlformats.org/drawingml/2006/main" noGrp="1"/>
-          </p:cNvSpPr>
-          <p:nvPr/>
-        </p:nvSpPr>
-        <p:spPr>
-          <a:xfrm xmlns:a="http://schemas.openxmlformats.org/drawingml/2006/main">
-            <a:off x="552450" y="5638800"/>
-            <a:ext cx="11068050" cy="361950"/>
-          </a:xfrm>
-          <a:prstGeom xmlns:a="http://schemas.openxmlformats.org/drawingml/2006/main" prst="rect">
-            <a:avLst/>
-          </a:prstGeom>
-          <a:noFill xmlns:a="http://schemas.openxmlformats.org/drawingml/2006/main"/>
-          <a:ln xmlns:a="http://schemas.openxmlformats.org/drawingml/2006/main" w="0">
-            <a:noFill/>
-            <a:prstDash val="solid"/>
-          </a:ln>
-        </p:spPr>
-        <p:txBody>
-          <a:bodyPr xmlns:a="http://schemas.openxmlformats.org/drawingml/2006/main" wrap="square" lIns="0" tIns="0" rIns="0" bIns="0" anchor="t">
-            <a:normAutofit fontScale="100000"/>
-          </a:bodyPr>
-          <a:lstStyle xmlns:a="http://schemas.openxmlformats.org/drawingml/2006/main"/>
-          <a:p xmlns:a="http://schemas.openxmlformats.org/drawingml/2006/main">
-            <a:pPr algn="l">
-              <a:lnSpc>
-                <a:spcPct val="105000"/>
-              </a:lnSpc>
-              <a:buNone/>
-              <a:defRPr sz="1050" b="1">
-                <a:solidFill>
-                  <a:srgbClr val="2B2B2B"/>
-                </a:solidFill>
-                <a:latin typeface="Itau Display X-Bold"/>
-                <a:ea typeface="Itau Display X-Bold"/>
-                <a:cs typeface="Itau Display X-Bold"/>
-              </a:defRPr>
-            </a:pPr>
-            <a:r>
-              <a:rPr sz="1050" b="1">
-                <a:solidFill>
-                  <a:srgbClr val="2B2B2B"/>
-                </a:solidFill>
-                <a:latin typeface="Itau Display X-Bold"/>
-                <a:ea typeface="Itau Display X-Bold"/>
-                <a:cs typeface="Itau Display X-Bold"/>
-              </a:rPr>
-              <a:t>Critério de publicação: usar “multa” somente com processo, acusado, conduta, decisão e valor confirmados.</a:t>
-            </a:r>
-          </a:p>
-        </p:txBody>
-      </p:sp>
-      <p:sp>
-        <p:nvSpPr>
-          <p:cNvPr id="6" name="">
-            <a:extLst xmlns:a="http://schemas.openxmlformats.org/drawingml/2006/main">
-              <a:ext uri="{FF2B5EF4-FFF2-40B4-BE49-F238E27FC236}">
-                <a16:creationId xmlns:a16="http://schemas.microsoft.com/office/drawing/2014/main" id="{EF7925E3-252C-4EAA-A88F-2F8A8E75FF16}"/>
-              </a:ext>
-            </a:extLst>
-          </p:cNvPr>
-          <p:cNvSpPr>
-            <a:spLocks xmlns:a="http://schemas.openxmlformats.org/drawingml/2006/main" noGrp="1"/>
-          </p:cNvSpPr>
-          <p:nvPr/>
-        </p:nvSpPr>
-        <p:spPr>
-          <a:xfrm xmlns:a="http://schemas.openxmlformats.org/drawingml/2006/main">
-            <a:off x="552450" y="6457950"/>
-            <a:ext cx="9525000" cy="152400"/>
-          </a:xfrm>
-          <a:prstGeom xmlns:a="http://schemas.openxmlformats.org/drawingml/2006/main" prst="rect">
-            <a:avLst/>
-          </a:prstGeom>
-          <a:noFill xmlns:a="http://schemas.openxmlformats.org/drawingml/2006/main"/>
-          <a:ln xmlns:a="http://schemas.openxmlformats.org/drawingml/2006/main" w="0">
-            <a:noFill/>
-            <a:prstDash val="solid"/>
-          </a:ln>
-        </p:spPr>
-        <p:txBody>
-          <a:bodyPr xmlns:a="http://schemas.openxmlformats.org/drawingml/2006/main" wrap="square" lIns="0" tIns="0" rIns="0" bIns="0" anchor="t">
-            <a:normAutofit fontScale="100000"/>
-          </a:bodyPr>
-          <a:lstStyle xmlns:a="http://schemas.openxmlformats.org/drawingml/2006/main"/>
-          <a:p xmlns:a="http://schemas.openxmlformats.org/drawingml/2006/main">
-            <a:pPr algn="l">
-              <a:lnSpc>
-                <a:spcPct val="105000"/>
-              </a:lnSpc>
-              <a:buNone/>
-              <a:defRPr sz="713" b="0">
-                <a:solidFill>
-                  <a:srgbClr val="858585"/>
-                </a:solidFill>
-                <a:latin typeface="Itau Display"/>
-                <a:ea typeface="Itau Display"/>
-                <a:cs typeface="Itau Display"/>
-              </a:defRPr>
-            </a:pPr>
-            <a:r>
-              <a:rPr sz="713" b="0">
-                <a:solidFill>
-                  <a:srgbClr val="858585"/>
-                </a:solidFill>
-                <a:latin typeface="Itau Display"/>
-                <a:ea typeface="Itau Display"/>
-                <a:cs typeface="Itau Display"/>
-              </a:rPr>
-              <a:t>Data de corte: </a:t>
-            </a:r>
-            <a:r>
-              <a:rPr sz="713" b="0">
-                <a:solidFill>
-                  <a:srgbClr val="858585"/>
-                </a:solidFill>
-                <a:latin typeface="Itau Display"/>
-                <a:ea typeface="Itau Display"/>
-                <a:cs typeface="Itau Display"/>
-              </a:rPr>
-              <a:t>20 ago. 2026</a:t>
-            </a:r>
-            <a:r>
-              <a:rPr sz="713" b="0">
-                <a:solidFill>
-                  <a:srgbClr val="858585"/>
-                </a:solidFill>
-                <a:latin typeface="Itau Display"/>
-                <a:ea typeface="Itau Display"/>
-                <a:cs typeface="Itau Display"/>
-              </a:rPr>
-              <a:t> | valores reportados preservam a competência e a fonte indicada</a:t>
-            </a:r>
-          </a:p>
-        </p:txBody>
-      </p:sp>
-    </p:spTree>
-    <p:extLst>
-      <p:ext uri="{BB962C8B-B14F-4D97-AF65-F5344CB8AC3E}">
-        <p14:creationId xmlns:p14="http://schemas.microsoft.com/office/powerpoint/2010/main" val="305154373"/>
       </p:ext>
     </p:extLst>
   </p:cSld>
@@ -20136,6 +23980,918 @@
       </p:grpSpPr>
       <p:sp>
         <p:nvSpPr>
+          <p:cNvPr id="7" name="">
+            <a:extLst xmlns:a="http://schemas.openxmlformats.org/drawingml/2006/main">
+              <a:ext uri="{FF2B5EF4-FFF2-40B4-BE49-F238E27FC236}">
+                <a16:creationId xmlns:a16="http://schemas.microsoft.com/office/drawing/2014/main" id="{9ACE6745-2987-45C2-B9F4-94995BA0CF1D}"/>
+              </a:ext>
+            </a:extLst>
+          </p:cNvPr>
+          <p:cNvSpPr>
+            <a:spLocks xmlns:a="http://schemas.openxmlformats.org/drawingml/2006/main" noGrp="1"/>
+          </p:cNvSpPr>
+          <p:nvPr/>
+        </p:nvSpPr>
+        <p:spPr>
+          <a:xfrm xmlns:a="http://schemas.openxmlformats.org/drawingml/2006/main">
+            <a:off x="552450" y="285750"/>
+            <a:ext cx="5048250" cy="190500"/>
+          </a:xfrm>
+          <a:prstGeom xmlns:a="http://schemas.openxmlformats.org/drawingml/2006/main" prst="rect">
+            <a:avLst/>
+          </a:prstGeom>
+          <a:noFill xmlns:a="http://schemas.openxmlformats.org/drawingml/2006/main"/>
+          <a:ln xmlns:a="http://schemas.openxmlformats.org/drawingml/2006/main" w="0">
+            <a:noFill/>
+            <a:prstDash val="solid"/>
+          </a:ln>
+        </p:spPr>
+        <p:txBody>
+          <a:bodyPr xmlns:a="http://schemas.openxmlformats.org/drawingml/2006/main" wrap="square" lIns="0" tIns="0" rIns="0" bIns="0" anchor="t">
+            <a:normAutofit fontScale="100000"/>
+          </a:bodyPr>
+          <a:lstStyle xmlns:a="http://schemas.openxmlformats.org/drawingml/2006/main"/>
+          <a:p xmlns:a="http://schemas.openxmlformats.org/drawingml/2006/main">
+            <a:pPr algn="l">
+              <a:lnSpc>
+                <a:spcPct val="105000"/>
+              </a:lnSpc>
+              <a:buNone/>
+              <a:defRPr sz="825" b="1">
+                <a:solidFill>
+                  <a:srgbClr val="B85300"/>
+                </a:solidFill>
+                <a:latin typeface="Itau Display X-Bold"/>
+                <a:ea typeface="Itau Display X-Bold"/>
+                <a:cs typeface="Itau Display X-Bold"/>
+              </a:defRPr>
+            </a:pPr>
+            <a:r>
+              <a:rPr sz="825" b="1">
+                <a:solidFill>
+                  <a:srgbClr val="B85300"/>
+                </a:solidFill>
+                <a:latin typeface="Itau Display X-Bold"/>
+                <a:ea typeface="Itau Display X-Bold"/>
+                <a:cs typeface="Itau Display X-Bold"/>
+              </a:rPr>
+              <a:t>Sanções e fiscalização</a:t>
+            </a:r>
+          </a:p>
+        </p:txBody>
+      </p:sp>
+      <p:sp>
+        <p:nvSpPr>
+          <p:cNvPr id="2" name="">
+            <a:extLst xmlns:a="http://schemas.openxmlformats.org/drawingml/2006/main">
+              <a:ext uri="{FF2B5EF4-FFF2-40B4-BE49-F238E27FC236}">
+                <a16:creationId xmlns:a16="http://schemas.microsoft.com/office/drawing/2014/main" id="{4EFED08C-9435-4DB2-9A68-C9F3902AB70B}"/>
+              </a:ext>
+            </a:extLst>
+          </p:cNvPr>
+          <p:cNvSpPr>
+            <a:spLocks xmlns:a="http://schemas.openxmlformats.org/drawingml/2006/main" noGrp="1"/>
+          </p:cNvSpPr>
+          <p:nvPr/>
+        </p:nvSpPr>
+        <p:spPr>
+          <a:xfrm xmlns:a="http://schemas.openxmlformats.org/drawingml/2006/main">
+            <a:off x="552450" y="514350"/>
+            <a:ext cx="11068050" cy="552450"/>
+          </a:xfrm>
+          <a:prstGeom xmlns:a="http://schemas.openxmlformats.org/drawingml/2006/main" prst="rect">
+            <a:avLst/>
+          </a:prstGeom>
+          <a:noFill xmlns:a="http://schemas.openxmlformats.org/drawingml/2006/main"/>
+          <a:ln xmlns:a="http://schemas.openxmlformats.org/drawingml/2006/main" w="0">
+            <a:noFill/>
+            <a:prstDash val="solid"/>
+          </a:ln>
+        </p:spPr>
+        <p:txBody>
+          <a:bodyPr xmlns:a="http://schemas.openxmlformats.org/drawingml/2006/main" wrap="square" lIns="0" tIns="0" rIns="0" bIns="0" anchor="t">
+            <a:normAutofit fontScale="100000"/>
+          </a:bodyPr>
+          <a:lstStyle xmlns:a="http://schemas.openxmlformats.org/drawingml/2006/main"/>
+          <a:p xmlns:a="http://schemas.openxmlformats.org/drawingml/2006/main">
+            <a:pPr algn="l">
+              <a:lnSpc>
+                <a:spcPct val="98000"/>
+              </a:lnSpc>
+              <a:buNone/>
+              <a:defRPr sz="2250" b="1">
+                <a:solidFill>
+                  <a:srgbClr val="161616"/>
+                </a:solidFill>
+                <a:latin typeface="Itau Display Black"/>
+                <a:ea typeface="Itau Display Black"/>
+                <a:cs typeface="Itau Display Black"/>
+              </a:defRPr>
+            </a:pPr>
+            <a:r>
+              <a:rPr sz="2250" b="1">
+                <a:solidFill>
+                  <a:srgbClr val="161616"/>
+                </a:solidFill>
+                <a:latin typeface="Itau Display Black"/>
+                <a:ea typeface="Itau Display Black"/>
+                <a:cs typeface="Itau Display Black"/>
+              </a:rPr>
+              <a:t>A CVM aplicou multas em falhas de FIDC; termos recentes têm natureza consensual</a:t>
+            </a:r>
+          </a:p>
+        </p:txBody>
+      </p:sp>
+      <p:sp>
+        <p:nvSpPr>
+          <p:cNvPr id="3" name="">
+            <a:extLst xmlns:a="http://schemas.openxmlformats.org/drawingml/2006/main">
+              <a:ext uri="{FF2B5EF4-FFF2-40B4-BE49-F238E27FC236}">
+                <a16:creationId xmlns:a16="http://schemas.microsoft.com/office/drawing/2014/main" id="{9ED82242-5644-4D86-8E75-C70A4F971545}"/>
+              </a:ext>
+            </a:extLst>
+          </p:cNvPr>
+          <p:cNvSpPr>
+            <a:spLocks xmlns:a="http://schemas.openxmlformats.org/drawingml/2006/main" noGrp="1"/>
+          </p:cNvSpPr>
+          <p:nvPr/>
+        </p:nvSpPr>
+        <p:spPr>
+          <a:xfrm xmlns:a="http://schemas.openxmlformats.org/drawingml/2006/main">
+            <a:off x="11182350" y="6486525"/>
+            <a:ext cx="438150" cy="152400"/>
+          </a:xfrm>
+          <a:prstGeom xmlns:a="http://schemas.openxmlformats.org/drawingml/2006/main" prst="rect">
+            <a:avLst/>
+          </a:prstGeom>
+          <a:noFill xmlns:a="http://schemas.openxmlformats.org/drawingml/2006/main"/>
+          <a:ln xmlns:a="http://schemas.openxmlformats.org/drawingml/2006/main" w="0">
+            <a:noFill/>
+            <a:prstDash val="solid"/>
+          </a:ln>
+        </p:spPr>
+        <p:txBody>
+          <a:bodyPr xmlns:a="http://schemas.openxmlformats.org/drawingml/2006/main" wrap="square" lIns="0" tIns="0" rIns="0" bIns="0" anchor="t">
+            <a:normAutofit fontScale="100000"/>
+          </a:bodyPr>
+          <a:lstStyle xmlns:a="http://schemas.openxmlformats.org/drawingml/2006/main"/>
+          <a:p xmlns:a="http://schemas.openxmlformats.org/drawingml/2006/main">
+            <a:pPr algn="r">
+              <a:lnSpc>
+                <a:spcPct val="105000"/>
+              </a:lnSpc>
+              <a:buNone/>
+              <a:defRPr sz="750" b="0">
+                <a:solidFill>
+                  <a:srgbClr val="858585"/>
+                </a:solidFill>
+                <a:latin typeface="Itau Display"/>
+                <a:ea typeface="Itau Display"/>
+                <a:cs typeface="Itau Display"/>
+              </a:defRPr>
+            </a:pPr>
+            <a:r>
+              <a:rPr sz="750" b="0">
+                <a:solidFill>
+                  <a:srgbClr val="858585"/>
+                </a:solidFill>
+                <a:latin typeface="Itau Display"/>
+                <a:ea typeface="Itau Display"/>
+                <a:cs typeface="Itau Display"/>
+              </a:rPr>
+              <a:t>20</a:t>
+            </a:r>
+          </a:p>
+        </p:txBody>
+      </p:sp>
+      <p:graphicFrame>
+        <p:nvGraphicFramePr>
+          <p:cNvPr id="12" name=""/>
+          <p:cNvGraphicFramePr/>
+          <p:nvPr/>
+        </p:nvGraphicFramePr>
+        <p:xfrm>
+          <a:off xmlns:a="http://schemas.openxmlformats.org/drawingml/2006/main" x="552450" y="1428750"/>
+          <a:ext xmlns:a="http://schemas.openxmlformats.org/drawingml/2006/main" cx="11068050" cy="3905250"/>
+        </p:xfrm>
+        <a:graphic xmlns:a="http://schemas.openxmlformats.org/drawingml/2006/main">
+          <a:graphicData uri="http://schemas.openxmlformats.org/drawingml/2006/table">
+            <a:tbl>
+              <a:tblPr/>
+              <a:tblGrid>
+                <a:gridCol w="1809750"/>
+                <a:gridCol w="2286000"/>
+                <a:gridCol w="1190625"/>
+                <a:gridCol w="3667125"/>
+                <a:gridCol w="2114550"/>
+              </a:tblGrid>
+              <a:tr h="381000">
+                <a:tc>
+                  <a:txBody>
+                    <a:bodyPr/>
+                    <a:lstStyle/>
+                    <a:p>
+                      <a:r>
+                        <a:rPr sz="870" b="1">
+                          <a:solidFill>
+                            <a:srgbClr val="161616"/>
+                          </a:solidFill>
+                          <a:latin typeface="Itau Display X-Bold"/>
+                          <a:ea typeface="Itau Display X-Bold"/>
+                          <a:cs typeface="Itau Display X-Bold"/>
+                        </a:rPr>
+                        <a:t>Categoria</a:t>
+                      </a:r>
+                    </a:p>
+                  </a:txBody>
+                  <a:tcPr marL="91440" marR="91440" marT="45720" marB="45720"/>
+                </a:tc>
+                <a:tc>
+                  <a:txBody>
+                    <a:bodyPr/>
+                    <a:lstStyle/>
+                    <a:p>
+                      <a:r>
+                        <a:rPr sz="870" b="1">
+                          <a:solidFill>
+                            <a:srgbClr val="161616"/>
+                          </a:solidFill>
+                          <a:latin typeface="Itau Display X-Bold"/>
+                          <a:ea typeface="Itau Display X-Bold"/>
+                          <a:cs typeface="Itau Display X-Bold"/>
+                        </a:rPr>
+                        <a:t>Caso / instituição</a:t>
+                      </a:r>
+                    </a:p>
+                  </a:txBody>
+                  <a:tcPr marL="91440" marR="91440" marT="45720" marB="45720"/>
+                </a:tc>
+                <a:tc>
+                  <a:txBody>
+                    <a:bodyPr/>
+                    <a:lstStyle/>
+                    <a:p>
+                      <a:r>
+                        <a:rPr sz="870" b="1">
+                          <a:solidFill>
+                            <a:srgbClr val="161616"/>
+                          </a:solidFill>
+                          <a:latin typeface="Itau Display X-Bold"/>
+                          <a:ea typeface="Itau Display X-Bold"/>
+                          <a:cs typeface="Itau Display X-Bold"/>
+                        </a:rPr>
+                        <a:t>Valor</a:t>
+                      </a:r>
+                    </a:p>
+                  </a:txBody>
+                  <a:tcPr marL="91440" marR="91440" marT="45720" marB="45720"/>
+                </a:tc>
+                <a:tc>
+                  <a:txBody>
+                    <a:bodyPr/>
+                    <a:lstStyle/>
+                    <a:p>
+                      <a:r>
+                        <a:rPr sz="870" b="1">
+                          <a:solidFill>
+                            <a:srgbClr val="161616"/>
+                          </a:solidFill>
+                          <a:latin typeface="Itau Display X-Bold"/>
+                          <a:ea typeface="Itau Display X-Bold"/>
+                          <a:cs typeface="Itau Display X-Bold"/>
+                        </a:rPr>
+                        <a:t>Conduta e resultado</a:t>
+                      </a:r>
+                    </a:p>
+                  </a:txBody>
+                  <a:tcPr marL="91440" marR="91440" marT="45720" marB="45720"/>
+                </a:tc>
+                <a:tc>
+                  <a:txBody>
+                    <a:bodyPr/>
+                    <a:lstStyle/>
+                    <a:p>
+                      <a:r>
+                        <a:rPr sz="870" b="1">
+                          <a:solidFill>
+                            <a:srgbClr val="161616"/>
+                          </a:solidFill>
+                          <a:latin typeface="Itau Display X-Bold"/>
+                          <a:ea typeface="Itau Display X-Bold"/>
+                          <a:cs typeface="Itau Display X-Bold"/>
+                        </a:rPr>
+                        <a:t>Coleta / fonte</a:t>
+                      </a:r>
+                    </a:p>
+                  </a:txBody>
+                  <a:tcPr marL="91440" marR="91440" marT="45720" marB="45720"/>
+                </a:tc>
+              </a:tr>
+              <a:tr h="876300">
+                <a:tc>
+                  <a:txBody>
+                    <a:bodyPr>
+                      <a:normAutofit/>
+                    </a:bodyPr>
+                    <a:lstStyle/>
+                    <a:p>
+                      <a:r>
+                        <a:rPr sz="810" b="1">
+                          <a:solidFill>
+                            <a:srgbClr val="161616"/>
+                          </a:solidFill>
+                          <a:latin typeface="Itau Display X-Bold"/>
+                          <a:ea typeface="Itau Display X-Bold"/>
+                          <a:cs typeface="Itau Display X-Bold"/>
+                        </a:rPr>
+                        <a:t>Sanção CVM</a:t>
+                      </a:r>
+                    </a:p>
+                  </a:txBody>
+                  <a:tcPr marL="91440" marR="91440" marT="45720" marB="45720"/>
+                </a:tc>
+                <a:tc>
+                  <a:txBody>
+                    <a:bodyPr/>
+                    <a:lstStyle/>
+                    <a:p>
+                      <a:r>
+                        <a:rPr sz="810" b="0">
+                          <a:solidFill>
+                            <a:srgbClr val="161616"/>
+                          </a:solidFill>
+                          <a:latin typeface="Itau Display"/>
+                          <a:ea typeface="Itau Display"/>
+                          <a:cs typeface="Itau Display"/>
+                        </a:rPr>
+                        <a:t>PAS RJ2013/5456 · Oliveira Trust · FIDC Union e FIDC Agro</a:t>
+                      </a:r>
+                    </a:p>
+                  </a:txBody>
+                  <a:tcPr marL="91440" marR="91440" marT="45720" marB="45720"/>
+                </a:tc>
+                <a:tc>
+                  <a:txBody>
+                    <a:bodyPr>
+                      <a:normAutofit/>
+                    </a:bodyPr>
+                    <a:lstStyle/>
+                    <a:p>
+                      <a:r>
+                        <a:rPr sz="810" b="0">
+                          <a:solidFill>
+                            <a:srgbClr val="161616"/>
+                          </a:solidFill>
+                          <a:latin typeface="Itau Display"/>
+                          <a:ea typeface="Itau Display"/>
+                          <a:cs typeface="Itau Display"/>
+                        </a:rPr>
+                        <a:t>R$ 3,0 mi</a:t>
+                      </a:r>
+                    </a:p>
+                  </a:txBody>
+                  <a:tcPr marL="91440" marR="91440" marT="45720" marB="45720"/>
+                </a:tc>
+                <a:tc>
+                  <a:txBody>
+                    <a:bodyPr/>
+                    <a:lstStyle/>
+                    <a:p>
+                      <a:r>
+                        <a:rPr sz="810" b="0">
+                          <a:solidFill>
+                            <a:srgbClr val="161616"/>
+                          </a:solidFill>
+                          <a:latin typeface="Itau Display"/>
+                          <a:ea typeface="Itau Display"/>
+                          <a:cs typeface="Itau Display"/>
+                        </a:rPr>
+                        <a:t>Três multas de R$1,0 mi por documentação, PDD/classificação de risco e descumprimento de regulamento; diretor proibido por 2 anos e 6 meses</a:t>
+                      </a:r>
+                    </a:p>
+                  </a:txBody>
+                  <a:tcPr marL="91440" marR="91440" marT="45720" marB="45720"/>
+                </a:tc>
+                <a:tc>
+                  <a:txBody>
+                    <a:bodyPr/>
+                    <a:lstStyle/>
+                    <a:p>
+                      <a:r>
+                        <a:rPr sz="810" b="0">
+                          <a:solidFill>
+                            <a:srgbClr val="161616"/>
+                          </a:solidFill>
+                          <a:latin typeface="Itau Display"/>
+                          <a:ea typeface="Itau Display"/>
+                          <a:cs typeface="Itau Display"/>
+                        </a:rPr>
+                        <a:t>Decisão e notícia CVM · julgamento 2015</a:t>
+                      </a:r>
+                    </a:p>
+                  </a:txBody>
+                  <a:tcPr marL="91440" marR="91440" marT="45720" marB="45720"/>
+                </a:tc>
+              </a:tr>
+              <a:tr h="876300">
+                <a:tc>
+                  <a:txBody>
+                    <a:bodyPr>
+                      <a:normAutofit/>
+                    </a:bodyPr>
+                    <a:lstStyle/>
+                    <a:p>
+                      <a:r>
+                        <a:rPr sz="810" b="1">
+                          <a:solidFill>
+                            <a:srgbClr val="161616"/>
+                          </a:solidFill>
+                          <a:latin typeface="Itau Display X-Bold"/>
+                          <a:ea typeface="Itau Display X-Bold"/>
+                          <a:cs typeface="Itau Display X-Bold"/>
+                        </a:rPr>
+                        <a:t>Sanção CVM</a:t>
+                      </a:r>
+                    </a:p>
+                  </a:txBody>
+                  <a:tcPr marL="91440" marR="91440" marT="45720" marB="45720"/>
+                </a:tc>
+                <a:tc>
+                  <a:txBody>
+                    <a:bodyPr/>
+                    <a:lstStyle/>
+                    <a:p>
+                      <a:r>
+                        <a:rPr sz="810" b="0">
+                          <a:solidFill>
+                            <a:srgbClr val="161616"/>
+                          </a:solidFill>
+                          <a:latin typeface="Itau Display"/>
+                          <a:ea typeface="Itau Display"/>
+                          <a:cs typeface="Itau Display"/>
+                        </a:rPr>
+                        <a:t>PAS RJ2013/5456 · Bradesco como custodiante</a:t>
+                      </a:r>
+                    </a:p>
+                  </a:txBody>
+                  <a:tcPr marL="91440" marR="91440" marT="45720" marB="45720"/>
+                </a:tc>
+                <a:tc>
+                  <a:txBody>
+                    <a:bodyPr>
+                      <a:normAutofit/>
+                    </a:bodyPr>
+                    <a:lstStyle/>
+                    <a:p>
+                      <a:r>
+                        <a:rPr sz="810" b="0">
+                          <a:solidFill>
+                            <a:srgbClr val="161616"/>
+                          </a:solidFill>
+                          <a:latin typeface="Itau Display"/>
+                          <a:ea typeface="Itau Display"/>
+                          <a:cs typeface="Itau Display"/>
+                        </a:rPr>
+                        <a:t>R$ 1,5 mi</a:t>
+                      </a:r>
+                    </a:p>
+                  </a:txBody>
+                  <a:tcPr marL="91440" marR="91440" marT="45720" marB="45720"/>
+                </a:tc>
+                <a:tc>
+                  <a:txBody>
+                    <a:bodyPr/>
+                    <a:lstStyle/>
+                    <a:p>
+                      <a:r>
+                        <a:rPr sz="810" b="0">
+                          <a:solidFill>
+                            <a:srgbClr val="161616"/>
+                          </a:solidFill>
+                          <a:latin typeface="Itau Display"/>
+                          <a:ea typeface="Itau Display"/>
+                          <a:cs typeface="Itau Display"/>
+                        </a:rPr>
+                        <a:t>Três multas de R$500 mil por liquidação, guarda de lastro e documentação; houve absolvições em imputações específicas</a:t>
+                      </a:r>
+                    </a:p>
+                  </a:txBody>
+                  <a:tcPr marL="91440" marR="91440" marT="45720" marB="45720"/>
+                </a:tc>
+                <a:tc>
+                  <a:txBody>
+                    <a:bodyPr/>
+                    <a:lstStyle/>
+                    <a:p>
+                      <a:r>
+                        <a:rPr sz="810" b="0">
+                          <a:solidFill>
+                            <a:srgbClr val="161616"/>
+                          </a:solidFill>
+                          <a:latin typeface="Itau Display"/>
+                          <a:ea typeface="Itau Display"/>
+                          <a:cs typeface="Itau Display"/>
+                        </a:rPr>
+                        <a:t>Decisão e notícia CVM · julgamento 2015</a:t>
+                      </a:r>
+                    </a:p>
+                  </a:txBody>
+                  <a:tcPr marL="91440" marR="91440" marT="45720" marB="45720"/>
+                </a:tc>
+              </a:tr>
+              <a:tr h="876300">
+                <a:tc>
+                  <a:txBody>
+                    <a:bodyPr>
+                      <a:normAutofit/>
+                    </a:bodyPr>
+                    <a:lstStyle/>
+                    <a:p>
+                      <a:r>
+                        <a:rPr sz="810" b="1">
+                          <a:solidFill>
+                            <a:srgbClr val="161616"/>
+                          </a:solidFill>
+                          <a:latin typeface="Itau Display X-Bold"/>
+                          <a:ea typeface="Itau Display X-Bold"/>
+                          <a:cs typeface="Itau Display X-Bold"/>
+                        </a:rPr>
+                        <a:t>Termo de Compromisso</a:t>
+                      </a:r>
+                    </a:p>
+                  </a:txBody>
+                  <a:tcPr marL="91440" marR="91440" marT="45720" marB="45720"/>
+                </a:tc>
+                <a:tc>
+                  <a:txBody>
+                    <a:bodyPr/>
+                    <a:lstStyle/>
+                    <a:p>
+                      <a:r>
+                        <a:rPr sz="810" b="0">
+                          <a:solidFill>
+                            <a:srgbClr val="161616"/>
+                          </a:solidFill>
+                          <a:latin typeface="Itau Display"/>
+                          <a:ea typeface="Itau Display"/>
+                          <a:cs typeface="Itau Display"/>
+                        </a:rPr>
+                        <a:t>BEM DTVM e diretor · 2025</a:t>
+                      </a:r>
+                    </a:p>
+                  </a:txBody>
+                  <a:tcPr marL="91440" marR="91440" marT="45720" marB="45720"/>
+                </a:tc>
+                <a:tc>
+                  <a:txBody>
+                    <a:bodyPr>
+                      <a:normAutofit/>
+                    </a:bodyPr>
+                    <a:lstStyle/>
+                    <a:p>
+                      <a:r>
+                        <a:rPr sz="810" b="0">
+                          <a:solidFill>
+                            <a:srgbClr val="161616"/>
+                          </a:solidFill>
+                          <a:latin typeface="Itau Display"/>
+                          <a:ea typeface="Itau Display"/>
+                          <a:cs typeface="Itau Display"/>
+                        </a:rPr>
+                        <a:t>R$ 1,0 mi</a:t>
+                      </a:r>
+                    </a:p>
+                  </a:txBody>
+                  <a:tcPr marL="91440" marR="91440" marT="45720" marB="45720"/>
+                </a:tc>
+                <a:tc>
+                  <a:txBody>
+                    <a:bodyPr/>
+                    <a:lstStyle/>
+                    <a:p>
+                      <a:r>
+                        <a:rPr sz="810" b="0">
+                          <a:solidFill>
+                            <a:srgbClr val="161616"/>
+                          </a:solidFill>
+                          <a:latin typeface="Itau Display"/>
+                          <a:ea typeface="Itau Display"/>
+                          <a:cs typeface="Itau Display"/>
+                        </a:rPr>
+                        <a:t>BEM R$750 mil e diretor R$250 mil em compromisso sobre controles de liquidez e diligência de fundo multimercado; tema fora do núcleo FIDC/PDD</a:t>
+                      </a:r>
+                    </a:p>
+                  </a:txBody>
+                  <a:tcPr marL="91440" marR="91440" marT="45720" marB="45720"/>
+                </a:tc>
+                <a:tc>
+                  <a:txBody>
+                    <a:bodyPr/>
+                    <a:lstStyle/>
+                    <a:p>
+                      <a:r>
+                        <a:rPr sz="810" b="0">
+                          <a:solidFill>
+                            <a:srgbClr val="161616"/>
+                          </a:solidFill>
+                          <a:latin typeface="Itau Display"/>
+                          <a:ea typeface="Itau Display"/>
+                          <a:cs typeface="Itau Display"/>
+                        </a:rPr>
+                        <a:t>Notícia e termo CVM · 2025</a:t>
+                      </a:r>
+                    </a:p>
+                  </a:txBody>
+                  <a:tcPr marL="91440" marR="91440" marT="45720" marB="45720"/>
+                </a:tc>
+              </a:tr>
+              <a:tr h="876300">
+                <a:tc>
+                  <a:txBody>
+                    <a:bodyPr>
+                      <a:normAutofit/>
+                    </a:bodyPr>
+                    <a:lstStyle/>
+                    <a:p>
+                      <a:r>
+                        <a:rPr sz="810" b="1">
+                          <a:solidFill>
+                            <a:srgbClr val="161616"/>
+                          </a:solidFill>
+                          <a:latin typeface="Itau Display X-Bold"/>
+                          <a:ea typeface="Itau Display X-Bold"/>
+                          <a:cs typeface="Itau Display X-Bold"/>
+                        </a:rPr>
+                        <a:t>Pesquisa sem sanção confirmada</a:t>
+                      </a:r>
+                    </a:p>
+                  </a:txBody>
+                  <a:tcPr marL="91440" marR="91440" marT="45720" marB="45720"/>
+                </a:tc>
+                <a:tc>
+                  <a:txBody>
+                    <a:bodyPr/>
+                    <a:lstStyle/>
+                    <a:p>
+                      <a:r>
+                        <a:rPr sz="810" b="0">
+                          <a:solidFill>
+                            <a:srgbClr val="161616"/>
+                          </a:solidFill>
+                          <a:latin typeface="Itau Display"/>
+                          <a:ea typeface="Itau Display"/>
+                          <a:cs typeface="Itau Display"/>
+                        </a:rPr>
+                        <a:t>REAG e demais nomes</a:t>
+                      </a:r>
+                    </a:p>
+                  </a:txBody>
+                  <a:tcPr marL="91440" marR="91440" marT="45720" marB="45720"/>
+                </a:tc>
+                <a:tc>
+                  <a:txBody>
+                    <a:bodyPr>
+                      <a:normAutofit/>
+                    </a:bodyPr>
+                    <a:lstStyle/>
+                    <a:p>
+                      <a:r>
+                        <a:rPr sz="810" b="0">
+                          <a:solidFill>
+                            <a:srgbClr val="161616"/>
+                          </a:solidFill>
+                          <a:latin typeface="Itau Display"/>
+                          <a:ea typeface="Itau Display"/>
+                          <a:cs typeface="Itau Display"/>
+                        </a:rPr>
+                        <a:t>N/D</a:t>
+                      </a:r>
+                    </a:p>
+                  </a:txBody>
+                  <a:tcPr marL="91440" marR="91440" marT="45720" marB="45720"/>
+                </a:tc>
+                <a:tc>
+                  <a:txBody>
+                    <a:bodyPr/>
+                    <a:lstStyle/>
+                    <a:p>
+                      <a:r>
+                        <a:rPr sz="810" b="0">
+                          <a:solidFill>
+                            <a:srgbClr val="161616"/>
+                          </a:solidFill>
+                          <a:latin typeface="Itau Display"/>
+                          <a:ea typeface="Itau Display"/>
+                          <a:cs typeface="Itau Display"/>
+                        </a:rPr>
+                        <a:t>Processos e notícias em curso foram preservados como pesquisa. Até 20 ago/26, não foi localizada decisão CVM que transforme os achados dos termos ANBIMA de 2024/25 em condenação sancionadora equivalente</a:t>
+                      </a:r>
+                    </a:p>
+                  </a:txBody>
+                  <a:tcPr marL="91440" marR="91440" marT="45720" marB="45720"/>
+                </a:tc>
+                <a:tc>
+                  <a:txBody>
+                    <a:bodyPr/>
+                    <a:lstStyle/>
+                    <a:p>
+                      <a:r>
+                        <a:rPr sz="810" b="0">
+                          <a:solidFill>
+                            <a:srgbClr val="161616"/>
+                          </a:solidFill>
+                          <a:latin typeface="Itau Display"/>
+                          <a:ea typeface="Itau Display"/>
+                          <a:cs typeface="Itau Display"/>
+                        </a:rPr>
+                        <a:t>CVM, ANBIMA e notícias · corte 20 ago/26</a:t>
+                      </a:r>
+                    </a:p>
+                  </a:txBody>
+                  <a:tcPr marL="91440" marR="91440" marT="45720" marB="45720"/>
+                </a:tc>
+              </a:tr>
+            </a:tbl>
+          </a:graphicData>
+        </a:graphic>
+      </p:graphicFrame>
+      <p:sp>
+        <p:nvSpPr>
+          <p:cNvPr id="5" name="">
+            <a:extLst xmlns:a="http://schemas.openxmlformats.org/drawingml/2006/main">
+              <a:ext uri="{FF2B5EF4-FFF2-40B4-BE49-F238E27FC236}">
+                <a16:creationId xmlns:a16="http://schemas.microsoft.com/office/drawing/2014/main" id="{5842CB98-061A-46A6-90DC-16B273A85A23}"/>
+              </a:ext>
+            </a:extLst>
+          </p:cNvPr>
+          <p:cNvSpPr>
+            <a:spLocks xmlns:a="http://schemas.openxmlformats.org/drawingml/2006/main" noGrp="1"/>
+          </p:cNvSpPr>
+          <p:nvPr/>
+        </p:nvSpPr>
+        <p:spPr>
+          <a:xfrm xmlns:a="http://schemas.openxmlformats.org/drawingml/2006/main">
+            <a:off x="552450" y="5638800"/>
+            <a:ext cx="11068050" cy="361950"/>
+          </a:xfrm>
+          <a:prstGeom xmlns:a="http://schemas.openxmlformats.org/drawingml/2006/main" prst="rect">
+            <a:avLst/>
+          </a:prstGeom>
+          <a:noFill xmlns:a="http://schemas.openxmlformats.org/drawingml/2006/main"/>
+          <a:ln xmlns:a="http://schemas.openxmlformats.org/drawingml/2006/main" w="0">
+            <a:noFill/>
+            <a:prstDash val="solid"/>
+          </a:ln>
+        </p:spPr>
+        <p:txBody>
+          <a:bodyPr xmlns:a="http://schemas.openxmlformats.org/drawingml/2006/main" wrap="square" lIns="0" tIns="0" rIns="0" bIns="0" anchor="t">
+            <a:normAutofit fontScale="100000"/>
+          </a:bodyPr>
+          <a:lstStyle xmlns:a="http://schemas.openxmlformats.org/drawingml/2006/main"/>
+          <a:p xmlns:a="http://schemas.openxmlformats.org/drawingml/2006/main">
+            <a:pPr algn="l">
+              <a:lnSpc>
+                <a:spcPct val="105000"/>
+              </a:lnSpc>
+              <a:buNone/>
+              <a:defRPr sz="1050" b="1">
+                <a:solidFill>
+                  <a:srgbClr val="2B2B2B"/>
+                </a:solidFill>
+                <a:latin typeface="Itau Display X-Bold"/>
+                <a:ea typeface="Itau Display X-Bold"/>
+                <a:cs typeface="Itau Display X-Bold"/>
+              </a:defRPr>
+            </a:pPr>
+            <a:r>
+              <a:rPr sz="1050" b="1">
+                <a:solidFill>
+                  <a:srgbClr val="2B2B2B"/>
+                </a:solidFill>
+                <a:latin typeface="Itau Display X-Bold"/>
+                <a:ea typeface="Itau Display X-Bold"/>
+                <a:cs typeface="Itau Display X-Bold"/>
+              </a:rPr>
+              <a:t>Critério de publicação: usar “multa” somente com processo, acusado, conduta, decisão e valor confirmados.</a:t>
+            </a:r>
+          </a:p>
+        </p:txBody>
+      </p:sp>
+      <p:sp>
+        <p:nvSpPr>
+          <p:cNvPr id="6" name="">
+            <a:extLst xmlns:a="http://schemas.openxmlformats.org/drawingml/2006/main">
+              <a:ext uri="{FF2B5EF4-FFF2-40B4-BE49-F238E27FC236}">
+                <a16:creationId xmlns:a16="http://schemas.microsoft.com/office/drawing/2014/main" id="{EF7925E3-252C-4EAA-A88F-2F8A8E75FF16}"/>
+              </a:ext>
+            </a:extLst>
+          </p:cNvPr>
+          <p:cNvSpPr>
+            <a:spLocks xmlns:a="http://schemas.openxmlformats.org/drawingml/2006/main" noGrp="1"/>
+          </p:cNvSpPr>
+          <p:nvPr/>
+        </p:nvSpPr>
+        <p:spPr>
+          <a:xfrm xmlns:a="http://schemas.openxmlformats.org/drawingml/2006/main">
+            <a:off x="552450" y="6457950"/>
+            <a:ext cx="9525000" cy="152400"/>
+          </a:xfrm>
+          <a:prstGeom xmlns:a="http://schemas.openxmlformats.org/drawingml/2006/main" prst="rect">
+            <a:avLst/>
+          </a:prstGeom>
+          <a:noFill xmlns:a="http://schemas.openxmlformats.org/drawingml/2006/main"/>
+          <a:ln xmlns:a="http://schemas.openxmlformats.org/drawingml/2006/main" w="0">
+            <a:noFill/>
+            <a:prstDash val="solid"/>
+          </a:ln>
+        </p:spPr>
+        <p:txBody>
+          <a:bodyPr xmlns:a="http://schemas.openxmlformats.org/drawingml/2006/main" wrap="square" lIns="0" tIns="0" rIns="0" bIns="0" anchor="t">
+            <a:normAutofit fontScale="100000"/>
+          </a:bodyPr>
+          <a:lstStyle xmlns:a="http://schemas.openxmlformats.org/drawingml/2006/main"/>
+          <a:p xmlns:a="http://schemas.openxmlformats.org/drawingml/2006/main">
+            <a:pPr algn="l">
+              <a:lnSpc>
+                <a:spcPct val="105000"/>
+              </a:lnSpc>
+              <a:buNone/>
+              <a:defRPr sz="713" b="0">
+                <a:solidFill>
+                  <a:srgbClr val="858585"/>
+                </a:solidFill>
+                <a:latin typeface="Itau Display"/>
+                <a:ea typeface="Itau Display"/>
+                <a:cs typeface="Itau Display"/>
+              </a:defRPr>
+            </a:pPr>
+            <a:r>
+              <a:rPr sz="713" b="0">
+                <a:solidFill>
+                  <a:srgbClr val="858585"/>
+                </a:solidFill>
+                <a:latin typeface="Itau Display"/>
+                <a:ea typeface="Itau Display"/>
+                <a:cs typeface="Itau Display"/>
+              </a:rPr>
+              <a:t>Data de corte: </a:t>
+            </a:r>
+            <a:r>
+              <a:rPr sz="713" b="0">
+                <a:solidFill>
+                  <a:srgbClr val="858585"/>
+                </a:solidFill>
+                <a:latin typeface="Itau Display"/>
+                <a:ea typeface="Itau Display"/>
+                <a:cs typeface="Itau Display"/>
+              </a:rPr>
+              <a:t>20 ago. 2026</a:t>
+            </a:r>
+            <a:r>
+              <a:rPr sz="713" b="0">
+                <a:solidFill>
+                  <a:srgbClr val="858585"/>
+                </a:solidFill>
+                <a:latin typeface="Itau Display"/>
+                <a:ea typeface="Itau Display"/>
+                <a:cs typeface="Itau Display"/>
+              </a:rPr>
+              <a:t> | valores reportados preservam a competência e a fonte indicada</a:t>
+            </a:r>
+          </a:p>
+        </p:txBody>
+      </p:sp>
+    </p:spTree>
+    <p:extLst>
+      <p:ext uri="{BB962C8B-B14F-4D97-AF65-F5344CB8AC3E}">
+        <p14:creationId xmlns:p14="http://schemas.microsoft.com/office/powerpoint/2010/main" val="305154373"/>
+      </p:ext>
+    </p:extLst>
+  </p:cSld>
+</p:sld>
+</file>
+
+<file path=ppt/slides/slide21.xml><?xml version="1.0" encoding="utf-8"?>
+<p:sld xmlns:p="http://schemas.openxmlformats.org/presentationml/2006/main">
+  <p:cSld>
+    <p:bg>
+      <p:bgPr>
+        <a:solidFill xmlns:a="http://schemas.openxmlformats.org/drawingml/2006/main">
+          <a:srgbClr val="FFFFFF"/>
+        </a:solidFill>
+      </p:bgPr>
+    </p:bg>
+    <p:spTree>
+      <p:nvGrpSpPr>
+        <p:cNvPr id="1" name=""/>
+        <p:cNvGrpSpPr/>
+        <p:nvPr/>
+      </p:nvGrpSpPr>
+      <p:grpSpPr>
+        <a:xfrm xmlns:a="http://schemas.openxmlformats.org/drawingml/2006/main"/>
+      </p:grpSpPr>
+      <p:sp>
+        <p:nvSpPr>
           <p:cNvPr id="8" name="">
             <a:extLst xmlns:a="http://schemas.openxmlformats.org/drawingml/2006/main">
               <a:ext uri="{FF2B5EF4-FFF2-40B4-BE49-F238E27FC236}">
@@ -20315,7 +25071,7 @@
                 <a:ea typeface="Itau Display"/>
                 <a:cs typeface="Itau Display"/>
               </a:rPr>
-              <a:t>20</a:t>
+              <a:t>21</a:t>
             </a:r>
           </a:p>
         </p:txBody>
@@ -21081,7 +25837,7 @@
 </p:sld>
 </file>
 
-<file path=ppt/slides/slide21.xml><?xml version="1.0" encoding="utf-8"?>
+<file path=ppt/slides/slide22.xml><?xml version="1.0" encoding="utf-8"?>
 <p:sld xmlns:p="http://schemas.openxmlformats.org/presentationml/2006/main">
   <p:cSld>
     <p:bg>
@@ -21281,7 +26037,7 @@
                 <a:ea typeface="Itau Display"/>
                 <a:cs typeface="Itau Display"/>
               </a:rPr>
-              <a:t>21</a:t>
+              <a:t>22</a:t>
             </a:r>
           </a:p>
         </p:txBody>
@@ -22089,7 +26845,7 @@
 </p:sld>
 </file>
 
-<file path=ppt/slides/slide22.xml><?xml version="1.0" encoding="utf-8"?>
+<file path=ppt/slides/slide23.xml><?xml version="1.0" encoding="utf-8"?>
 <p:sld xmlns:p="http://schemas.openxmlformats.org/presentationml/2006/main">
   <p:cSld>
     <p:bg>
@@ -22289,7 +27045,7 @@
                 <a:ea typeface="Itau Display"/>
                 <a:cs typeface="Itau Display"/>
               </a:rPr>
-              <a:t>22</a:t>
+              <a:t>23</a:t>
             </a:r>
           </a:p>
         </p:txBody>
@@ -31750,7 +36506,7 @@
       </p:sp>
       <p:graphicFrame>
         <p:nvGraphicFramePr>
-          <p:cNvPr id="35" name=""/>
+          <p:cNvPr id="38" name=""/>
           <p:cNvGraphicFramePr/>
           <p:nvPr/>
         </p:nvGraphicFramePr>
@@ -31774,7 +36530,9 @@
                     </a:bodyPr>
                     <a:lstStyle/>
                     <a:p>
-                      <a:pPr algn="l"/>
+                      <a:pPr algn="l">
+                        <a:buNone/>
+                      </a:pPr>
                       <a:r>
                         <a:rPr sz="735" b="1">
                           <a:solidFill>
@@ -31801,7 +36559,9 @@
                     </a:bodyPr>
                     <a:lstStyle/>
                     <a:p>
-                      <a:pPr algn="l"/>
+                      <a:pPr algn="l">
+                        <a:buNone/>
+                      </a:pPr>
                       <a:r>
                         <a:rPr sz="735" b="1">
                           <a:solidFill>
@@ -31830,7 +36590,9 @@
                     </a:bodyPr>
                     <a:lstStyle/>
                     <a:p>
-                      <a:pPr algn="l"/>
+                      <a:pPr algn="l">
+                        <a:buNone/>
+                      </a:pPr>
                       <a:r>
                         <a:rPr sz="682">
                           <a:solidFill>
@@ -31857,7 +36619,9 @@
                     </a:bodyPr>
                     <a:lstStyle/>
                     <a:p>
-                      <a:pPr algn="l"/>
+                      <a:pPr algn="l">
+                        <a:buNone/>
+                      </a:pPr>
                       <a:r>
                         <a:rPr sz="682">
                           <a:solidFill>
@@ -31886,7 +36650,9 @@
                     </a:bodyPr>
                     <a:lstStyle/>
                     <a:p>
-                      <a:pPr algn="l"/>
+                      <a:pPr algn="l">
+                        <a:buNone/>
+                      </a:pPr>
                       <a:r>
                         <a:rPr sz="682">
                           <a:solidFill>
@@ -31913,7 +36679,9 @@
                     </a:bodyPr>
                     <a:lstStyle/>
                     <a:p>
-                      <a:pPr algn="l"/>
+                      <a:pPr algn="l">
+                        <a:buNone/>
+                      </a:pPr>
                       <a:r>
                         <a:rPr sz="682">
                           <a:solidFill>
@@ -31942,7 +36710,9 @@
                     </a:bodyPr>
                     <a:lstStyle/>
                     <a:p>
-                      <a:pPr algn="l"/>
+                      <a:pPr algn="l">
+                        <a:buNone/>
+                      </a:pPr>
                       <a:r>
                         <a:rPr sz="682">
                           <a:solidFill>
@@ -31969,7 +36739,9 @@
                     </a:bodyPr>
                     <a:lstStyle/>
                     <a:p>
-                      <a:pPr algn="l"/>
+                      <a:pPr algn="l">
+                        <a:buNone/>
+                      </a:pPr>
                       <a:r>
                         <a:rPr sz="682">
                           <a:solidFill>
@@ -31998,7 +36770,9 @@
                     </a:bodyPr>
                     <a:lstStyle/>
                     <a:p>
-                      <a:pPr algn="l"/>
+                      <a:pPr algn="l">
+                        <a:buNone/>
+                      </a:pPr>
                       <a:r>
                         <a:rPr sz="682">
                           <a:solidFill>
@@ -32025,7 +36799,9 @@
                     </a:bodyPr>
                     <a:lstStyle/>
                     <a:p>
-                      <a:pPr algn="l"/>
+                      <a:pPr algn="l">
+                        <a:buNone/>
+                      </a:pPr>
                       <a:r>
                         <a:rPr sz="682">
                           <a:solidFill>
@@ -32054,7 +36830,9 @@
                     </a:bodyPr>
                     <a:lstStyle/>
                     <a:p>
-                      <a:pPr algn="l"/>
+                      <a:pPr algn="l">
+                        <a:buNone/>
+                      </a:pPr>
                       <a:r>
                         <a:rPr sz="682">
                           <a:solidFill>
@@ -32081,7 +36859,9 @@
                     </a:bodyPr>
                     <a:lstStyle/>
                     <a:p>
-                      <a:pPr algn="l"/>
+                      <a:pPr algn="l">
+                        <a:buNone/>
+                      </a:pPr>
                       <a:r>
                         <a:rPr sz="682">
                           <a:solidFill>
@@ -32170,7 +36950,7 @@
       </p:sp>
       <p:graphicFrame>
         <p:nvGraphicFramePr>
-          <p:cNvPr id="37" name=""/>
+          <p:cNvPr id="40" name=""/>
           <p:cNvGraphicFramePr/>
           <p:nvPr/>
         </p:nvGraphicFramePr>
@@ -32196,7 +36976,9 @@
                     </a:bodyPr>
                     <a:lstStyle/>
                     <a:p>
-                      <a:pPr algn="ctr"/>
+                      <a:pPr algn="ctr">
+                        <a:buNone/>
+                      </a:pPr>
                       <a:r>
                         <a:rPr sz="713" b="1">
                           <a:solidFill>
@@ -32223,7 +37005,9 @@
                     </a:bodyPr>
                     <a:lstStyle/>
                     <a:p>
-                      <a:pPr algn="r"/>
+                      <a:pPr algn="r">
+                        <a:buNone/>
+                      </a:pPr>
                       <a:r>
                         <a:rPr sz="713" b="1">
                           <a:solidFill>
@@ -32250,7 +37034,9 @@
                     </a:bodyPr>
                     <a:lstStyle/>
                     <a:p>
-                      <a:pPr algn="r"/>
+                      <a:pPr algn="r">
+                        <a:buNone/>
+                      </a:pPr>
                       <a:r>
                         <a:rPr sz="713" b="1">
                           <a:solidFill>
@@ -32277,7 +37063,9 @@
                     </a:bodyPr>
                     <a:lstStyle/>
                     <a:p>
-                      <a:pPr algn="r"/>
+                      <a:pPr algn="r">
+                        <a:buNone/>
+                      </a:pPr>
                       <a:r>
                         <a:rPr sz="713" b="1">
                           <a:solidFill>
@@ -32306,7 +37094,9 @@
                     </a:bodyPr>
                     <a:lstStyle/>
                     <a:p>
-                      <a:pPr algn="ctr"/>
+                      <a:pPr algn="ctr">
+                        <a:buNone/>
+                      </a:pPr>
                       <a:r>
                         <a:rPr sz="690">
                           <a:solidFill>
@@ -32333,7 +37123,9 @@
                     </a:bodyPr>
                     <a:lstStyle/>
                     <a:p>
-                      <a:pPr algn="r"/>
+                      <a:pPr algn="r">
+                        <a:buNone/>
+                      </a:pPr>
                       <a:r>
                         <a:rPr sz="690">
                           <a:solidFill>
@@ -32360,7 +37152,9 @@
                     </a:bodyPr>
                     <a:lstStyle/>
                     <a:p>
-                      <a:pPr algn="r"/>
+                      <a:pPr algn="r">
+                        <a:buNone/>
+                      </a:pPr>
                       <a:r>
                         <a:rPr sz="690">
                           <a:solidFill>
@@ -32387,7 +37181,9 @@
                     </a:bodyPr>
                     <a:lstStyle/>
                     <a:p>
-                      <a:pPr algn="r"/>
+                      <a:pPr algn="r">
+                        <a:buNone/>
+                      </a:pPr>
                       <a:r>
                         <a:rPr sz="690">
                           <a:solidFill>
@@ -32416,7 +37212,9 @@
                     </a:bodyPr>
                     <a:lstStyle/>
                     <a:p>
-                      <a:pPr algn="ctr"/>
+                      <a:pPr algn="ctr">
+                        <a:buNone/>
+                      </a:pPr>
                       <a:r>
                         <a:rPr sz="690">
                           <a:solidFill>
@@ -32443,7 +37241,9 @@
                     </a:bodyPr>
                     <a:lstStyle/>
                     <a:p>
-                      <a:pPr algn="r"/>
+                      <a:pPr algn="r">
+                        <a:buNone/>
+                      </a:pPr>
                       <a:r>
                         <a:rPr sz="690">
                           <a:solidFill>
@@ -32470,7 +37270,9 @@
                     </a:bodyPr>
                     <a:lstStyle/>
                     <a:p>
-                      <a:pPr algn="r"/>
+                      <a:pPr algn="r">
+                        <a:buNone/>
+                      </a:pPr>
                       <a:r>
                         <a:rPr sz="690">
                           <a:solidFill>
@@ -32497,7 +37299,9 @@
                     </a:bodyPr>
                     <a:lstStyle/>
                     <a:p>
-                      <a:pPr algn="r"/>
+                      <a:pPr algn="r">
+                        <a:buNone/>
+                      </a:pPr>
                       <a:r>
                         <a:rPr sz="690">
                           <a:solidFill>
@@ -32526,7 +37330,9 @@
                     </a:bodyPr>
                     <a:lstStyle/>
                     <a:p>
-                      <a:pPr algn="ctr"/>
+                      <a:pPr algn="ctr">
+                        <a:buNone/>
+                      </a:pPr>
                       <a:r>
                         <a:rPr sz="690">
                           <a:solidFill>
@@ -32553,7 +37359,9 @@
                     </a:bodyPr>
                     <a:lstStyle/>
                     <a:p>
-                      <a:pPr algn="r"/>
+                      <a:pPr algn="r">
+                        <a:buNone/>
+                      </a:pPr>
                       <a:r>
                         <a:rPr sz="690">
                           <a:solidFill>
@@ -32580,7 +37388,9 @@
                     </a:bodyPr>
                     <a:lstStyle/>
                     <a:p>
-                      <a:pPr algn="r"/>
+                      <a:pPr algn="r">
+                        <a:buNone/>
+                      </a:pPr>
                       <a:r>
                         <a:rPr sz="690">
                           <a:solidFill>
@@ -32607,7 +37417,9 @@
                     </a:bodyPr>
                     <a:lstStyle/>
                     <a:p>
-                      <a:pPr algn="r"/>
+                      <a:pPr algn="r">
+                        <a:buNone/>
+                      </a:pPr>
                       <a:r>
                         <a:rPr sz="690">
                           <a:solidFill>
@@ -32636,7 +37448,9 @@
                     </a:bodyPr>
                     <a:lstStyle/>
                     <a:p>
-                      <a:pPr algn="ctr"/>
+                      <a:pPr algn="ctr">
+                        <a:buNone/>
+                      </a:pPr>
                       <a:r>
                         <a:rPr sz="690">
                           <a:solidFill>
@@ -32663,7 +37477,9 @@
                     </a:bodyPr>
                     <a:lstStyle/>
                     <a:p>
-                      <a:pPr algn="r"/>
+                      <a:pPr algn="r">
+                        <a:buNone/>
+                      </a:pPr>
                       <a:r>
                         <a:rPr sz="690">
                           <a:solidFill>
@@ -32690,7 +37506,9 @@
                     </a:bodyPr>
                     <a:lstStyle/>
                     <a:p>
-                      <a:pPr algn="r"/>
+                      <a:pPr algn="r">
+                        <a:buNone/>
+                      </a:pPr>
                       <a:r>
                         <a:rPr sz="690">
                           <a:solidFill>
@@ -32717,7 +37535,9 @@
                     </a:bodyPr>
                     <a:lstStyle/>
                     <a:p>
-                      <a:pPr algn="r"/>
+                      <a:pPr algn="r">
+                        <a:buNone/>
+                      </a:pPr>
                       <a:r>
                         <a:rPr sz="690">
                           <a:solidFill>
@@ -32746,7 +37566,9 @@
                     </a:bodyPr>
                     <a:lstStyle/>
                     <a:p>
-                      <a:pPr algn="ctr"/>
+                      <a:pPr algn="ctr">
+                        <a:buNone/>
+                      </a:pPr>
                       <a:r>
                         <a:rPr sz="690">
                           <a:solidFill>
@@ -32773,7 +37595,9 @@
                     </a:bodyPr>
                     <a:lstStyle/>
                     <a:p>
-                      <a:pPr algn="r"/>
+                      <a:pPr algn="r">
+                        <a:buNone/>
+                      </a:pPr>
                       <a:r>
                         <a:rPr sz="690">
                           <a:solidFill>
@@ -32800,7 +37624,9 @@
                     </a:bodyPr>
                     <a:lstStyle/>
                     <a:p>
-                      <a:pPr algn="r"/>
+                      <a:pPr algn="r">
+                        <a:buNone/>
+                      </a:pPr>
                       <a:r>
                         <a:rPr sz="690">
                           <a:solidFill>
@@ -32827,7 +37653,9 @@
                     </a:bodyPr>
                     <a:lstStyle/>
                     <a:p>
-                      <a:pPr algn="r"/>
+                      <a:pPr algn="r">
+                        <a:buNone/>
+                      </a:pPr>
                       <a:r>
                         <a:rPr sz="690">
                           <a:solidFill>
@@ -34381,7 +39209,7 @@
       </p:sp>
       <p:graphicFrame>
         <p:nvGraphicFramePr>
-          <p:cNvPr id="35" name=""/>
+          <p:cNvPr id="38" name=""/>
           <p:cNvGraphicFramePr/>
           <p:nvPr/>
         </p:nvGraphicFramePr>
@@ -34405,7 +39233,9 @@
                     </a:bodyPr>
                     <a:lstStyle/>
                     <a:p>
-                      <a:pPr algn="l"/>
+                      <a:pPr algn="l">
+                        <a:buNone/>
+                      </a:pPr>
                       <a:r>
                         <a:rPr sz="735" b="1">
                           <a:solidFill>
@@ -34432,7 +39262,9 @@
                     </a:bodyPr>
                     <a:lstStyle/>
                     <a:p>
-                      <a:pPr algn="l"/>
+                      <a:pPr algn="l">
+                        <a:buNone/>
+                      </a:pPr>
                       <a:r>
                         <a:rPr sz="735" b="1">
                           <a:solidFill>
@@ -34461,7 +39293,9 @@
                     </a:bodyPr>
                     <a:lstStyle/>
                     <a:p>
-                      <a:pPr algn="l"/>
+                      <a:pPr algn="l">
+                        <a:buNone/>
+                      </a:pPr>
                       <a:r>
                         <a:rPr sz="682">
                           <a:solidFill>
@@ -34488,7 +39322,9 @@
                     </a:bodyPr>
                     <a:lstStyle/>
                     <a:p>
-                      <a:pPr algn="l"/>
+                      <a:pPr algn="l">
+                        <a:buNone/>
+                      </a:pPr>
                       <a:r>
                         <a:rPr sz="682">
                           <a:solidFill>
@@ -34517,7 +39353,9 @@
                     </a:bodyPr>
                     <a:lstStyle/>
                     <a:p>
-                      <a:pPr algn="l"/>
+                      <a:pPr algn="l">
+                        <a:buNone/>
+                      </a:pPr>
                       <a:r>
                         <a:rPr sz="682">
                           <a:solidFill>
@@ -34544,7 +39382,9 @@
                     </a:bodyPr>
                     <a:lstStyle/>
                     <a:p>
-                      <a:pPr algn="l"/>
+                      <a:pPr algn="l">
+                        <a:buNone/>
+                      </a:pPr>
                       <a:r>
                         <a:rPr sz="682">
                           <a:solidFill>
@@ -34573,7 +39413,9 @@
                     </a:bodyPr>
                     <a:lstStyle/>
                     <a:p>
-                      <a:pPr algn="l"/>
+                      <a:pPr algn="l">
+                        <a:buNone/>
+                      </a:pPr>
                       <a:r>
                         <a:rPr sz="682">
                           <a:solidFill>
@@ -34600,7 +39442,9 @@
                     </a:bodyPr>
                     <a:lstStyle/>
                     <a:p>
-                      <a:pPr algn="l"/>
+                      <a:pPr algn="l">
+                        <a:buNone/>
+                      </a:pPr>
                       <a:r>
                         <a:rPr sz="682">
                           <a:solidFill>
@@ -34629,7 +39473,9 @@
                     </a:bodyPr>
                     <a:lstStyle/>
                     <a:p>
-                      <a:pPr algn="l"/>
+                      <a:pPr algn="l">
+                        <a:buNone/>
+                      </a:pPr>
                       <a:r>
                         <a:rPr sz="682">
                           <a:solidFill>
@@ -34656,7 +39502,9 @@
                     </a:bodyPr>
                     <a:lstStyle/>
                     <a:p>
-                      <a:pPr algn="l"/>
+                      <a:pPr algn="l">
+                        <a:buNone/>
+                      </a:pPr>
                       <a:r>
                         <a:rPr sz="682">
                           <a:solidFill>
@@ -34685,7 +39533,9 @@
                     </a:bodyPr>
                     <a:lstStyle/>
                     <a:p>
-                      <a:pPr algn="l"/>
+                      <a:pPr algn="l">
+                        <a:buNone/>
+                      </a:pPr>
                       <a:r>
                         <a:rPr sz="682">
                           <a:solidFill>
@@ -34712,7 +39562,9 @@
                     </a:bodyPr>
                     <a:lstStyle/>
                     <a:p>
-                      <a:pPr algn="l"/>
+                      <a:pPr algn="l">
+                        <a:buNone/>
+                      </a:pPr>
                       <a:r>
                         <a:rPr sz="682">
                           <a:solidFill>
@@ -34801,7 +39653,7 @@
       </p:sp>
       <p:graphicFrame>
         <p:nvGraphicFramePr>
-          <p:cNvPr id="37" name=""/>
+          <p:cNvPr id="40" name=""/>
           <p:cNvGraphicFramePr/>
           <p:nvPr/>
         </p:nvGraphicFramePr>
@@ -34827,7 +39679,9 @@
                     </a:bodyPr>
                     <a:lstStyle/>
                     <a:p>
-                      <a:pPr algn="ctr"/>
+                      <a:pPr algn="ctr">
+                        <a:buNone/>
+                      </a:pPr>
                       <a:r>
                         <a:rPr sz="713" b="1">
                           <a:solidFill>
@@ -34854,7 +39708,9 @@
                     </a:bodyPr>
                     <a:lstStyle/>
                     <a:p>
-                      <a:pPr algn="r"/>
+                      <a:pPr algn="r">
+                        <a:buNone/>
+                      </a:pPr>
                       <a:r>
                         <a:rPr sz="713" b="1">
                           <a:solidFill>
@@ -34881,7 +39737,9 @@
                     </a:bodyPr>
                     <a:lstStyle/>
                     <a:p>
-                      <a:pPr algn="r"/>
+                      <a:pPr algn="r">
+                        <a:buNone/>
+                      </a:pPr>
                       <a:r>
                         <a:rPr sz="713" b="1">
                           <a:solidFill>
@@ -34908,7 +39766,9 @@
                     </a:bodyPr>
                     <a:lstStyle/>
                     <a:p>
-                      <a:pPr algn="r"/>
+                      <a:pPr algn="r">
+                        <a:buNone/>
+                      </a:pPr>
                       <a:r>
                         <a:rPr sz="713" b="1">
                           <a:solidFill>
@@ -34937,7 +39797,9 @@
                     </a:bodyPr>
                     <a:lstStyle/>
                     <a:p>
-                      <a:pPr algn="ctr"/>
+                      <a:pPr algn="ctr">
+                        <a:buNone/>
+                      </a:pPr>
                       <a:r>
                         <a:rPr sz="690">
                           <a:solidFill>
@@ -34964,7 +39826,9 @@
                     </a:bodyPr>
                     <a:lstStyle/>
                     <a:p>
-                      <a:pPr algn="r"/>
+                      <a:pPr algn="r">
+                        <a:buNone/>
+                      </a:pPr>
                       <a:r>
                         <a:rPr sz="690">
                           <a:solidFill>
@@ -34991,7 +39855,9 @@
                     </a:bodyPr>
                     <a:lstStyle/>
                     <a:p>
-                      <a:pPr algn="r"/>
+                      <a:pPr algn="r">
+                        <a:buNone/>
+                      </a:pPr>
                       <a:r>
                         <a:rPr sz="690">
                           <a:solidFill>
@@ -35018,7 +39884,9 @@
                     </a:bodyPr>
                     <a:lstStyle/>
                     <a:p>
-                      <a:pPr algn="r"/>
+                      <a:pPr algn="r">
+                        <a:buNone/>
+                      </a:pPr>
                       <a:r>
                         <a:rPr sz="690">
                           <a:solidFill>
@@ -35047,7 +39915,9 @@
                     </a:bodyPr>
                     <a:lstStyle/>
                     <a:p>
-                      <a:pPr algn="ctr"/>
+                      <a:pPr algn="ctr">
+                        <a:buNone/>
+                      </a:pPr>
                       <a:r>
                         <a:rPr sz="690">
                           <a:solidFill>
@@ -35074,7 +39944,9 @@
                     </a:bodyPr>
                     <a:lstStyle/>
                     <a:p>
-                      <a:pPr algn="r"/>
+                      <a:pPr algn="r">
+                        <a:buNone/>
+                      </a:pPr>
                       <a:r>
                         <a:rPr sz="690">
                           <a:solidFill>
@@ -35101,7 +39973,9 @@
                     </a:bodyPr>
                     <a:lstStyle/>
                     <a:p>
-                      <a:pPr algn="r"/>
+                      <a:pPr algn="r">
+                        <a:buNone/>
+                      </a:pPr>
                       <a:r>
                         <a:rPr sz="690">
                           <a:solidFill>
@@ -35128,7 +40002,9 @@
                     </a:bodyPr>
                     <a:lstStyle/>
                     <a:p>
-                      <a:pPr algn="r"/>
+                      <a:pPr algn="r">
+                        <a:buNone/>
+                      </a:pPr>
                       <a:r>
                         <a:rPr sz="690">
                           <a:solidFill>
@@ -35157,7 +40033,9 @@
                     </a:bodyPr>
                     <a:lstStyle/>
                     <a:p>
-                      <a:pPr algn="ctr"/>
+                      <a:pPr algn="ctr">
+                        <a:buNone/>
+                      </a:pPr>
                       <a:r>
                         <a:rPr sz="690">
                           <a:solidFill>
@@ -35184,7 +40062,9 @@
                     </a:bodyPr>
                     <a:lstStyle/>
                     <a:p>
-                      <a:pPr algn="r"/>
+                      <a:pPr algn="r">
+                        <a:buNone/>
+                      </a:pPr>
                       <a:r>
                         <a:rPr sz="690">
                           <a:solidFill>
@@ -35211,7 +40091,9 @@
                     </a:bodyPr>
                     <a:lstStyle/>
                     <a:p>
-                      <a:pPr algn="r"/>
+                      <a:pPr algn="r">
+                        <a:buNone/>
+                      </a:pPr>
                       <a:r>
                         <a:rPr sz="690">
                           <a:solidFill>
@@ -35238,7 +40120,9 @@
                     </a:bodyPr>
                     <a:lstStyle/>
                     <a:p>
-                      <a:pPr algn="r"/>
+                      <a:pPr algn="r">
+                        <a:buNone/>
+                      </a:pPr>
                       <a:r>
                         <a:rPr sz="690">
                           <a:solidFill>
@@ -35267,7 +40151,9 @@
                     </a:bodyPr>
                     <a:lstStyle/>
                     <a:p>
-                      <a:pPr algn="ctr"/>
+                      <a:pPr algn="ctr">
+                        <a:buNone/>
+                      </a:pPr>
                       <a:r>
                         <a:rPr sz="690">
                           <a:solidFill>
@@ -35294,7 +40180,9 @@
                     </a:bodyPr>
                     <a:lstStyle/>
                     <a:p>
-                      <a:pPr algn="r"/>
+                      <a:pPr algn="r">
+                        <a:buNone/>
+                      </a:pPr>
                       <a:r>
                         <a:rPr sz="690">
                           <a:solidFill>
@@ -35321,7 +40209,9 @@
                     </a:bodyPr>
                     <a:lstStyle/>
                     <a:p>
-                      <a:pPr algn="r"/>
+                      <a:pPr algn="r">
+                        <a:buNone/>
+                      </a:pPr>
                       <a:r>
                         <a:rPr sz="690">
                           <a:solidFill>
@@ -35348,7 +40238,9 @@
                     </a:bodyPr>
                     <a:lstStyle/>
                     <a:p>
-                      <a:pPr algn="r"/>
+                      <a:pPr algn="r">
+                        <a:buNone/>
+                      </a:pPr>
                       <a:r>
                         <a:rPr sz="690">
                           <a:solidFill>
@@ -35377,7 +40269,9 @@
                     </a:bodyPr>
                     <a:lstStyle/>
                     <a:p>
-                      <a:pPr algn="ctr"/>
+                      <a:pPr algn="ctr">
+                        <a:buNone/>
+                      </a:pPr>
                       <a:r>
                         <a:rPr sz="690">
                           <a:solidFill>
@@ -35404,7 +40298,9 @@
                     </a:bodyPr>
                     <a:lstStyle/>
                     <a:p>
-                      <a:pPr algn="r"/>
+                      <a:pPr algn="r">
+                        <a:buNone/>
+                      </a:pPr>
                       <a:r>
                         <a:rPr sz="690">
                           <a:solidFill>
@@ -35431,7 +40327,9 @@
                     </a:bodyPr>
                     <a:lstStyle/>
                     <a:p>
-                      <a:pPr algn="r"/>
+                      <a:pPr algn="r">
+                        <a:buNone/>
+                      </a:pPr>
                       <a:r>
                         <a:rPr sz="690">
                           <a:solidFill>
@@ -35458,7 +40356,9 @@
                     </a:bodyPr>
                     <a:lstStyle/>
                     <a:p>
-                      <a:pPr algn="r"/>
+                      <a:pPr algn="r">
+                        <a:buNone/>
+                      </a:pPr>
                       <a:r>
                         <a:rPr sz="690">
                           <a:solidFill>
